--- a/exports/pptx/lessons/middle-module-11-multiplication-near-base/day-01-hook.pptx
+++ b/exports/pptx/lessons/middle-module-11-multiplication-near-base/day-01-hook.pptx
@@ -19,9 +19,14 @@
     <p:sldId id="267" r:id="rId13"/>
     <p:sldId id="268" r:id="rId14"/>
     <p:sldId id="269" r:id="rId15"/>
+    <p:sldId id="270" r:id="rId16"/>
+    <p:sldId id="271" r:id="rId17"/>
+    <p:sldId id="272" r:id="rId18"/>
+    <p:sldId id="273" r:id="rId19"/>
+    <p:sldId id="274" r:id="rId20"/>
   </p:sldIdLst>
   <p:notesMasterIdLst>
-    <p:notesMasterId r:id="rId16"/>
+    <p:notesMasterId r:id="rId21"/>
   </p:notesMasterIdLst>
   <p:sldSz cx="9144000" cy="5143500"/>
   <p:notesSz cx="5143500" cy="9144000"/>
@@ -979,6 +984,446 @@
             <a:fld id="{F7021451-1387-4CA6-816F-3879F97B5CBC}" type="slidenum">
               <a:rPr lang="en-US"/>
               <a:t>14</a:t>
+            </a:fld>
+            <a:endParaRPr lang="en-US"/>
+          </a:p>
+        </p:txBody>
+      </p:sp>
+    </p:spTree>
+    <p:extLst>
+      <p:ext uri="{BB962C8B-B14F-4D97-AF65-F5344CB8AC3E}">
+        <p14:creationId xmlns:p14="http://schemas.microsoft.com/office/powerpoint/2010/main" val="1024086991"/>
+      </p:ext>
+    </p:extLst>
+  </p:cSld>
+  <p:clrMapOvr>
+    <a:masterClrMapping/>
+  </p:clrMapOvr>
+</p:notes>
+</file>
+
+<file path=ppt/notesSlides/notesSlide15.xml><?xml version="1.0" encoding="utf-8"?>
+<p:notes xmlns:a="http://schemas.openxmlformats.org/drawingml/2006/main" xmlns:r="http://schemas.openxmlformats.org/officeDocument/2006/relationships" xmlns:p="http://schemas.openxmlformats.org/presentationml/2006/main">
+  <p:cSld>
+    <p:spTree>
+      <p:nvGrpSpPr>
+        <p:cNvPr id="1" name=""/>
+        <p:cNvGrpSpPr/>
+        <p:nvPr/>
+      </p:nvGrpSpPr>
+      <p:grpSpPr>
+        <a:xfrm>
+          <a:off x="0" y="0"/>
+          <a:ext cx="0" cy="0"/>
+          <a:chOff x="0" y="0"/>
+          <a:chExt cx="0" cy="0"/>
+        </a:xfrm>
+      </p:grpSpPr>
+      <p:sp>
+        <p:nvSpPr>
+          <p:cNvPr id="2" name="Slide Image Placeholder 1"/>
+          <p:cNvSpPr>
+            <a:spLocks noGrp="1" noRot="1" noChangeAspect="1"/>
+          </p:cNvSpPr>
+          <p:nvPr>
+            <p:ph type="sldImg"/>
+          </p:nvPr>
+        </p:nvSpPr>
+        <p:spPr/>
+      </p:sp>
+      <p:sp>
+        <p:nvSpPr>
+          <p:cNvPr id="3" name="Notes Placeholder 2"/>
+          <p:cNvSpPr>
+            <a:spLocks noGrp="1"/>
+          </p:cNvSpPr>
+          <p:nvPr>
+            <p:ph type="body" idx="1"/>
+          </p:nvPr>
+        </p:nvSpPr>
+        <p:spPr/>
+        <p:txBody>
+          <a:bodyPr/>
+          <a:lstStyle/>
+          <a:p>
+            <a:r>
+              <a:rPr lang="en-US" dirty="0"/>
+              <a:t/>
+            </a:r>
+            <a:endParaRPr lang="en-US" dirty="0"/>
+          </a:p>
+        </p:txBody>
+      </p:sp>
+      <p:sp>
+        <p:nvSpPr>
+          <p:cNvPr id="4" name="Slide Number Placeholder 3"/>
+          <p:cNvSpPr>
+            <a:spLocks noGrp="1"/>
+          </p:cNvSpPr>
+          <p:nvPr>
+            <p:ph type="sldNum" sz="quarter" idx="10"/>
+          </p:nvPr>
+        </p:nvSpPr>
+        <p:spPr/>
+        <p:txBody>
+          <a:bodyPr/>
+          <a:lstStyle/>
+          <a:p>
+            <a:fld id="{F7021451-1387-4CA6-816F-3879F97B5CBC}" type="slidenum">
+              <a:rPr lang="en-US"/>
+              <a:t>15</a:t>
+            </a:fld>
+            <a:endParaRPr lang="en-US"/>
+          </a:p>
+        </p:txBody>
+      </p:sp>
+    </p:spTree>
+    <p:extLst>
+      <p:ext uri="{BB962C8B-B14F-4D97-AF65-F5344CB8AC3E}">
+        <p14:creationId xmlns:p14="http://schemas.microsoft.com/office/powerpoint/2010/main" val="1024086991"/>
+      </p:ext>
+    </p:extLst>
+  </p:cSld>
+  <p:clrMapOvr>
+    <a:masterClrMapping/>
+  </p:clrMapOvr>
+</p:notes>
+</file>
+
+<file path=ppt/notesSlides/notesSlide16.xml><?xml version="1.0" encoding="utf-8"?>
+<p:notes xmlns:a="http://schemas.openxmlformats.org/drawingml/2006/main" xmlns:r="http://schemas.openxmlformats.org/officeDocument/2006/relationships" xmlns:p="http://schemas.openxmlformats.org/presentationml/2006/main">
+  <p:cSld>
+    <p:spTree>
+      <p:nvGrpSpPr>
+        <p:cNvPr id="1" name=""/>
+        <p:cNvGrpSpPr/>
+        <p:nvPr/>
+      </p:nvGrpSpPr>
+      <p:grpSpPr>
+        <a:xfrm>
+          <a:off x="0" y="0"/>
+          <a:ext cx="0" cy="0"/>
+          <a:chOff x="0" y="0"/>
+          <a:chExt cx="0" cy="0"/>
+        </a:xfrm>
+      </p:grpSpPr>
+      <p:sp>
+        <p:nvSpPr>
+          <p:cNvPr id="2" name="Slide Image Placeholder 1"/>
+          <p:cNvSpPr>
+            <a:spLocks noGrp="1" noRot="1" noChangeAspect="1"/>
+          </p:cNvSpPr>
+          <p:nvPr>
+            <p:ph type="sldImg"/>
+          </p:nvPr>
+        </p:nvSpPr>
+        <p:spPr/>
+      </p:sp>
+      <p:sp>
+        <p:nvSpPr>
+          <p:cNvPr id="3" name="Notes Placeholder 2"/>
+          <p:cNvSpPr>
+            <a:spLocks noGrp="1"/>
+          </p:cNvSpPr>
+          <p:nvPr>
+            <p:ph type="body" idx="1"/>
+          </p:nvPr>
+        </p:nvSpPr>
+        <p:spPr/>
+        <p:txBody>
+          <a:bodyPr/>
+          <a:lstStyle/>
+          <a:p>
+            <a:r>
+              <a:rPr lang="en-US" dirty="0"/>
+              <a:t/>
+            </a:r>
+            <a:endParaRPr lang="en-US" dirty="0"/>
+          </a:p>
+        </p:txBody>
+      </p:sp>
+      <p:sp>
+        <p:nvSpPr>
+          <p:cNvPr id="4" name="Slide Number Placeholder 3"/>
+          <p:cNvSpPr>
+            <a:spLocks noGrp="1"/>
+          </p:cNvSpPr>
+          <p:nvPr>
+            <p:ph type="sldNum" sz="quarter" idx="10"/>
+          </p:nvPr>
+        </p:nvSpPr>
+        <p:spPr/>
+        <p:txBody>
+          <a:bodyPr/>
+          <a:lstStyle/>
+          <a:p>
+            <a:fld id="{F7021451-1387-4CA6-816F-3879F97B5CBC}" type="slidenum">
+              <a:rPr lang="en-US"/>
+              <a:t>16</a:t>
+            </a:fld>
+            <a:endParaRPr lang="en-US"/>
+          </a:p>
+        </p:txBody>
+      </p:sp>
+    </p:spTree>
+    <p:extLst>
+      <p:ext uri="{BB962C8B-B14F-4D97-AF65-F5344CB8AC3E}">
+        <p14:creationId xmlns:p14="http://schemas.microsoft.com/office/powerpoint/2010/main" val="1024086991"/>
+      </p:ext>
+    </p:extLst>
+  </p:cSld>
+  <p:clrMapOvr>
+    <a:masterClrMapping/>
+  </p:clrMapOvr>
+</p:notes>
+</file>
+
+<file path=ppt/notesSlides/notesSlide17.xml><?xml version="1.0" encoding="utf-8"?>
+<p:notes xmlns:a="http://schemas.openxmlformats.org/drawingml/2006/main" xmlns:r="http://schemas.openxmlformats.org/officeDocument/2006/relationships" xmlns:p="http://schemas.openxmlformats.org/presentationml/2006/main">
+  <p:cSld>
+    <p:spTree>
+      <p:nvGrpSpPr>
+        <p:cNvPr id="1" name=""/>
+        <p:cNvGrpSpPr/>
+        <p:nvPr/>
+      </p:nvGrpSpPr>
+      <p:grpSpPr>
+        <a:xfrm>
+          <a:off x="0" y="0"/>
+          <a:ext cx="0" cy="0"/>
+          <a:chOff x="0" y="0"/>
+          <a:chExt cx="0" cy="0"/>
+        </a:xfrm>
+      </p:grpSpPr>
+      <p:sp>
+        <p:nvSpPr>
+          <p:cNvPr id="2" name="Slide Image Placeholder 1"/>
+          <p:cNvSpPr>
+            <a:spLocks noGrp="1" noRot="1" noChangeAspect="1"/>
+          </p:cNvSpPr>
+          <p:nvPr>
+            <p:ph type="sldImg"/>
+          </p:nvPr>
+        </p:nvSpPr>
+        <p:spPr/>
+      </p:sp>
+      <p:sp>
+        <p:nvSpPr>
+          <p:cNvPr id="3" name="Notes Placeholder 2"/>
+          <p:cNvSpPr>
+            <a:spLocks noGrp="1"/>
+          </p:cNvSpPr>
+          <p:nvPr>
+            <p:ph type="body" idx="1"/>
+          </p:nvPr>
+        </p:nvSpPr>
+        <p:spPr/>
+        <p:txBody>
+          <a:bodyPr/>
+          <a:lstStyle/>
+          <a:p>
+            <a:r>
+              <a:rPr lang="en-US" dirty="0"/>
+              <a:t/>
+            </a:r>
+            <a:endParaRPr lang="en-US" dirty="0"/>
+          </a:p>
+        </p:txBody>
+      </p:sp>
+      <p:sp>
+        <p:nvSpPr>
+          <p:cNvPr id="4" name="Slide Number Placeholder 3"/>
+          <p:cNvSpPr>
+            <a:spLocks noGrp="1"/>
+          </p:cNvSpPr>
+          <p:nvPr>
+            <p:ph type="sldNum" sz="quarter" idx="10"/>
+          </p:nvPr>
+        </p:nvSpPr>
+        <p:spPr/>
+        <p:txBody>
+          <a:bodyPr/>
+          <a:lstStyle/>
+          <a:p>
+            <a:fld id="{F7021451-1387-4CA6-816F-3879F97B5CBC}" type="slidenum">
+              <a:rPr lang="en-US"/>
+              <a:t>17</a:t>
+            </a:fld>
+            <a:endParaRPr lang="en-US"/>
+          </a:p>
+        </p:txBody>
+      </p:sp>
+    </p:spTree>
+    <p:extLst>
+      <p:ext uri="{BB962C8B-B14F-4D97-AF65-F5344CB8AC3E}">
+        <p14:creationId xmlns:p14="http://schemas.microsoft.com/office/powerpoint/2010/main" val="1024086991"/>
+      </p:ext>
+    </p:extLst>
+  </p:cSld>
+  <p:clrMapOvr>
+    <a:masterClrMapping/>
+  </p:clrMapOvr>
+</p:notes>
+</file>
+
+<file path=ppt/notesSlides/notesSlide18.xml><?xml version="1.0" encoding="utf-8"?>
+<p:notes xmlns:a="http://schemas.openxmlformats.org/drawingml/2006/main" xmlns:r="http://schemas.openxmlformats.org/officeDocument/2006/relationships" xmlns:p="http://schemas.openxmlformats.org/presentationml/2006/main">
+  <p:cSld>
+    <p:spTree>
+      <p:nvGrpSpPr>
+        <p:cNvPr id="1" name=""/>
+        <p:cNvGrpSpPr/>
+        <p:nvPr/>
+      </p:nvGrpSpPr>
+      <p:grpSpPr>
+        <a:xfrm>
+          <a:off x="0" y="0"/>
+          <a:ext cx="0" cy="0"/>
+          <a:chOff x="0" y="0"/>
+          <a:chExt cx="0" cy="0"/>
+        </a:xfrm>
+      </p:grpSpPr>
+      <p:sp>
+        <p:nvSpPr>
+          <p:cNvPr id="2" name="Slide Image Placeholder 1"/>
+          <p:cNvSpPr>
+            <a:spLocks noGrp="1" noRot="1" noChangeAspect="1"/>
+          </p:cNvSpPr>
+          <p:nvPr>
+            <p:ph type="sldImg"/>
+          </p:nvPr>
+        </p:nvSpPr>
+        <p:spPr/>
+      </p:sp>
+      <p:sp>
+        <p:nvSpPr>
+          <p:cNvPr id="3" name="Notes Placeholder 2"/>
+          <p:cNvSpPr>
+            <a:spLocks noGrp="1"/>
+          </p:cNvSpPr>
+          <p:nvPr>
+            <p:ph type="body" idx="1"/>
+          </p:nvPr>
+        </p:nvSpPr>
+        <p:spPr/>
+        <p:txBody>
+          <a:bodyPr/>
+          <a:lstStyle/>
+          <a:p>
+            <a:r>
+              <a:rPr lang="en-US" dirty="0"/>
+              <a:t/>
+            </a:r>
+            <a:endParaRPr lang="en-US" dirty="0"/>
+          </a:p>
+        </p:txBody>
+      </p:sp>
+      <p:sp>
+        <p:nvSpPr>
+          <p:cNvPr id="4" name="Slide Number Placeholder 3"/>
+          <p:cNvSpPr>
+            <a:spLocks noGrp="1"/>
+          </p:cNvSpPr>
+          <p:nvPr>
+            <p:ph type="sldNum" sz="quarter" idx="10"/>
+          </p:nvPr>
+        </p:nvSpPr>
+        <p:spPr/>
+        <p:txBody>
+          <a:bodyPr/>
+          <a:lstStyle/>
+          <a:p>
+            <a:fld id="{F7021451-1387-4CA6-816F-3879F97B5CBC}" type="slidenum">
+              <a:rPr lang="en-US"/>
+              <a:t>18</a:t>
+            </a:fld>
+            <a:endParaRPr lang="en-US"/>
+          </a:p>
+        </p:txBody>
+      </p:sp>
+    </p:spTree>
+    <p:extLst>
+      <p:ext uri="{BB962C8B-B14F-4D97-AF65-F5344CB8AC3E}">
+        <p14:creationId xmlns:p14="http://schemas.microsoft.com/office/powerpoint/2010/main" val="1024086991"/>
+      </p:ext>
+    </p:extLst>
+  </p:cSld>
+  <p:clrMapOvr>
+    <a:masterClrMapping/>
+  </p:clrMapOvr>
+</p:notes>
+</file>
+
+<file path=ppt/notesSlides/notesSlide19.xml><?xml version="1.0" encoding="utf-8"?>
+<p:notes xmlns:a="http://schemas.openxmlformats.org/drawingml/2006/main" xmlns:r="http://schemas.openxmlformats.org/officeDocument/2006/relationships" xmlns:p="http://schemas.openxmlformats.org/presentationml/2006/main">
+  <p:cSld>
+    <p:spTree>
+      <p:nvGrpSpPr>
+        <p:cNvPr id="1" name=""/>
+        <p:cNvGrpSpPr/>
+        <p:nvPr/>
+      </p:nvGrpSpPr>
+      <p:grpSpPr>
+        <a:xfrm>
+          <a:off x="0" y="0"/>
+          <a:ext cx="0" cy="0"/>
+          <a:chOff x="0" y="0"/>
+          <a:chExt cx="0" cy="0"/>
+        </a:xfrm>
+      </p:grpSpPr>
+      <p:sp>
+        <p:nvSpPr>
+          <p:cNvPr id="2" name="Slide Image Placeholder 1"/>
+          <p:cNvSpPr>
+            <a:spLocks noGrp="1" noRot="1" noChangeAspect="1"/>
+          </p:cNvSpPr>
+          <p:nvPr>
+            <p:ph type="sldImg"/>
+          </p:nvPr>
+        </p:nvSpPr>
+        <p:spPr/>
+      </p:sp>
+      <p:sp>
+        <p:nvSpPr>
+          <p:cNvPr id="3" name="Notes Placeholder 2"/>
+          <p:cNvSpPr>
+            <a:spLocks noGrp="1"/>
+          </p:cNvSpPr>
+          <p:nvPr>
+            <p:ph type="body" idx="1"/>
+          </p:nvPr>
+        </p:nvSpPr>
+        <p:spPr/>
+        <p:txBody>
+          <a:bodyPr/>
+          <a:lstStyle/>
+          <a:p>
+            <a:r>
+              <a:rPr lang="en-US" dirty="0"/>
+              <a:t/>
+            </a:r>
+            <a:endParaRPr lang="en-US" dirty="0"/>
+          </a:p>
+        </p:txBody>
+      </p:sp>
+      <p:sp>
+        <p:nvSpPr>
+          <p:cNvPr id="4" name="Slide Number Placeholder 3"/>
+          <p:cNvSpPr>
+            <a:spLocks noGrp="1"/>
+          </p:cNvSpPr>
+          <p:nvPr>
+            <p:ph type="sldNum" sz="quarter" idx="10"/>
+          </p:nvPr>
+        </p:nvSpPr>
+        <p:spPr/>
+        <p:txBody>
+          <a:bodyPr/>
+          <a:lstStyle/>
+          <a:p>
+            <a:fld id="{F7021451-1387-4CA6-816F-3879F97B5CBC}" type="slidenum">
+              <a:rPr lang="en-US"/>
+              <a:t>19</a:t>
             </a:fld>
             <a:endParaRPr lang="en-US"/>
           </a:p>
@@ -2278,194 +2723,6 @@
         </p:nvSpPr>
         <p:spPr>
           <a:xfrm>
-            <a:off x="406301" y="1223963"/>
-            <a:ext cx="8498026" cy="274290"/>
-          </a:xfrm>
-          <a:prstGeom prst="rect">
-            <a:avLst/>
-          </a:prstGeom>
-          <a:noFill/>
-          <a:ln/>
-        </p:spPr>
-        <p:txBody>
-          <a:bodyPr wrap="square" lIns="0" tIns="0" rIns="0" bIns="0" rtlCol="0" anchor="t"/>
-          <a:lstStyle/>
-          <a:p>
-            <a:pPr algn="l" indent="0" marL="0">
-              <a:lnSpc>
-                <a:spcPts val="2160"/>
-              </a:lnSpc>
-              <a:spcBef>
-                <a:spcPts val="600"/>
-              </a:spcBef>
-              <a:spcAft>
-                <a:spcPts val="800"/>
-              </a:spcAft>
-              <a:buNone/>
-            </a:pPr>
-            <a:r>
-              <a:rPr lang="en-US" sz="1800" b="1" dirty="0">
-                <a:solidFill>
-                  <a:srgbClr val="FE4447"/>
-                </a:solidFill>
-                <a:latin typeface="Georgia" pitchFamily="34" charset="0"/>
-                <a:ea typeface="Georgia" pitchFamily="34" charset="-122"/>
-                <a:cs typeface="Georgia" pitchFamily="34" charset="-120"/>
-              </a:rPr>
-              <a:t>Learning objective</a:t>
-            </a:r>
-            <a:endParaRPr lang="en-US" sz="1800" dirty="0"/>
-          </a:p>
-        </p:txBody>
-      </p:sp>
-      <p:sp>
-        <p:nvSpPr>
-          <p:cNvPr id="6" name="Text 4"/>
-          <p:cNvSpPr/>
-          <p:nvPr/>
-        </p:nvSpPr>
-        <p:spPr>
-          <a:xfrm>
-            <a:off x="406301" y="1637854"/>
-            <a:ext cx="8498026" cy="436066"/>
-          </a:xfrm>
-          <a:prstGeom prst="rect">
-            <a:avLst/>
-          </a:prstGeom>
-          <a:noFill/>
-          <a:ln/>
-        </p:spPr>
-        <p:txBody>
-          <a:bodyPr wrap="square" lIns="0" tIns="0" rIns="0" bIns="0" rtlCol="0" anchor="t"/>
-          <a:lstStyle/>
-          <a:p>
-            <a:pPr algn="l" indent="0" marL="0">
-              <a:lnSpc>
-                <a:spcPts val="1680"/>
-              </a:lnSpc>
-              <a:spcBef>
-                <a:spcPts val="300"/>
-              </a:spcBef>
-              <a:spcAft>
-                <a:spcPts val="300"/>
-              </a:spcAft>
-              <a:buNone/>
-            </a:pPr>
-            <a:r>
-              <a:rPr lang="en-US" sz="1200" dirty="0">
-                <a:solidFill>
-                  <a:srgbClr val="1C2833"/>
-                </a:solidFill>
-                <a:latin typeface="Arial" pitchFamily="34" charset="0"/>
-                <a:ea typeface="Arial" pitchFamily="34" charset="-122"/>
-                <a:cs typeface="Arial" pitchFamily="34" charset="-120"/>
-              </a:rPr>
-              <a:t>By the end of this lesson, students will record a personal baseline time for </a:t>
-            </a:r>
-            <a:pPr algn="l" indent="0" marL="0">
-              <a:lnSpc>
-                <a:spcPts val="1680"/>
-              </a:lnSpc>
-              <a:spcBef>
-                <a:spcPts val="300"/>
-              </a:spcBef>
-              <a:spcAft>
-                <a:spcPts val="300"/>
-              </a:spcAft>
-              <a:buNone/>
-            </a:pPr>
-            <a:r>
-              <a:rPr lang="en-US" sz="1200" dirty="0">
-                <a:solidFill>
-                  <a:srgbClr val="1C2833"/>
-                </a:solidFill>
-                <a:latin typeface="Arial" pitchFamily="34" charset="0"/>
-                <a:ea typeface="Arial" pitchFamily="34" charset="-122"/>
-                <a:cs typeface="Arial" pitchFamily="34" charset="-120"/>
-              </a:rPr>
-              <a:t>97 × 96</a:t>
-            </a:r>
-            <a:pPr algn="l" indent="0" marL="0">
-              <a:lnSpc>
-                <a:spcPts val="1680"/>
-              </a:lnSpc>
-              <a:spcBef>
-                <a:spcPts val="300"/>
-              </a:spcBef>
-              <a:spcAft>
-                <a:spcPts val="300"/>
-              </a:spcAft>
-              <a:buNone/>
-            </a:pPr>
-            <a:r>
-              <a:rPr lang="en-US" sz="1200" dirty="0">
-                <a:solidFill>
-                  <a:srgbClr val="1C2833"/>
-                </a:solidFill>
-                <a:latin typeface="Arial" pitchFamily="34" charset="0"/>
-                <a:ea typeface="Arial" pitchFamily="34" charset="-122"/>
-                <a:cs typeface="Arial" pitchFamily="34" charset="-120"/>
-              </a:rPr>
-              <a:t> solved by long multiplication, and will have seen the </a:t>
-            </a:r>
-            <a:pPr algn="l" indent="0" marL="0">
-              <a:lnSpc>
-                <a:spcPts val="1680"/>
-              </a:lnSpc>
-              <a:spcBef>
-                <a:spcPts val="300"/>
-              </a:spcBef>
-              <a:spcAft>
-                <a:spcPts val="300"/>
-              </a:spcAft>
-              <a:buNone/>
-            </a:pPr>
-            <a:r>
-              <a:rPr lang="en-US" sz="1200" i="1" dirty="0">
-                <a:solidFill>
-                  <a:srgbClr val="1C2833"/>
-                </a:solidFill>
-                <a:latin typeface="Arial" pitchFamily="34" charset="0"/>
-                <a:ea typeface="Arial" pitchFamily="34" charset="-122"/>
-                <a:cs typeface="Arial" pitchFamily="34" charset="-120"/>
-              </a:rPr>
-              <a:t>Nikhilam</a:t>
-            </a:r>
-            <a:pPr algn="l" indent="0" marL="0">
-              <a:lnSpc>
-                <a:spcPts val="1680"/>
-              </a:lnSpc>
-              <a:spcBef>
-                <a:spcPts val="300"/>
-              </a:spcBef>
-              <a:spcAft>
-                <a:spcPts val="300"/>
-              </a:spcAft>
-              <a:buNone/>
-            </a:pPr>
-            <a:r>
-              <a:rPr lang="en-US" sz="1200" dirty="0">
-                <a:solidFill>
-                  <a:srgbClr val="1C2833"/>
-                </a:solidFill>
-                <a:latin typeface="Arial" pitchFamily="34" charset="0"/>
-                <a:ea typeface="Arial" pitchFamily="34" charset="-122"/>
-                <a:cs typeface="Arial" pitchFamily="34" charset="-120"/>
-              </a:rPr>
-              <a:t> method produce the same answer in under 5 seconds.</a:t>
-            </a:r>
-            <a:endParaRPr lang="en-US" sz="1200" dirty="0"/>
-          </a:p>
-        </p:txBody>
-      </p:sp>
-      <p:sp>
-        <p:nvSpPr>
-          <p:cNvPr id="7" name="Text 5"/>
-          <p:cNvSpPr/>
-          <p:nvPr/>
-        </p:nvSpPr>
-        <p:spPr>
-          <a:xfrm>
             <a:off x="406301" y="4434929"/>
             <a:ext cx="8498026" cy="213271"/>
           </a:xfrm>
@@ -2610,7 +2867,7 @@
                 <a:ea typeface="Georgia" pitchFamily="34" charset="-122"/>
                 <a:cs typeface="Georgia" pitchFamily="34" charset="-120"/>
               </a:rPr>
-              <a:t>Student-facing content</a:t>
+              <a:t>Teacher demonstration (10 min) (cont.)</a:t>
             </a:r>
             <a:endParaRPr lang="en-US" sz="1800" dirty="0"/>
           </a:p>
@@ -2624,50 +2881,249 @@
         </p:nvSpPr>
         <p:spPr>
           <a:xfrm>
-            <a:off x="406301" y="883593"/>
-            <a:ext cx="8331398" cy="2400300"/>
-          </a:xfrm>
-          <a:prstGeom prst="rect">
-            <a:avLst/>
-          </a:prstGeom>
-          <a:solidFill>
-            <a:srgbClr val="F4F8F9"/>
-          </a:solidFill>
-          <a:ln/>
-        </p:spPr>
-        <p:txBody>
-          <a:bodyPr wrap="square" rtlCol="0" anchor="ctr"/>
-          <a:lstStyle/>
-          <a:p>
-            <a:pPr indent="0" marL="0">
-              <a:buNone/>
-            </a:pPr>
-            <a:endParaRPr lang="en-US" dirty="0"/>
-          </a:p>
-        </p:txBody>
-      </p:sp>
-      <p:sp>
-        <p:nvSpPr>
-          <p:cNvPr id="5" name="Shape 3"/>
-          <p:cNvSpPr/>
-          <p:nvPr/>
-        </p:nvSpPr>
-        <p:spPr>
-          <a:xfrm>
-            <a:off x="434876" y="883593"/>
-            <a:ext cx="0" cy="2400300"/>
-          </a:xfrm>
-          <a:prstGeom prst="line">
+            <a:off x="634901" y="883593"/>
+            <a:ext cx="8102798" cy="487561"/>
+          </a:xfrm>
+          <a:prstGeom prst="rect">
             <a:avLst/>
           </a:prstGeom>
           <a:noFill/>
-          <a:ln w="57150">
-            <a:solidFill>
-              <a:srgbClr val="FE4447"/>
-            </a:solidFill>
-            <a:prstDash val="solid"/>
-          </a:ln>
-        </p:spPr>
+          <a:ln/>
+        </p:spPr>
+        <p:txBody>
+          <a:bodyPr wrap="square" lIns="0" tIns="0" rIns="0" bIns="0" rtlCol="0" anchor="t"/>
+          <a:lstStyle/>
+          <a:p>
+            <a:pPr algn="l" marL="342900" indent="-342900">
+              <a:lnSpc>
+                <a:spcPts val="1620"/>
+              </a:lnSpc>
+              <a:spcAft>
+                <a:spcPts val="300"/>
+              </a:spcAft>
+              <a:buSzPct val="100000"/>
+              <a:buChar char="•"/>
+            </a:pPr>
+            <a:r>
+              <a:rPr lang="en-US" sz="1200" b="1" dirty="0">
+                <a:solidFill>
+                  <a:srgbClr val="1C2833"/>
+                </a:solidFill>
+                <a:latin typeface="Arial" pitchFamily="34" charset="0"/>
+                <a:ea typeface="Arial" pitchFamily="34" charset="-122"/>
+                <a:cs typeface="Arial" pitchFamily="34" charset="-120"/>
+              </a:rPr>
+              <a:t>Step 2: Cross-subtract for the LEFT part.</a:t>
+            </a:r>
+            <a:pPr algn="l" indent="0" marL="0">
+              <a:lnSpc>
+                <a:spcPts val="1620"/>
+              </a:lnSpc>
+              <a:spcAft>
+                <a:spcPts val="300"/>
+              </a:spcAft>
+              <a:buNone/>
+            </a:pPr>
+            <a:r>
+              <a:rPr lang="en-US" sz="1200" dirty="0">
+                <a:solidFill>
+                  <a:srgbClr val="1C2833"/>
+                </a:solidFill>
+                <a:latin typeface="Arial" pitchFamily="34" charset="0"/>
+                <a:ea typeface="Arial" pitchFamily="34" charset="-122"/>
+                <a:cs typeface="Arial" pitchFamily="34" charset="-120"/>
+              </a:rPr>
+              <a:t> "Take one number minus the </a:t>
+            </a:r>
+            <a:pPr algn="l" indent="0" marL="0">
+              <a:lnSpc>
+                <a:spcPts val="1620"/>
+              </a:lnSpc>
+              <a:spcAft>
+                <a:spcPts val="300"/>
+              </a:spcAft>
+              <a:buNone/>
+            </a:pPr>
+            <a:r>
+              <a:rPr lang="en-US" sz="1200" i="1" dirty="0">
+                <a:solidFill>
+                  <a:srgbClr val="1C2833"/>
+                </a:solidFill>
+                <a:latin typeface="Arial" pitchFamily="34" charset="0"/>
+                <a:ea typeface="Arial" pitchFamily="34" charset="-122"/>
+                <a:cs typeface="Arial" pitchFamily="34" charset="-120"/>
+              </a:rPr>
+              <a:t>other</a:t>
+            </a:r>
+            <a:pPr algn="l" indent="0" marL="0">
+              <a:lnSpc>
+                <a:spcPts val="1620"/>
+              </a:lnSpc>
+              <a:spcAft>
+                <a:spcPts val="300"/>
+              </a:spcAft>
+              <a:buNone/>
+            </a:pPr>
+            <a:r>
+              <a:rPr lang="en-US" sz="1200" dirty="0">
+                <a:solidFill>
+                  <a:srgbClr val="1C2833"/>
+                </a:solidFill>
+                <a:latin typeface="Arial" pitchFamily="34" charset="0"/>
+                <a:ea typeface="Arial" pitchFamily="34" charset="-122"/>
+                <a:cs typeface="Arial" pitchFamily="34" charset="-120"/>
+              </a:rPr>
+              <a:t> number's deficit. 97 − 4 = </a:t>
+            </a:r>
+            <a:pPr algn="l" indent="0" marL="0">
+              <a:lnSpc>
+                <a:spcPts val="1620"/>
+              </a:lnSpc>
+              <a:spcAft>
+                <a:spcPts val="300"/>
+              </a:spcAft>
+              <a:buNone/>
+            </a:pPr>
+            <a:r>
+              <a:rPr lang="en-US" sz="1200" b="1" dirty="0">
+                <a:solidFill>
+                  <a:srgbClr val="1C2833"/>
+                </a:solidFill>
+                <a:latin typeface="Arial" pitchFamily="34" charset="0"/>
+                <a:ea typeface="Arial" pitchFamily="34" charset="-122"/>
+                <a:cs typeface="Arial" pitchFamily="34" charset="-120"/>
+              </a:rPr>
+              <a:t>93</a:t>
+            </a:r>
+            <a:pPr algn="l" indent="0" marL="0">
+              <a:lnSpc>
+                <a:spcPts val="1620"/>
+              </a:lnSpc>
+              <a:spcAft>
+                <a:spcPts val="300"/>
+              </a:spcAft>
+              <a:buNone/>
+            </a:pPr>
+            <a:r>
+              <a:rPr lang="en-US" sz="1200" dirty="0">
+                <a:solidFill>
+                  <a:srgbClr val="1C2833"/>
+                </a:solidFill>
+                <a:latin typeface="Arial" pitchFamily="34" charset="0"/>
+                <a:ea typeface="Arial" pitchFamily="34" charset="-122"/>
+                <a:cs typeface="Arial" pitchFamily="34" charset="-120"/>
+              </a:rPr>
+              <a:t>. (Equivalently: 96 − 3 = 93. Either cross gives the same answer.)"</a:t>
+            </a:r>
+            <a:endParaRPr lang="en-US" sz="1200" dirty="0"/>
+          </a:p>
+        </p:txBody>
+      </p:sp>
+      <p:sp>
+        <p:nvSpPr>
+          <p:cNvPr id="5" name="Text 3"/>
+          <p:cNvSpPr/>
+          <p:nvPr/>
+        </p:nvSpPr>
+        <p:spPr>
+          <a:xfrm>
+            <a:off x="634901" y="1472654"/>
+            <a:ext cx="8102798" cy="281880"/>
+          </a:xfrm>
+          <a:prstGeom prst="rect">
+            <a:avLst/>
+          </a:prstGeom>
+          <a:noFill/>
+          <a:ln/>
+        </p:spPr>
+        <p:txBody>
+          <a:bodyPr wrap="square" lIns="0" tIns="0" rIns="0" bIns="0" rtlCol="0" anchor="t"/>
+          <a:lstStyle/>
+          <a:p>
+            <a:pPr algn="l" marL="342900" indent="-342900">
+              <a:lnSpc>
+                <a:spcPts val="1620"/>
+              </a:lnSpc>
+              <a:spcAft>
+                <a:spcPts val="300"/>
+              </a:spcAft>
+              <a:buSzPct val="100000"/>
+              <a:buChar char="•"/>
+            </a:pPr>
+            <a:r>
+              <a:rPr lang="en-US" sz="1200" b="1" dirty="0">
+                <a:solidFill>
+                  <a:srgbClr val="1C2833"/>
+                </a:solidFill>
+                <a:latin typeface="Arial" pitchFamily="34" charset="0"/>
+                <a:ea typeface="Arial" pitchFamily="34" charset="-122"/>
+                <a:cs typeface="Arial" pitchFamily="34" charset="-120"/>
+              </a:rPr>
+              <a:t>Step 3: Multiply the deficits for the RIGHT part.</a:t>
+            </a:r>
+            <a:pPr algn="l" indent="0" marL="0">
+              <a:lnSpc>
+                <a:spcPts val="1620"/>
+              </a:lnSpc>
+              <a:spcAft>
+                <a:spcPts val="300"/>
+              </a:spcAft>
+              <a:buNone/>
+            </a:pPr>
+            <a:r>
+              <a:rPr lang="en-US" sz="1200" dirty="0">
+                <a:solidFill>
+                  <a:srgbClr val="1C2833"/>
+                </a:solidFill>
+                <a:latin typeface="Arial" pitchFamily="34" charset="0"/>
+                <a:ea typeface="Arial" pitchFamily="34" charset="-122"/>
+                <a:cs typeface="Arial" pitchFamily="34" charset="-120"/>
+              </a:rPr>
+              <a:t> "3 × 4 = </a:t>
+            </a:r>
+            <a:pPr algn="l" indent="0" marL="0">
+              <a:lnSpc>
+                <a:spcPts val="1620"/>
+              </a:lnSpc>
+              <a:spcAft>
+                <a:spcPts val="300"/>
+              </a:spcAft>
+              <a:buNone/>
+            </a:pPr>
+            <a:r>
+              <a:rPr lang="en-US" sz="1200" b="1" dirty="0">
+                <a:solidFill>
+                  <a:srgbClr val="1C2833"/>
+                </a:solidFill>
+                <a:latin typeface="Arial" pitchFamily="34" charset="0"/>
+                <a:ea typeface="Arial" pitchFamily="34" charset="-122"/>
+                <a:cs typeface="Arial" pitchFamily="34" charset="-120"/>
+              </a:rPr>
+              <a:t>12</a:t>
+            </a:r>
+            <a:pPr algn="l" indent="0" marL="0">
+              <a:lnSpc>
+                <a:spcPts val="1620"/>
+              </a:lnSpc>
+              <a:spcAft>
+                <a:spcPts val="300"/>
+              </a:spcAft>
+              <a:buNone/>
+            </a:pPr>
+            <a:r>
+              <a:rPr lang="en-US" sz="1200" dirty="0">
+                <a:solidFill>
+                  <a:srgbClr val="1C2833"/>
+                </a:solidFill>
+                <a:latin typeface="Arial" pitchFamily="34" charset="0"/>
+                <a:ea typeface="Arial" pitchFamily="34" charset="-122"/>
+                <a:cs typeface="Arial" pitchFamily="34" charset="-120"/>
+              </a:rPr>
+              <a:t>."</a:t>
+            </a:r>
+            <a:endParaRPr lang="en-US" sz="1200" dirty="0"/>
+          </a:p>
+        </p:txBody>
       </p:sp>
       <p:sp>
         <p:nvSpPr>
@@ -2677,8 +3133,8 @@
         </p:nvSpPr>
         <p:spPr>
           <a:xfrm>
-            <a:off x="692051" y="1074093"/>
-            <a:ext cx="7973389" cy="230981"/>
+            <a:off x="634901" y="1856036"/>
+            <a:ext cx="8102798" cy="281880"/>
           </a:xfrm>
           <a:prstGeom prst="rect">
             <a:avLst/>
@@ -2690,504 +3146,94 @@
           <a:bodyPr wrap="square" lIns="0" tIns="0" rIns="0" bIns="0" rtlCol="0" anchor="t"/>
           <a:lstStyle/>
           <a:p>
-            <a:pPr algn="l" indent="0" marL="0">
-              <a:lnSpc>
-                <a:spcPts val="1820"/>
-              </a:lnSpc>
-              <a:spcBef>
-                <a:spcPts val="300"/>
-              </a:spcBef>
-              <a:spcAft>
-                <a:spcPts val="300"/>
-              </a:spcAft>
-              <a:buNone/>
-            </a:pPr>
-            <a:r>
-              <a:rPr lang="en-US" sz="1300" b="1" i="1" dirty="0">
-                <a:solidFill>
-                  <a:srgbClr val="1C2833"/>
-                </a:solidFill>
-                <a:latin typeface="Georgia" pitchFamily="34" charset="0"/>
-                <a:ea typeface="Georgia" pitchFamily="34" charset="-122"/>
-                <a:cs typeface="Georgia" pitchFamily="34" charset="-120"/>
-              </a:rPr>
-              <a:t>The Nikhilam Method — Multiplication Near a Base</a:t>
-            </a:r>
-            <a:endParaRPr lang="en-US" sz="1300" dirty="0"/>
+            <a:pPr algn="l" marL="342900" indent="-342900">
+              <a:lnSpc>
+                <a:spcPts val="1620"/>
+              </a:lnSpc>
+              <a:spcAft>
+                <a:spcPts val="300"/>
+              </a:spcAft>
+              <a:buSzPct val="100000"/>
+              <a:buChar char="•"/>
+            </a:pPr>
+            <a:r>
+              <a:rPr lang="en-US" sz="1200" b="1" dirty="0">
+                <a:solidFill>
+                  <a:srgbClr val="1C2833"/>
+                </a:solidFill>
+                <a:latin typeface="Arial" pitchFamily="34" charset="0"/>
+                <a:ea typeface="Arial" pitchFamily="34" charset="-122"/>
+                <a:cs typeface="Arial" pitchFamily="34" charset="-120"/>
+              </a:rPr>
+              <a:t>Step 4: Stick them together.</a:t>
+            </a:r>
+            <a:pPr algn="l" indent="0" marL="0">
+              <a:lnSpc>
+                <a:spcPts val="1620"/>
+              </a:lnSpc>
+              <a:spcAft>
+                <a:spcPts val="300"/>
+              </a:spcAft>
+              <a:buNone/>
+            </a:pPr>
+            <a:r>
+              <a:rPr lang="en-US" sz="1200" dirty="0">
+                <a:solidFill>
+                  <a:srgbClr val="1C2833"/>
+                </a:solidFill>
+                <a:latin typeface="Arial" pitchFamily="34" charset="0"/>
+                <a:ea typeface="Arial" pitchFamily="34" charset="-122"/>
+                <a:cs typeface="Arial" pitchFamily="34" charset="-120"/>
+              </a:rPr>
+              <a:t> "93 on the left, 12 on the right → </a:t>
+            </a:r>
+            <a:pPr algn="l" indent="0" marL="0">
+              <a:lnSpc>
+                <a:spcPts val="1620"/>
+              </a:lnSpc>
+              <a:spcAft>
+                <a:spcPts val="300"/>
+              </a:spcAft>
+              <a:buNone/>
+            </a:pPr>
+            <a:r>
+              <a:rPr lang="en-US" sz="1200" b="1" dirty="0">
+                <a:solidFill>
+                  <a:srgbClr val="1C2833"/>
+                </a:solidFill>
+                <a:latin typeface="Arial" pitchFamily="34" charset="0"/>
+                <a:ea typeface="Arial" pitchFamily="34" charset="-122"/>
+                <a:cs typeface="Arial" pitchFamily="34" charset="-120"/>
+              </a:rPr>
+              <a:t>9312</a:t>
+            </a:r>
+            <a:pPr algn="l" indent="0" marL="0">
+              <a:lnSpc>
+                <a:spcPts val="1620"/>
+              </a:lnSpc>
+              <a:spcAft>
+                <a:spcPts val="300"/>
+              </a:spcAft>
+              <a:buNone/>
+            </a:pPr>
+            <a:r>
+              <a:rPr lang="en-US" sz="1200" dirty="0">
+                <a:solidFill>
+                  <a:srgbClr val="1C2833"/>
+                </a:solidFill>
+                <a:latin typeface="Arial" pitchFamily="34" charset="0"/>
+                <a:ea typeface="Arial" pitchFamily="34" charset="-122"/>
+                <a:cs typeface="Arial" pitchFamily="34" charset="-120"/>
+              </a:rPr>
+              <a:t>."</a:t>
+            </a:r>
+            <a:endParaRPr lang="en-US" sz="1200" dirty="0"/>
           </a:p>
         </p:txBody>
       </p:sp>
       <p:sp>
         <p:nvSpPr>
           <p:cNvPr id="7" name="Text 5"/>
-          <p:cNvSpPr/>
-          <p:nvPr/>
-        </p:nvSpPr>
-        <p:spPr>
-          <a:xfrm>
-            <a:off x="692051" y="1343174"/>
-            <a:ext cx="7973389" cy="230981"/>
-          </a:xfrm>
-          <a:prstGeom prst="rect">
-            <a:avLst/>
-          </a:prstGeom>
-          <a:noFill/>
-          <a:ln/>
-        </p:spPr>
-        <p:txBody>
-          <a:bodyPr wrap="square" lIns="0" tIns="0" rIns="0" bIns="0" rtlCol="0" anchor="t"/>
-          <a:lstStyle/>
-          <a:p>
-            <a:pPr algn="l" indent="0" marL="0">
-              <a:lnSpc>
-                <a:spcPts val="1820"/>
-              </a:lnSpc>
-              <a:spcBef>
-                <a:spcPts val="300"/>
-              </a:spcBef>
-              <a:spcAft>
-                <a:spcPts val="300"/>
-              </a:spcAft>
-              <a:buNone/>
-            </a:pPr>
-            <a:r>
-              <a:rPr lang="en-US" sz="1300" i="1" dirty="0">
-                <a:solidFill>
-                  <a:srgbClr val="1C2833"/>
-                </a:solidFill>
-                <a:latin typeface="Georgia" pitchFamily="34" charset="0"/>
-                <a:ea typeface="Georgia" pitchFamily="34" charset="-122"/>
-                <a:cs typeface="Georgia" pitchFamily="34" charset="-120"/>
-              </a:rPr>
-              <a:t>When both numbers are near a power of 10 (10, 100, 1000):</a:t>
-            </a:r>
-            <a:endParaRPr lang="en-US" sz="1300" dirty="0"/>
-          </a:p>
-        </p:txBody>
-      </p:sp>
-      <p:sp>
-        <p:nvSpPr>
-          <p:cNvPr id="8" name="Text 6"/>
-          <p:cNvSpPr/>
-          <p:nvPr/>
-        </p:nvSpPr>
-        <p:spPr>
-          <a:xfrm>
-            <a:off x="692051" y="1612255"/>
-            <a:ext cx="7973389" cy="692944"/>
-          </a:xfrm>
-          <a:prstGeom prst="rect">
-            <a:avLst/>
-          </a:prstGeom>
-          <a:noFill/>
-          <a:ln/>
-        </p:spPr>
-        <p:txBody>
-          <a:bodyPr wrap="square" lIns="0" tIns="0" rIns="0" bIns="0" rtlCol="0" anchor="t"/>
-          <a:lstStyle/>
-          <a:p>
-            <a:pPr algn="l" indent="0" marL="0">
-              <a:lnSpc>
-                <a:spcPts val="1820"/>
-              </a:lnSpc>
-              <a:spcBef>
-                <a:spcPts val="300"/>
-              </a:spcBef>
-              <a:spcAft>
-                <a:spcPts val="300"/>
-              </a:spcAft>
-              <a:buNone/>
-            </a:pPr>
-            <a:r>
-              <a:rPr lang="en-US" sz="1300" dirty="0">
-                <a:solidFill>
-                  <a:srgbClr val="1C2833"/>
-                </a:solidFill>
-                <a:latin typeface="Georgia" pitchFamily="34" charset="0"/>
-                <a:ea typeface="Georgia" pitchFamily="34" charset="-122"/>
-                <a:cs typeface="Georgia" pitchFamily="34" charset="-120"/>
-              </a:rPr>
-              <a:t>1. </a:t>
-            </a:r>
-            <a:pPr algn="l" indent="0" marL="0">
-              <a:lnSpc>
-                <a:spcPts val="1820"/>
-              </a:lnSpc>
-              <a:spcBef>
-                <a:spcPts val="300"/>
-              </a:spcBef>
-              <a:spcAft>
-                <a:spcPts val="300"/>
-              </a:spcAft>
-              <a:buNone/>
-            </a:pPr>
-            <a:r>
-              <a:rPr lang="en-US" sz="1300" b="1" i="1" dirty="0">
-                <a:solidFill>
-                  <a:srgbClr val="1C2833"/>
-                </a:solidFill>
-                <a:latin typeface="Georgia" pitchFamily="34" charset="0"/>
-                <a:ea typeface="Georgia" pitchFamily="34" charset="-122"/>
-                <a:cs typeface="Georgia" pitchFamily="34" charset="-120"/>
-              </a:rPr>
-              <a:t>Find the deficit</a:t>
-            </a:r>
-            <a:pPr algn="l" indent="0" marL="0">
-              <a:lnSpc>
-                <a:spcPts val="1820"/>
-              </a:lnSpc>
-              <a:spcBef>
-                <a:spcPts val="300"/>
-              </a:spcBef>
-              <a:spcAft>
-                <a:spcPts val="300"/>
-              </a:spcAft>
-              <a:buNone/>
-            </a:pPr>
-            <a:r>
-              <a:rPr lang="en-US" sz="1300" dirty="0">
-                <a:solidFill>
-                  <a:srgbClr val="1C2833"/>
-                </a:solidFill>
-                <a:latin typeface="Georgia" pitchFamily="34" charset="0"/>
-                <a:ea typeface="Georgia" pitchFamily="34" charset="-122"/>
-                <a:cs typeface="Georgia" pitchFamily="34" charset="-120"/>
-              </a:rPr>
-              <a:t> of each from the base. 2. </a:t>
-            </a:r>
-            <a:pPr algn="l" indent="0" marL="0">
-              <a:lnSpc>
-                <a:spcPts val="1820"/>
-              </a:lnSpc>
-              <a:spcBef>
-                <a:spcPts val="300"/>
-              </a:spcBef>
-              <a:spcAft>
-                <a:spcPts val="300"/>
-              </a:spcAft>
-              <a:buNone/>
-            </a:pPr>
-            <a:r>
-              <a:rPr lang="en-US" sz="1300" b="1" i="1" dirty="0">
-                <a:solidFill>
-                  <a:srgbClr val="1C2833"/>
-                </a:solidFill>
-                <a:latin typeface="Georgia" pitchFamily="34" charset="0"/>
-                <a:ea typeface="Georgia" pitchFamily="34" charset="-122"/>
-                <a:cs typeface="Georgia" pitchFamily="34" charset="-120"/>
-              </a:rPr>
-              <a:t>Cross-subtract</a:t>
-            </a:r>
-            <a:pPr algn="l" indent="0" marL="0">
-              <a:lnSpc>
-                <a:spcPts val="1820"/>
-              </a:lnSpc>
-              <a:spcBef>
-                <a:spcPts val="300"/>
-              </a:spcBef>
-              <a:spcAft>
-                <a:spcPts val="300"/>
-              </a:spcAft>
-              <a:buNone/>
-            </a:pPr>
-            <a:r>
-              <a:rPr lang="en-US" sz="1300" dirty="0">
-                <a:solidFill>
-                  <a:srgbClr val="1C2833"/>
-                </a:solidFill>
-                <a:latin typeface="Georgia" pitchFamily="34" charset="0"/>
-                <a:ea typeface="Georgia" pitchFamily="34" charset="-122"/>
-                <a:cs typeface="Georgia" pitchFamily="34" charset="-120"/>
-              </a:rPr>
-              <a:t> for the LEFT part (one number minus the </a:t>
-            </a:r>
-            <a:pPr algn="l" indent="0" marL="0">
-              <a:lnSpc>
-                <a:spcPts val="1820"/>
-              </a:lnSpc>
-              <a:spcBef>
-                <a:spcPts val="300"/>
-              </a:spcBef>
-              <a:spcAft>
-                <a:spcPts val="300"/>
-              </a:spcAft>
-              <a:buNone/>
-            </a:pPr>
-            <a:r>
-              <a:rPr lang="en-US" sz="1300" i="1" dirty="0">
-                <a:solidFill>
-                  <a:srgbClr val="1C2833"/>
-                </a:solidFill>
-                <a:latin typeface="Georgia" pitchFamily="34" charset="0"/>
-                <a:ea typeface="Georgia" pitchFamily="34" charset="-122"/>
-                <a:cs typeface="Georgia" pitchFamily="34" charset="-120"/>
-              </a:rPr>
-              <a:t>other's</a:t>
-            </a:r>
-            <a:pPr algn="l" indent="0" marL="0">
-              <a:lnSpc>
-                <a:spcPts val="1820"/>
-              </a:lnSpc>
-              <a:spcBef>
-                <a:spcPts val="300"/>
-              </a:spcBef>
-              <a:spcAft>
-                <a:spcPts val="300"/>
-              </a:spcAft>
-              <a:buNone/>
-            </a:pPr>
-            <a:r>
-              <a:rPr lang="en-US" sz="1300" dirty="0">
-                <a:solidFill>
-                  <a:srgbClr val="1C2833"/>
-                </a:solidFill>
-                <a:latin typeface="Georgia" pitchFamily="34" charset="0"/>
-                <a:ea typeface="Georgia" pitchFamily="34" charset="-122"/>
-                <a:cs typeface="Georgia" pitchFamily="34" charset="-120"/>
-              </a:rPr>
-              <a:t> deficit). 3. </a:t>
-            </a:r>
-            <a:pPr algn="l" indent="0" marL="0">
-              <a:lnSpc>
-                <a:spcPts val="1820"/>
-              </a:lnSpc>
-              <a:spcBef>
-                <a:spcPts val="300"/>
-              </a:spcBef>
-              <a:spcAft>
-                <a:spcPts val="300"/>
-              </a:spcAft>
-              <a:buNone/>
-            </a:pPr>
-            <a:r>
-              <a:rPr lang="en-US" sz="1300" b="1" i="1" dirty="0">
-                <a:solidFill>
-                  <a:srgbClr val="1C2833"/>
-                </a:solidFill>
-                <a:latin typeface="Georgia" pitchFamily="34" charset="0"/>
-                <a:ea typeface="Georgia" pitchFamily="34" charset="-122"/>
-                <a:cs typeface="Georgia" pitchFamily="34" charset="-120"/>
-              </a:rPr>
-              <a:t>Multiply the deficits</a:t>
-            </a:r>
-            <a:pPr algn="l" indent="0" marL="0">
-              <a:lnSpc>
-                <a:spcPts val="1820"/>
-              </a:lnSpc>
-              <a:spcBef>
-                <a:spcPts val="300"/>
-              </a:spcBef>
-              <a:spcAft>
-                <a:spcPts val="300"/>
-              </a:spcAft>
-              <a:buNone/>
-            </a:pPr>
-            <a:r>
-              <a:rPr lang="en-US" sz="1300" dirty="0">
-                <a:solidFill>
-                  <a:srgbClr val="1C2833"/>
-                </a:solidFill>
-                <a:latin typeface="Georgia" pitchFamily="34" charset="0"/>
-                <a:ea typeface="Georgia" pitchFamily="34" charset="-122"/>
-                <a:cs typeface="Georgia" pitchFamily="34" charset="-120"/>
-              </a:rPr>
-              <a:t> for the RIGHT part. 4. </a:t>
-            </a:r>
-            <a:pPr algn="l" indent="0" marL="0">
-              <a:lnSpc>
-                <a:spcPts val="1820"/>
-              </a:lnSpc>
-              <a:spcBef>
-                <a:spcPts val="300"/>
-              </a:spcBef>
-              <a:spcAft>
-                <a:spcPts val="300"/>
-              </a:spcAft>
-              <a:buNone/>
-            </a:pPr>
-            <a:r>
-              <a:rPr lang="en-US" sz="1300" b="1" i="1" dirty="0">
-                <a:solidFill>
-                  <a:srgbClr val="1C2833"/>
-                </a:solidFill>
-                <a:latin typeface="Georgia" pitchFamily="34" charset="0"/>
-                <a:ea typeface="Georgia" pitchFamily="34" charset="-122"/>
-                <a:cs typeface="Georgia" pitchFamily="34" charset="-120"/>
-              </a:rPr>
-              <a:t>Concatenate</a:t>
-            </a:r>
-            <a:pPr algn="l" indent="0" marL="0">
-              <a:lnSpc>
-                <a:spcPts val="1820"/>
-              </a:lnSpc>
-              <a:spcBef>
-                <a:spcPts val="300"/>
-              </a:spcBef>
-              <a:spcAft>
-                <a:spcPts val="300"/>
-              </a:spcAft>
-              <a:buNone/>
-            </a:pPr>
-            <a:r>
-              <a:rPr lang="en-US" sz="1300" dirty="0">
-                <a:solidFill>
-                  <a:srgbClr val="1C2833"/>
-                </a:solidFill>
-                <a:latin typeface="Georgia" pitchFamily="34" charset="0"/>
-                <a:ea typeface="Georgia" pitchFamily="34" charset="-122"/>
-                <a:cs typeface="Georgia" pitchFamily="34" charset="-120"/>
-              </a:rPr>
-              <a:t>: LEFT | RIGHT = the answer.</a:t>
-            </a:r>
-            <a:endParaRPr lang="en-US" sz="1300" dirty="0"/>
-          </a:p>
-        </p:txBody>
-      </p:sp>
-      <p:sp>
-        <p:nvSpPr>
-          <p:cNvPr id="9" name="Text 7"/>
-          <p:cNvSpPr/>
-          <p:nvPr/>
-        </p:nvSpPr>
-        <p:spPr>
-          <a:xfrm>
-            <a:off x="692051" y="2343299"/>
-            <a:ext cx="7973389" cy="481012"/>
-          </a:xfrm>
-          <a:prstGeom prst="rect">
-            <a:avLst/>
-          </a:prstGeom>
-          <a:noFill/>
-          <a:ln/>
-        </p:spPr>
-        <p:txBody>
-          <a:bodyPr wrap="square" lIns="0" tIns="0" rIns="0" bIns="0" rtlCol="0" anchor="t"/>
-          <a:lstStyle/>
-          <a:p>
-            <a:pPr algn="l" indent="0" marL="0">
-              <a:lnSpc>
-                <a:spcPts val="1820"/>
-              </a:lnSpc>
-              <a:spcBef>
-                <a:spcPts val="300"/>
-              </a:spcBef>
-              <a:spcAft>
-                <a:spcPts val="300"/>
-              </a:spcAft>
-              <a:buNone/>
-            </a:pPr>
-            <a:r>
-              <a:rPr lang="en-US" sz="1300" dirty="0">
-                <a:solidFill>
-                  <a:srgbClr val="1C2833"/>
-                </a:solidFill>
-                <a:latin typeface="Georgia" pitchFamily="34" charset="0"/>
-                <a:ea typeface="Georgia" pitchFamily="34" charset="-122"/>
-                <a:cs typeface="Georgia" pitchFamily="34" charset="-120"/>
-              </a:rPr>
-              <a:t>Today's baseline: my time on </a:t>
-            </a:r>
-            <a:pPr algn="l" indent="0" marL="0">
-              <a:lnSpc>
-                <a:spcPts val="1820"/>
-              </a:lnSpc>
-              <a:spcBef>
-                <a:spcPts val="300"/>
-              </a:spcBef>
-              <a:spcAft>
-                <a:spcPts val="300"/>
-              </a:spcAft>
-              <a:buNone/>
-            </a:pPr>
-            <a:r>
-              <a:rPr lang="en-US" sz="1300" i="1" dirty="0">
-                <a:solidFill>
-                  <a:srgbClr val="1C2833"/>
-                </a:solidFill>
-                <a:latin typeface="Georgia" pitchFamily="34" charset="0"/>
-                <a:ea typeface="Georgia" pitchFamily="34" charset="-122"/>
-                <a:cs typeface="Georgia" pitchFamily="34" charset="-120"/>
-              </a:rPr>
-              <a:t>97 × 96</a:t>
-            </a:r>
-            <a:pPr algn="l" indent="0" marL="0">
-              <a:lnSpc>
-                <a:spcPts val="1820"/>
-              </a:lnSpc>
-              <a:spcBef>
-                <a:spcPts val="300"/>
-              </a:spcBef>
-              <a:spcAft>
-                <a:spcPts val="300"/>
-              </a:spcAft>
-              <a:buNone/>
-            </a:pPr>
-            <a:r>
-              <a:rPr lang="en-US" sz="1300" dirty="0">
-                <a:solidFill>
-                  <a:srgbClr val="1C2833"/>
-                </a:solidFill>
-                <a:latin typeface="Georgia" pitchFamily="34" charset="0"/>
-                <a:ea typeface="Georgia" pitchFamily="34" charset="-122"/>
-                <a:cs typeface="Georgia" pitchFamily="34" charset="-120"/>
-              </a:rPr>
-              <a:t> using long multiplication = ____ seconds. My time using Nikhilam (first try) = ____ seconds.</a:t>
-            </a:r>
-            <a:endParaRPr lang="en-US" sz="1300" dirty="0"/>
-          </a:p>
-        </p:txBody>
-      </p:sp>
-      <p:sp>
-        <p:nvSpPr>
-          <p:cNvPr id="10" name="Text 8"/>
-          <p:cNvSpPr/>
-          <p:nvPr/>
-        </p:nvSpPr>
-        <p:spPr>
-          <a:xfrm>
-            <a:off x="692051" y="2862411"/>
-            <a:ext cx="7973389" cy="230981"/>
-          </a:xfrm>
-          <a:prstGeom prst="rect">
-            <a:avLst/>
-          </a:prstGeom>
-          <a:noFill/>
-          <a:ln/>
-        </p:spPr>
-        <p:txBody>
-          <a:bodyPr wrap="square" lIns="0" tIns="0" rIns="0" bIns="0" rtlCol="0" anchor="t"/>
-          <a:lstStyle/>
-          <a:p>
-            <a:pPr algn="l" indent="0" marL="0">
-              <a:lnSpc>
-                <a:spcPts val="1820"/>
-              </a:lnSpc>
-              <a:spcBef>
-                <a:spcPts val="300"/>
-              </a:spcBef>
-              <a:spcAft>
-                <a:spcPts val="300"/>
-              </a:spcAft>
-              <a:buNone/>
-            </a:pPr>
-            <a:r>
-              <a:rPr lang="en-US" sz="1300" i="1" dirty="0">
-                <a:solidFill>
-                  <a:srgbClr val="1C2833"/>
-                </a:solidFill>
-                <a:latin typeface="Georgia" pitchFamily="34" charset="0"/>
-                <a:ea typeface="Georgia" pitchFamily="34" charset="-122"/>
-                <a:cs typeface="Georgia" pitchFamily="34" charset="-120"/>
-              </a:rPr>
-              <a:t>I expect this gap to FLIP by Day 9.</a:t>
-            </a:r>
-            <a:endParaRPr lang="en-US" sz="1300" dirty="0"/>
-          </a:p>
-        </p:txBody>
-      </p:sp>
-      <p:sp>
-        <p:nvSpPr>
-          <p:cNvPr id="11" name="Text 9"/>
           <p:cNvSpPr/>
           <p:nvPr/>
         </p:nvSpPr>
@@ -3337,7 +3383,7 @@
                 <a:ea typeface="Georgia" pitchFamily="34" charset="-122"/>
                 <a:cs typeface="Georgia" pitchFamily="34" charset="-120"/>
               </a:rPr>
-              <a:t>Homework</a:t>
+              <a:t>Teacher demonstration (10 min) (cont.)</a:t>
             </a:r>
             <a:endParaRPr lang="en-US" sz="1800" dirty="0"/>
           </a:p>
@@ -3351,13 +3397,66 @@
         </p:nvSpPr>
         <p:spPr>
           <a:xfrm>
-            <a:off x="406301" y="870942"/>
-            <a:ext cx="8498026" cy="426541"/>
-          </a:xfrm>
-          <a:prstGeom prst="rect">
+            <a:off x="406301" y="883593"/>
+            <a:ext cx="8331398" cy="952202"/>
+          </a:xfrm>
+          <a:prstGeom prst="rect">
+            <a:avLst/>
+          </a:prstGeom>
+          <a:solidFill>
+            <a:srgbClr val="F4F8F9"/>
+          </a:solidFill>
+          <a:ln/>
+        </p:spPr>
+        <p:txBody>
+          <a:bodyPr wrap="square" rtlCol="0" anchor="ctr"/>
+          <a:lstStyle/>
+          <a:p>
+            <a:pPr indent="0" marL="0">
+              <a:buNone/>
+            </a:pPr>
+            <a:endParaRPr lang="en-US" dirty="0"/>
+          </a:p>
+        </p:txBody>
+      </p:sp>
+      <p:sp>
+        <p:nvSpPr>
+          <p:cNvPr id="5" name="Shape 3"/>
+          <p:cNvSpPr/>
+          <p:nvPr/>
+        </p:nvSpPr>
+        <p:spPr>
+          <a:xfrm>
+            <a:off x="430113" y="883593"/>
+            <a:ext cx="0" cy="952202"/>
+          </a:xfrm>
+          <a:prstGeom prst="line">
             <a:avLst/>
           </a:prstGeom>
           <a:noFill/>
+          <a:ln w="47625">
+            <a:solidFill>
+              <a:srgbClr val="277884"/>
+            </a:solidFill>
+            <a:prstDash val="solid"/>
+          </a:ln>
+        </p:spPr>
+      </p:sp>
+      <p:sp>
+        <p:nvSpPr>
+          <p:cNvPr id="6" name="Text 4"/>
+          <p:cNvSpPr/>
+          <p:nvPr/>
+        </p:nvSpPr>
+        <p:spPr>
+          <a:xfrm>
+            <a:off x="631627" y="1010543"/>
+            <a:ext cx="8086939" cy="174575"/>
+          </a:xfrm>
+          <a:prstGeom prst="rect">
+            <a:avLst/>
+          </a:prstGeom>
+          <a:noFill/>
           <a:ln/>
         </p:spPr>
         <p:txBody>
@@ -3366,15 +3465,181 @@
           <a:p>
             <a:pPr algn="l" indent="0" marL="0">
               <a:lnSpc>
-                <a:spcPts val="1680"/>
-              </a:lnSpc>
-              <a:spcBef>
-                <a:spcPts val="300"/>
-              </a:spcBef>
-              <a:spcAft>
-                <a:spcPts val="300"/>
-              </a:spcAft>
-              <a:buNone/>
+                <a:spcPts val="1375"/>
+              </a:lnSpc>
+              <a:buNone/>
+            </a:pPr>
+            <a:r>
+              <a:rPr lang="en-US" sz="1100" dirty="0">
+                <a:solidFill>
+                  <a:srgbClr val="1C2833"/>
+                </a:solidFill>
+                <a:latin typeface="Courier New" pitchFamily="34" charset="0"/>
+                <a:ea typeface="Courier New" pitchFamily="34" charset="-122"/>
+                <a:cs typeface="Courier New" pitchFamily="34" charset="-120"/>
+              </a:rPr>
+              <a:t>97 │ −3</a:t>
+            </a:r>
+            <a:endParaRPr lang="en-US" sz="1100" dirty="0"/>
+          </a:p>
+        </p:txBody>
+      </p:sp>
+      <p:sp>
+        <p:nvSpPr>
+          <p:cNvPr id="7" name="Text 5"/>
+          <p:cNvSpPr/>
+          <p:nvPr/>
+        </p:nvSpPr>
+        <p:spPr>
+          <a:xfrm>
+            <a:off x="631627" y="1185118"/>
+            <a:ext cx="8086939" cy="174575"/>
+          </a:xfrm>
+          <a:prstGeom prst="rect">
+            <a:avLst/>
+          </a:prstGeom>
+          <a:noFill/>
+          <a:ln/>
+        </p:spPr>
+        <p:txBody>
+          <a:bodyPr wrap="square" lIns="0" tIns="0" rIns="0" bIns="0" rtlCol="0" anchor="t"/>
+          <a:lstStyle/>
+          <a:p>
+            <a:pPr algn="l" indent="0" marL="0">
+              <a:lnSpc>
+                <a:spcPts val="1375"/>
+              </a:lnSpc>
+              <a:buNone/>
+            </a:pPr>
+            <a:r>
+              <a:rPr lang="en-US" sz="1100" dirty="0">
+                <a:solidFill>
+                  <a:srgbClr val="1C2833"/>
+                </a:solidFill>
+                <a:latin typeface="Courier New" pitchFamily="34" charset="0"/>
+                <a:ea typeface="Courier New" pitchFamily="34" charset="-122"/>
+                <a:cs typeface="Courier New" pitchFamily="34" charset="-120"/>
+              </a:rPr>
+              <a:t>96 │ −4</a:t>
+            </a:r>
+            <a:endParaRPr lang="en-US" sz="1100" dirty="0"/>
+          </a:p>
+        </p:txBody>
+      </p:sp>
+      <p:sp>
+        <p:nvSpPr>
+          <p:cNvPr id="8" name="Text 6"/>
+          <p:cNvSpPr/>
+          <p:nvPr/>
+        </p:nvSpPr>
+        <p:spPr>
+          <a:xfrm>
+            <a:off x="631627" y="1359694"/>
+            <a:ext cx="8086939" cy="174575"/>
+          </a:xfrm>
+          <a:prstGeom prst="rect">
+            <a:avLst/>
+          </a:prstGeom>
+          <a:noFill/>
+          <a:ln/>
+        </p:spPr>
+        <p:txBody>
+          <a:bodyPr wrap="square" lIns="0" tIns="0" rIns="0" bIns="0" rtlCol="0" anchor="t"/>
+          <a:lstStyle/>
+          <a:p>
+            <a:pPr algn="l" indent="0" marL="0">
+              <a:lnSpc>
+                <a:spcPts val="1375"/>
+              </a:lnSpc>
+              <a:buNone/>
+            </a:pPr>
+            <a:r>
+              <a:rPr lang="en-US" sz="1100" dirty="0">
+                <a:solidFill>
+                  <a:srgbClr val="1C2833"/>
+                </a:solidFill>
+                <a:latin typeface="Courier New" pitchFamily="34" charset="0"/>
+                <a:ea typeface="Courier New" pitchFamily="34" charset="-122"/>
+                <a:cs typeface="Courier New" pitchFamily="34" charset="-120"/>
+              </a:rPr>
+              <a:t>─────┼────</a:t>
+            </a:r>
+            <a:endParaRPr lang="en-US" sz="1100" dirty="0"/>
+          </a:p>
+        </p:txBody>
+      </p:sp>
+      <p:sp>
+        <p:nvSpPr>
+          <p:cNvPr id="9" name="Text 7"/>
+          <p:cNvSpPr/>
+          <p:nvPr/>
+        </p:nvSpPr>
+        <p:spPr>
+          <a:xfrm>
+            <a:off x="631627" y="1534269"/>
+            <a:ext cx="8086939" cy="174575"/>
+          </a:xfrm>
+          <a:prstGeom prst="rect">
+            <a:avLst/>
+          </a:prstGeom>
+          <a:noFill/>
+          <a:ln/>
+        </p:spPr>
+        <p:txBody>
+          <a:bodyPr wrap="square" lIns="0" tIns="0" rIns="0" bIns="0" rtlCol="0" anchor="t"/>
+          <a:lstStyle/>
+          <a:p>
+            <a:pPr algn="l" indent="0" marL="0">
+              <a:lnSpc>
+                <a:spcPts val="1375"/>
+              </a:lnSpc>
+              <a:buNone/>
+            </a:pPr>
+            <a:r>
+              <a:rPr lang="en-US" sz="1100" dirty="0">
+                <a:solidFill>
+                  <a:srgbClr val="1C2833"/>
+                </a:solidFill>
+                <a:latin typeface="Courier New" pitchFamily="34" charset="0"/>
+                <a:ea typeface="Courier New" pitchFamily="34" charset="-122"/>
+                <a:cs typeface="Courier New" pitchFamily="34" charset="-120"/>
+              </a:rPr>
+              <a:t>93 │ 12      → 9312</a:t>
+            </a:r>
+            <a:endParaRPr lang="en-US" sz="1100" dirty="0"/>
+          </a:p>
+        </p:txBody>
+      </p:sp>
+      <p:sp>
+        <p:nvSpPr>
+          <p:cNvPr id="10" name="Text 8"/>
+          <p:cNvSpPr/>
+          <p:nvPr/>
+        </p:nvSpPr>
+        <p:spPr>
+          <a:xfrm>
+            <a:off x="634901" y="1937296"/>
+            <a:ext cx="8102798" cy="281880"/>
+          </a:xfrm>
+          <a:prstGeom prst="rect">
+            <a:avLst/>
+          </a:prstGeom>
+          <a:noFill/>
+          <a:ln/>
+        </p:spPr>
+        <p:txBody>
+          <a:bodyPr wrap="square" lIns="0" tIns="0" rIns="0" bIns="0" rtlCol="0" anchor="t"/>
+          <a:lstStyle/>
+          <a:p>
+            <a:pPr algn="l" marL="342900" indent="-342900">
+              <a:lnSpc>
+                <a:spcPts val="1620"/>
+              </a:lnSpc>
+              <a:spcAft>
+                <a:spcPts val="300"/>
+              </a:spcAft>
+              <a:buSzPct val="100000"/>
+              <a:buChar char="•"/>
             </a:pPr>
             <a:r>
               <a:rPr lang="en-US" sz="1200" dirty="0">
@@ -3385,7 +3650,7 @@
                 <a:ea typeface="Arial" pitchFamily="34" charset="-122"/>
                 <a:cs typeface="Arial" pitchFamily="34" charset="-120"/>
               </a:rPr>
-              <a:t>– Practice the "complement to 10" reflex: write the deficit of each from 10.   – 7 → __, 8 → __, 9 → __, 6 → __, 5 → __, 4 → __, 3 → __, 2 → __, 1 → __. – Do all 9 in under 10 seconds.</a:t>
+              <a:t>Verify: long-multiplication gives 9312. ✓</a:t>
             </a:r>
             <a:endParaRPr lang="en-US" sz="1200" dirty="0"/>
           </a:p>
@@ -3393,7 +3658,7 @@
       </p:sp>
       <p:sp>
         <p:nvSpPr>
-          <p:cNvPr id="5" name="Text 3"/>
+          <p:cNvPr id="11" name="Text 9"/>
           <p:cNvSpPr/>
           <p:nvPr/>
         </p:nvSpPr>
@@ -3543,7 +3808,7 @@
                 <a:ea typeface="Georgia" pitchFamily="34" charset="-122"/>
                 <a:cs typeface="Georgia" pitchFamily="34" charset="-120"/>
               </a:rPr>
-              <a:t>Differentiation</a:t>
+              <a:t>Teacher demonstration (10 min) (cont.)</a:t>
             </a:r>
             <a:endParaRPr lang="en-US" sz="1800" dirty="0"/>
           </a:p>
@@ -3558,7 +3823,7 @@
         <p:spPr>
           <a:xfrm>
             <a:off x="634901" y="883593"/>
-            <a:ext cx="8102798" cy="750391"/>
+            <a:ext cx="8102798" cy="487561"/>
           </a:xfrm>
           <a:prstGeom prst="rect">
             <a:avLst/>
@@ -3581,86 +3846,6 @@
               <a:buChar char="•"/>
             </a:pPr>
             <a:r>
-              <a:rPr lang="en-US" sz="1200" b="1" dirty="0">
-                <a:solidFill>
-                  <a:srgbClr val="1C2833"/>
-                </a:solidFill>
-                <a:latin typeface="Arial" pitchFamily="34" charset="0"/>
-                <a:ea typeface="Arial" pitchFamily="34" charset="-122"/>
-                <a:cs typeface="Arial" pitchFamily="34" charset="-120"/>
-              </a:rPr>
-              <a:t>Tier up:</a:t>
-            </a:r>
-            <a:pPr algn="l" indent="0" marL="0">
-              <a:lnSpc>
-                <a:spcPts val="1620"/>
-              </a:lnSpc>
-              <a:spcAft>
-                <a:spcPts val="300"/>
-              </a:spcAft>
-              <a:buNone/>
-            </a:pPr>
-            <a:r>
-              <a:rPr lang="en-US" sz="1200" dirty="0">
-                <a:solidFill>
-                  <a:srgbClr val="1C2833"/>
-                </a:solidFill>
-                <a:latin typeface="Arial" pitchFamily="34" charset="0"/>
-                <a:ea typeface="Arial" pitchFamily="34" charset="-122"/>
-                <a:cs typeface="Arial" pitchFamily="34" charset="-120"/>
-              </a:rPr>
-              <a:t> Try </a:t>
-            </a:r>
-            <a:pPr algn="l" indent="0" marL="0">
-              <a:lnSpc>
-                <a:spcPts val="1620"/>
-              </a:lnSpc>
-              <a:spcAft>
-                <a:spcPts val="300"/>
-              </a:spcAft>
-              <a:buNone/>
-            </a:pPr>
-            <a:r>
-              <a:rPr lang="en-US" sz="1200" dirty="0">
-                <a:solidFill>
-                  <a:srgbClr val="1C2833"/>
-                </a:solidFill>
-                <a:latin typeface="Arial" pitchFamily="34" charset="0"/>
-                <a:ea typeface="Arial" pitchFamily="34" charset="-122"/>
-                <a:cs typeface="Arial" pitchFamily="34" charset="-120"/>
-              </a:rPr>
-              <a:t>103 × 104</a:t>
-            </a:r>
-            <a:pPr algn="l" indent="0" marL="0">
-              <a:lnSpc>
-                <a:spcPts val="1620"/>
-              </a:lnSpc>
-              <a:spcAft>
-                <a:spcPts val="300"/>
-              </a:spcAft>
-              <a:buNone/>
-            </a:pPr>
-            <a:r>
-              <a:rPr lang="en-US" sz="1200" dirty="0">
-                <a:solidFill>
-                  <a:srgbClr val="1C2833"/>
-                </a:solidFill>
-                <a:latin typeface="Arial" pitchFamily="34" charset="0"/>
-                <a:ea typeface="Arial" pitchFamily="34" charset="-122"/>
-                <a:cs typeface="Arial" pitchFamily="34" charset="-120"/>
-              </a:rPr>
-              <a:t> (both </a:t>
-            </a:r>
-            <a:pPr algn="l" indent="0" marL="0">
-              <a:lnSpc>
-                <a:spcPts val="1620"/>
-              </a:lnSpc>
-              <a:spcAft>
-                <a:spcPts val="300"/>
-              </a:spcAft>
-              <a:buNone/>
-            </a:pPr>
-            <a:r>
               <a:rPr lang="en-US" sz="1200" i="1" dirty="0">
                 <a:solidFill>
                   <a:srgbClr val="1C2833"/>
@@ -3669,111 +3854,7 @@
                 <a:ea typeface="Arial" pitchFamily="34" charset="-122"/>
                 <a:cs typeface="Arial" pitchFamily="34" charset="-120"/>
               </a:rPr>
-              <a:t>above</a:t>
-            </a:r>
-            <a:pPr algn="l" indent="0" marL="0">
-              <a:lnSpc>
-                <a:spcPts val="1620"/>
-              </a:lnSpc>
-              <a:spcAft>
-                <a:spcPts val="300"/>
-              </a:spcAft>
-              <a:buNone/>
-            </a:pPr>
-            <a:r>
-              <a:rPr lang="en-US" sz="1200" dirty="0">
-                <a:solidFill>
-                  <a:srgbClr val="1C2833"/>
-                </a:solidFill>
-                <a:latin typeface="Arial" pitchFamily="34" charset="0"/>
-                <a:ea typeface="Arial" pitchFamily="34" charset="-122"/>
-                <a:cs typeface="Arial" pitchFamily="34" charset="-120"/>
-              </a:rPr>
-              <a:t> 100). Note: instead of cross-subtract, you'll need to cross-</a:t>
-            </a:r>
-            <a:pPr algn="l" indent="0" marL="0">
-              <a:lnSpc>
-                <a:spcPts val="1620"/>
-              </a:lnSpc>
-              <a:spcAft>
-                <a:spcPts val="300"/>
-              </a:spcAft>
-              <a:buNone/>
-            </a:pPr>
-            <a:r>
-              <a:rPr lang="en-US" sz="1200" i="1" dirty="0">
-                <a:solidFill>
-                  <a:srgbClr val="1C2833"/>
-                </a:solidFill>
-                <a:latin typeface="Arial" pitchFamily="34" charset="0"/>
-                <a:ea typeface="Arial" pitchFamily="34" charset="-122"/>
-                <a:cs typeface="Arial" pitchFamily="34" charset="-120"/>
-              </a:rPr>
-              <a:t>add</a:t>
-            </a:r>
-            <a:pPr algn="l" indent="0" marL="0">
-              <a:lnSpc>
-                <a:spcPts val="1620"/>
-              </a:lnSpc>
-              <a:spcAft>
-                <a:spcPts val="300"/>
-              </a:spcAft>
-              <a:buNone/>
-            </a:pPr>
-            <a:r>
-              <a:rPr lang="en-US" sz="1200" dirty="0">
-                <a:solidFill>
-                  <a:srgbClr val="1C2833"/>
-                </a:solidFill>
-                <a:latin typeface="Arial" pitchFamily="34" charset="0"/>
-                <a:ea typeface="Arial" pitchFamily="34" charset="-122"/>
-                <a:cs typeface="Arial" pitchFamily="34" charset="-120"/>
-              </a:rPr>
-              <a:t>. See if you can work out the pattern before Day 4.</a:t>
-            </a:r>
-            <a:endParaRPr lang="en-US" sz="1200" dirty="0"/>
-          </a:p>
-          <a:p>
-            <a:pPr algn="l" marL="342900" indent="-342900">
-              <a:lnSpc>
-                <a:spcPts val="1620"/>
-              </a:lnSpc>
-              <a:spcAft>
-                <a:spcPts val="300"/>
-              </a:spcAft>
-              <a:buSzPct val="100000"/>
-              <a:buChar char="•"/>
-            </a:pPr>
-            <a:r>
-              <a:rPr lang="en-US" sz="1200" b="1" dirty="0">
-                <a:solidFill>
-                  <a:srgbClr val="1C2833"/>
-                </a:solidFill>
-                <a:latin typeface="Arial" pitchFamily="34" charset="0"/>
-                <a:ea typeface="Arial" pitchFamily="34" charset="-122"/>
-                <a:cs typeface="Arial" pitchFamily="34" charset="-120"/>
-              </a:rPr>
-              <a:t>Tier down:</a:t>
-            </a:r>
-            <a:pPr algn="l" indent="0" marL="0">
-              <a:lnSpc>
-                <a:spcPts val="1620"/>
-              </a:lnSpc>
-              <a:spcAft>
-                <a:spcPts val="300"/>
-              </a:spcAft>
-              <a:buNone/>
-            </a:pPr>
-            <a:r>
-              <a:rPr lang="en-US" sz="1200" dirty="0">
-                <a:solidFill>
-                  <a:srgbClr val="1C2833"/>
-                </a:solidFill>
-                <a:latin typeface="Arial" pitchFamily="34" charset="0"/>
-                <a:ea typeface="Arial" pitchFamily="34" charset="-122"/>
-                <a:cs typeface="Arial" pitchFamily="34" charset="-120"/>
-              </a:rPr>
-              <a:t> If 2-digit feels too fast, drop to single-digit near 10 (7 × 8, 6 × 9). We'll formally do this on Day 2.</a:t>
+              <a:t>"I never multiplied any 2-digit number by another 2-digit number. I only did 97 − 4 and 3 × 4. That's the entire trick — when both numbers are near a base."</a:t>
             </a:r>
             <a:endParaRPr lang="en-US" sz="1200" dirty="0"/>
           </a:p>
@@ -3931,7 +4012,7 @@
                 <a:ea typeface="Georgia" pitchFamily="34" charset="-122"/>
                 <a:cs typeface="Georgia" pitchFamily="34" charset="-120"/>
               </a:rPr>
-              <a:t>Teacher notes</a:t>
+              <a:t>Activity (15 min) — First try</a:t>
             </a:r>
             <a:endParaRPr lang="en-US" sz="1800" dirty="0"/>
           </a:p>
@@ -3945,8 +4026,8 @@
         </p:nvSpPr>
         <p:spPr>
           <a:xfrm>
-            <a:off x="406301" y="870942"/>
-            <a:ext cx="8498026" cy="1075879"/>
+            <a:off x="634901" y="883593"/>
+            <a:ext cx="8102798" cy="1032272"/>
           </a:xfrm>
           <a:prstGeom prst="rect">
             <a:avLst/>
@@ -3958,17 +4039,15 @@
           <a:bodyPr wrap="square" lIns="0" tIns="0" rIns="0" bIns="0" rtlCol="0" anchor="t"/>
           <a:lstStyle/>
           <a:p>
-            <a:pPr algn="l" indent="0" marL="0">
-              <a:lnSpc>
-                <a:spcPts val="1680"/>
-              </a:lnSpc>
-              <a:spcBef>
-                <a:spcPts val="300"/>
-              </a:spcBef>
-              <a:spcAft>
-                <a:spcPts val="300"/>
-              </a:spcAft>
-              <a:buNone/>
+            <a:pPr algn="l" marL="342900" indent="-342900">
+              <a:lnSpc>
+                <a:spcPts val="1620"/>
+              </a:lnSpc>
+              <a:spcAft>
+                <a:spcPts val="300"/>
+              </a:spcAft>
+              <a:buSzPct val="100000"/>
+              <a:buChar char="•"/>
             </a:pPr>
             <a:r>
               <a:rPr lang="en-US" sz="1200" dirty="0">
@@ -3979,42 +4058,20 @@
                 <a:ea typeface="Arial" pitchFamily="34" charset="-122"/>
                 <a:cs typeface="Arial" pitchFamily="34" charset="-120"/>
               </a:rPr>
-              <a:t>– The baseline time is the </a:t>
-            </a:r>
-            <a:pPr algn="l" indent="0" marL="0">
-              <a:lnSpc>
-                <a:spcPts val="1680"/>
-              </a:lnSpc>
-              <a:spcBef>
-                <a:spcPts val="300"/>
-              </a:spcBef>
-              <a:spcAft>
-                <a:spcPts val="300"/>
-              </a:spcAft>
-              <a:buNone/>
-            </a:pPr>
-            <a:r>
-              <a:rPr lang="en-US" sz="1200" i="1" dirty="0">
-                <a:solidFill>
-                  <a:srgbClr val="1C2833"/>
-                </a:solidFill>
-                <a:latin typeface="Arial" pitchFamily="34" charset="0"/>
-                <a:ea typeface="Arial" pitchFamily="34" charset="-122"/>
-                <a:cs typeface="Arial" pitchFamily="34" charset="-120"/>
-              </a:rPr>
-              <a:t>single most important</a:t>
-            </a:r>
-            <a:pPr algn="l" indent="0" marL="0">
-              <a:lnSpc>
-                <a:spcPts val="1680"/>
-              </a:lnSpc>
-              <a:spcBef>
-                <a:spcPts val="300"/>
-              </a:spcBef>
-              <a:spcAft>
-                <a:spcPts val="300"/>
-              </a:spcAft>
-              <a:buNone/>
+              <a:t>Hand each student a second sheet with four problems:</a:t>
+            </a:r>
+            <a:endParaRPr lang="en-US" sz="1200" dirty="0"/>
+          </a:p>
+          <a:p>
+            <a:pPr algn="l" marL="342900" indent="-342900">
+              <a:lnSpc>
+                <a:spcPts val="1620"/>
+              </a:lnSpc>
+              <a:spcAft>
+                <a:spcPts val="300"/>
+              </a:spcAft>
+              <a:buSzPct val="100000"/>
+              <a:buChar char="•"/>
             </a:pPr>
             <a:r>
               <a:rPr lang="en-US" sz="1200" dirty="0">
@@ -4025,38 +4082,12 @@
                 <a:ea typeface="Arial" pitchFamily="34" charset="-122"/>
                 <a:cs typeface="Arial" pitchFamily="34" charset="-120"/>
               </a:rPr>
-              <a:t> artefact of Day 1. Make sure every student records it honestly. Day 9's retest depends on it. – Don't promise a specific speedup. Say "you'll likely be faster by Day 9; how much depends on you." – Some students will ask "why does this work?" — defer to Day 7. </a:t>
-            </a:r>
-            <a:pPr algn="l" indent="0" marL="0">
-              <a:lnSpc>
-                <a:spcPts val="1680"/>
-              </a:lnSpc>
-              <a:spcBef>
-                <a:spcPts val="300"/>
-              </a:spcBef>
-              <a:spcAft>
-                <a:spcPts val="300"/>
-              </a:spcAft>
-              <a:buNone/>
-            </a:pPr>
-            <a:r>
-              <a:rPr lang="en-US" sz="1200" i="1" dirty="0">
-                <a:solidFill>
-                  <a:srgbClr val="1C2833"/>
-                </a:solidFill>
-                <a:latin typeface="Arial" pitchFamily="34" charset="0"/>
-                <a:ea typeface="Arial" pitchFamily="34" charset="-122"/>
-                <a:cs typeface="Arial" pitchFamily="34" charset="-120"/>
-              </a:rPr>
-              <a:t>"Great question. We'll prove it. For now, just notice that it does work."</a:t>
-            </a:r>
-            <a:pPr algn="l" indent="0" marL="0">
-              <a:lnSpc>
-                <a:spcPts val="1680"/>
-              </a:lnSpc>
-              <a:spcBef>
-                <a:spcPts val="300"/>
-              </a:spcBef>
+              <a:t>98 × 97</a:t>
+            </a:r>
+            <a:pPr algn="l" indent="0" marL="0">
+              <a:lnSpc>
+                <a:spcPts val="1620"/>
+              </a:lnSpc>
               <a:spcAft>
                 <a:spcPts val="300"/>
               </a:spcAft>
@@ -4071,15 +4102,12 @@
                 <a:ea typeface="Arial" pitchFamily="34" charset="-122"/>
                 <a:cs typeface="Arial" pitchFamily="34" charset="-120"/>
               </a:rPr>
-              <a:t> – A few students will try to short-cut and use </a:t>
-            </a:r>
-            <a:pPr algn="l" indent="0" marL="0">
-              <a:lnSpc>
-                <a:spcPts val="1680"/>
-              </a:lnSpc>
-              <a:spcBef>
-                <a:spcPts val="300"/>
-              </a:spcBef>
+              <a:t>, </a:t>
+            </a:r>
+            <a:pPr algn="l" indent="0" marL="0">
+              <a:lnSpc>
+                <a:spcPts val="1620"/>
+              </a:lnSpc>
               <a:spcAft>
                 <a:spcPts val="300"/>
               </a:spcAft>
@@ -4094,15 +4122,12 @@
                 <a:ea typeface="Arial" pitchFamily="34" charset="-122"/>
                 <a:cs typeface="Arial" pitchFamily="34" charset="-120"/>
               </a:rPr>
-              <a:t>−3 × −4</a:t>
-            </a:r>
-            <a:pPr algn="l" indent="0" marL="0">
-              <a:lnSpc>
-                <a:spcPts val="1680"/>
-              </a:lnSpc>
-              <a:spcBef>
-                <a:spcPts val="300"/>
-              </a:spcBef>
+              <a:t>96 × 95</a:t>
+            </a:r>
+            <a:pPr algn="l" indent="0" marL="0">
+              <a:lnSpc>
+                <a:spcPts val="1620"/>
+              </a:lnSpc>
               <a:spcAft>
                 <a:spcPts val="300"/>
               </a:spcAft>
@@ -4117,7 +4142,135 @@
                 <a:ea typeface="Arial" pitchFamily="34" charset="-122"/>
                 <a:cs typeface="Arial" pitchFamily="34" charset="-120"/>
               </a:rPr>
-              <a:t> as the right part, getting a sign-error. Wait until Day 5 for the mixed case. For today, all deficits are positive.</a:t>
+              <a:t>, </a:t>
+            </a:r>
+            <a:pPr algn="l" indent="0" marL="0">
+              <a:lnSpc>
+                <a:spcPts val="1620"/>
+              </a:lnSpc>
+              <a:spcAft>
+                <a:spcPts val="300"/>
+              </a:spcAft>
+              <a:buNone/>
+            </a:pPr>
+            <a:r>
+              <a:rPr lang="en-US" sz="1200" dirty="0">
+                <a:solidFill>
+                  <a:srgbClr val="1C2833"/>
+                </a:solidFill>
+                <a:latin typeface="Arial" pitchFamily="34" charset="0"/>
+                <a:ea typeface="Arial" pitchFamily="34" charset="-122"/>
+                <a:cs typeface="Arial" pitchFamily="34" charset="-120"/>
+              </a:rPr>
+              <a:t>99 × 99</a:t>
+            </a:r>
+            <a:pPr algn="l" indent="0" marL="0">
+              <a:lnSpc>
+                <a:spcPts val="1620"/>
+              </a:lnSpc>
+              <a:spcAft>
+                <a:spcPts val="300"/>
+              </a:spcAft>
+              <a:buNone/>
+            </a:pPr>
+            <a:r>
+              <a:rPr lang="en-US" sz="1200" dirty="0">
+                <a:solidFill>
+                  <a:srgbClr val="1C2833"/>
+                </a:solidFill>
+                <a:latin typeface="Arial" pitchFamily="34" charset="0"/>
+                <a:ea typeface="Arial" pitchFamily="34" charset="-122"/>
+                <a:cs typeface="Arial" pitchFamily="34" charset="-120"/>
+              </a:rPr>
+              <a:t>, </a:t>
+            </a:r>
+            <a:pPr algn="l" indent="0" marL="0">
+              <a:lnSpc>
+                <a:spcPts val="1620"/>
+              </a:lnSpc>
+              <a:spcAft>
+                <a:spcPts val="300"/>
+              </a:spcAft>
+              <a:buNone/>
+            </a:pPr>
+            <a:r>
+              <a:rPr lang="en-US" sz="1200" dirty="0">
+                <a:solidFill>
+                  <a:srgbClr val="1C2833"/>
+                </a:solidFill>
+                <a:latin typeface="Arial" pitchFamily="34" charset="0"/>
+                <a:ea typeface="Arial" pitchFamily="34" charset="-122"/>
+                <a:cs typeface="Arial" pitchFamily="34" charset="-120"/>
+              </a:rPr>
+              <a:t>97 × 92</a:t>
+            </a:r>
+            <a:pPr algn="l" indent="0" marL="0">
+              <a:lnSpc>
+                <a:spcPts val="1620"/>
+              </a:lnSpc>
+              <a:spcAft>
+                <a:spcPts val="300"/>
+              </a:spcAft>
+              <a:buNone/>
+            </a:pPr>
+            <a:r>
+              <a:rPr lang="en-US" sz="1200" dirty="0">
+                <a:solidFill>
+                  <a:srgbClr val="1C2833"/>
+                </a:solidFill>
+                <a:latin typeface="Arial" pitchFamily="34" charset="0"/>
+                <a:ea typeface="Arial" pitchFamily="34" charset="-122"/>
+                <a:cs typeface="Arial" pitchFamily="34" charset="-120"/>
+              </a:rPr>
+              <a:t>.</a:t>
+            </a:r>
+            <a:endParaRPr lang="en-US" sz="1200" dirty="0"/>
+          </a:p>
+          <a:p>
+            <a:pPr algn="l" marL="342900" indent="-342900">
+              <a:lnSpc>
+                <a:spcPts val="1620"/>
+              </a:lnSpc>
+              <a:spcAft>
+                <a:spcPts val="300"/>
+              </a:spcAft>
+              <a:buSzPct val="100000"/>
+              <a:buChar char="•"/>
+            </a:pPr>
+            <a:r>
+              <a:rPr lang="en-US" sz="1200" dirty="0">
+                <a:solidFill>
+                  <a:srgbClr val="1C2833"/>
+                </a:solidFill>
+                <a:latin typeface="Arial" pitchFamily="34" charset="0"/>
+                <a:ea typeface="Arial" pitchFamily="34" charset="-122"/>
+                <a:cs typeface="Arial" pitchFamily="34" charset="-120"/>
+              </a:rPr>
+              <a:t>Students try the Nikhilam method on each, then verify with long multiplication.</a:t>
+            </a:r>
+            <a:endParaRPr lang="en-US" sz="1200" dirty="0"/>
+          </a:p>
+          <a:p>
+            <a:pPr algn="l" marL="342900" indent="-342900">
+              <a:lnSpc>
+                <a:spcPts val="1620"/>
+              </a:lnSpc>
+              <a:spcAft>
+                <a:spcPts val="300"/>
+              </a:spcAft>
+              <a:buSzPct val="100000"/>
+              <a:buChar char="•"/>
+            </a:pPr>
+            <a:r>
+              <a:rPr lang="en-US" sz="1200" dirty="0">
+                <a:solidFill>
+                  <a:srgbClr val="1C2833"/>
+                </a:solidFill>
+                <a:latin typeface="Arial" pitchFamily="34" charset="0"/>
+                <a:ea typeface="Arial" pitchFamily="34" charset="-122"/>
+                <a:cs typeface="Arial" pitchFamily="34" charset="-120"/>
+              </a:rPr>
+              <a:t>Time themselves. Expect mistakes and slow times on the first try.</a:t>
             </a:r>
             <a:endParaRPr lang="en-US" sz="1200" dirty="0"/>
           </a:p>
@@ -4275,6 +4428,2089 @@
                 <a:ea typeface="Georgia" pitchFamily="34" charset="-122"/>
                 <a:cs typeface="Georgia" pitchFamily="34" charset="-120"/>
               </a:rPr>
+              <a:t>Wrap-up (5 min)</a:t>
+            </a:r>
+            <a:endParaRPr lang="en-US" sz="1800" dirty="0"/>
+          </a:p>
+        </p:txBody>
+      </p:sp>
+      <p:sp>
+        <p:nvSpPr>
+          <p:cNvPr id="4" name="Text 2"/>
+          <p:cNvSpPr/>
+          <p:nvPr/>
+        </p:nvSpPr>
+        <p:spPr>
+          <a:xfrm>
+            <a:off x="634901" y="883593"/>
+            <a:ext cx="8102798" cy="731341"/>
+          </a:xfrm>
+          <a:prstGeom prst="rect">
+            <a:avLst/>
+          </a:prstGeom>
+          <a:noFill/>
+          <a:ln/>
+        </p:spPr>
+        <p:txBody>
+          <a:bodyPr wrap="square" lIns="0" tIns="0" rIns="0" bIns="0" rtlCol="0" anchor="t"/>
+          <a:lstStyle/>
+          <a:p>
+            <a:pPr algn="l" marL="342900" indent="-342900">
+              <a:lnSpc>
+                <a:spcPts val="1620"/>
+              </a:lnSpc>
+              <a:spcAft>
+                <a:spcPts val="300"/>
+              </a:spcAft>
+              <a:buSzPct val="100000"/>
+              <a:buChar char="•"/>
+            </a:pPr>
+            <a:r>
+              <a:rPr lang="en-US" sz="1200" dirty="0">
+                <a:solidFill>
+                  <a:srgbClr val="1C2833"/>
+                </a:solidFill>
+                <a:latin typeface="Arial" pitchFamily="34" charset="0"/>
+                <a:ea typeface="Arial" pitchFamily="34" charset="-122"/>
+                <a:cs typeface="Arial" pitchFamily="34" charset="-120"/>
+              </a:rPr>
+              <a:t>Show of hands: who got at least one right with Nikhilam? Who was </a:t>
+            </a:r>
+            <a:pPr algn="l" indent="0" marL="0">
+              <a:lnSpc>
+                <a:spcPts val="1620"/>
+              </a:lnSpc>
+              <a:spcAft>
+                <a:spcPts val="300"/>
+              </a:spcAft>
+              <a:buNone/>
+            </a:pPr>
+            <a:r>
+              <a:rPr lang="en-US" sz="1200" i="1" dirty="0">
+                <a:solidFill>
+                  <a:srgbClr val="1C2833"/>
+                </a:solidFill>
+                <a:latin typeface="Arial" pitchFamily="34" charset="0"/>
+                <a:ea typeface="Arial" pitchFamily="34" charset="-122"/>
+                <a:cs typeface="Arial" pitchFamily="34" charset="-120"/>
+              </a:rPr>
+              <a:t>faster</a:t>
+            </a:r>
+            <a:pPr algn="l" indent="0" marL="0">
+              <a:lnSpc>
+                <a:spcPts val="1620"/>
+              </a:lnSpc>
+              <a:spcAft>
+                <a:spcPts val="300"/>
+              </a:spcAft>
+              <a:buNone/>
+            </a:pPr>
+            <a:r>
+              <a:rPr lang="en-US" sz="1200" dirty="0">
+                <a:solidFill>
+                  <a:srgbClr val="1C2833"/>
+                </a:solidFill>
+                <a:latin typeface="Arial" pitchFamily="34" charset="0"/>
+                <a:ea typeface="Arial" pitchFamily="34" charset="-122"/>
+                <a:cs typeface="Arial" pitchFamily="34" charset="-120"/>
+              </a:rPr>
+              <a:t> with Nikhilam already? (Most won't be — yet.)</a:t>
+            </a:r>
+            <a:endParaRPr lang="en-US" sz="1200" dirty="0"/>
+          </a:p>
+          <a:p>
+            <a:pPr algn="l" marL="342900" indent="-342900">
+              <a:lnSpc>
+                <a:spcPts val="1620"/>
+              </a:lnSpc>
+              <a:spcAft>
+                <a:spcPts val="300"/>
+              </a:spcAft>
+              <a:buSzPct val="100000"/>
+              <a:buChar char="•"/>
+            </a:pPr>
+            <a:r>
+              <a:rPr lang="en-US" sz="1200" dirty="0">
+                <a:solidFill>
+                  <a:srgbClr val="1C2833"/>
+                </a:solidFill>
+                <a:latin typeface="Arial" pitchFamily="34" charset="0"/>
+                <a:ea typeface="Arial" pitchFamily="34" charset="-122"/>
+                <a:cs typeface="Arial" pitchFamily="34" charset="-120"/>
+              </a:rPr>
+              <a:t>Preview Day 2: </a:t>
+            </a:r>
+            <a:pPr algn="l" indent="0" marL="0">
+              <a:lnSpc>
+                <a:spcPts val="1620"/>
+              </a:lnSpc>
+              <a:spcAft>
+                <a:spcPts val="300"/>
+              </a:spcAft>
+              <a:buNone/>
+            </a:pPr>
+            <a:r>
+              <a:rPr lang="en-US" sz="1200" i="1" dirty="0">
+                <a:solidFill>
+                  <a:srgbClr val="1C2833"/>
+                </a:solidFill>
+                <a:latin typeface="Arial" pitchFamily="34" charset="0"/>
+                <a:ea typeface="Arial" pitchFamily="34" charset="-122"/>
+                <a:cs typeface="Arial" pitchFamily="34" charset="-120"/>
+              </a:rPr>
+              <a:t>"Tomorrow we'll work on the foundational skill — instantly finding the deficit of any number from 10 or 100."</a:t>
+            </a:r>
+            <a:endParaRPr lang="en-US" sz="1200" dirty="0"/>
+          </a:p>
+        </p:txBody>
+      </p:sp>
+      <p:sp>
+        <p:nvSpPr>
+          <p:cNvPr id="5" name="Text 3"/>
+          <p:cNvSpPr/>
+          <p:nvPr/>
+        </p:nvSpPr>
+        <p:spPr>
+          <a:xfrm>
+            <a:off x="406301" y="4434929"/>
+            <a:ext cx="8498026" cy="213271"/>
+          </a:xfrm>
+          <a:prstGeom prst="rect">
+            <a:avLst/>
+          </a:prstGeom>
+          <a:noFill/>
+          <a:ln/>
+        </p:spPr>
+        <p:txBody>
+          <a:bodyPr wrap="square" lIns="0" tIns="0" rIns="0" bIns="0" rtlCol="0" anchor="t"/>
+          <a:lstStyle/>
+          <a:p>
+            <a:pPr algn="l" indent="0" marL="0">
+              <a:lnSpc>
+                <a:spcPts val="1680"/>
+              </a:lnSpc>
+              <a:spcBef>
+                <a:spcPts val="300"/>
+              </a:spcBef>
+              <a:spcAft>
+                <a:spcPts val="300"/>
+              </a:spcAft>
+              <a:buNone/>
+            </a:pPr>
+            <a:r>
+              <a:rPr lang="en-US" sz="1200" dirty="0">
+                <a:solidFill>
+                  <a:srgbClr val="1C2833"/>
+                </a:solidFill>
+                <a:latin typeface="Arial" pitchFamily="34" charset="0"/>
+                <a:ea typeface="Arial" pitchFamily="34" charset="-122"/>
+                <a:cs typeface="Arial" pitchFamily="34" charset="-120"/>
+              </a:rPr>
+              <a:t>Middle ·  · IKS Curriculum</a:t>
+            </a:r>
+            <a:endParaRPr lang="en-US" sz="1200" dirty="0"/>
+          </a:p>
+        </p:txBody>
+      </p:sp>
+    </p:spTree>
+  </p:cSld>
+  <p:clrMapOvr>
+    <a:masterClrMapping/>
+  </p:clrMapOvr>
+</p:sld>
+</file>
+
+<file path=ppt/slides/slide15.xml><?xml version="1.0" encoding="utf-8"?>
+<p:sld xmlns:a="http://schemas.openxmlformats.org/drawingml/2006/main" xmlns:r="http://schemas.openxmlformats.org/officeDocument/2006/relationships" xmlns:p="http://schemas.openxmlformats.org/presentationml/2006/main">
+  <p:cSld name="Slide 15">
+    <p:bg>
+      <p:bgPr>
+        <a:solidFill>
+          <a:srgbClr val="FFFFFF"/>
+        </a:solidFill>
+      </p:bgPr>
+    </p:bg>
+    <p:spTree>
+      <p:nvGrpSpPr>
+        <p:cNvPr id="1" name=""/>
+        <p:cNvGrpSpPr/>
+        <p:nvPr/>
+      </p:nvGrpSpPr>
+      <p:grpSpPr>
+        <a:xfrm>
+          <a:off x="0" y="0"/>
+          <a:ext cx="0" cy="0"/>
+          <a:chOff x="0" y="0"/>
+          <a:chExt cx="0" cy="0"/>
+        </a:xfrm>
+      </p:grpSpPr>
+      <p:sp>
+        <p:nvSpPr>
+          <p:cNvPr id="2" name="Text 0"/>
+          <p:cNvSpPr/>
+          <p:nvPr/>
+        </p:nvSpPr>
+        <p:spPr>
+          <a:xfrm>
+            <a:off x="0" y="0"/>
+            <a:ext cx="9144000" cy="101501"/>
+          </a:xfrm>
+          <a:prstGeom prst="rect">
+            <a:avLst/>
+          </a:prstGeom>
+          <a:solidFill>
+            <a:srgbClr val="277884"/>
+          </a:solidFill>
+          <a:ln/>
+        </p:spPr>
+        <p:txBody>
+          <a:bodyPr wrap="square" rtlCol="0" anchor="ctr"/>
+          <a:lstStyle/>
+          <a:p>
+            <a:pPr indent="0" marL="0">
+              <a:buNone/>
+            </a:pPr>
+            <a:endParaRPr lang="en-US" dirty="0"/>
+          </a:p>
+        </p:txBody>
+      </p:sp>
+      <p:sp>
+        <p:nvSpPr>
+          <p:cNvPr id="3" name="Text 1"/>
+          <p:cNvSpPr/>
+          <p:nvPr/>
+        </p:nvSpPr>
+        <p:spPr>
+          <a:xfrm>
+            <a:off x="406301" y="457051"/>
+            <a:ext cx="8498026" cy="274290"/>
+          </a:xfrm>
+          <a:prstGeom prst="rect">
+            <a:avLst/>
+          </a:prstGeom>
+          <a:noFill/>
+          <a:ln/>
+        </p:spPr>
+        <p:txBody>
+          <a:bodyPr wrap="square" lIns="0" tIns="0" rIns="0" bIns="0" rtlCol="0" anchor="t"/>
+          <a:lstStyle/>
+          <a:p>
+            <a:pPr algn="l" indent="0" marL="0">
+              <a:lnSpc>
+                <a:spcPts val="2160"/>
+              </a:lnSpc>
+              <a:spcBef>
+                <a:spcPts val="600"/>
+              </a:spcBef>
+              <a:spcAft>
+                <a:spcPts val="800"/>
+              </a:spcAft>
+              <a:buNone/>
+            </a:pPr>
+            <a:r>
+              <a:rPr lang="en-US" sz="1800" b="1" dirty="0">
+                <a:solidFill>
+                  <a:srgbClr val="FE4447"/>
+                </a:solidFill>
+                <a:latin typeface="Georgia" pitchFamily="34" charset="0"/>
+                <a:ea typeface="Georgia" pitchFamily="34" charset="-122"/>
+                <a:cs typeface="Georgia" pitchFamily="34" charset="-120"/>
+              </a:rPr>
+              <a:t>Student-facing content</a:t>
+            </a:r>
+            <a:endParaRPr lang="en-US" sz="1800" dirty="0"/>
+          </a:p>
+        </p:txBody>
+      </p:sp>
+      <p:sp>
+        <p:nvSpPr>
+          <p:cNvPr id="4" name="Text 2"/>
+          <p:cNvSpPr/>
+          <p:nvPr/>
+        </p:nvSpPr>
+        <p:spPr>
+          <a:xfrm>
+            <a:off x="406301" y="883593"/>
+            <a:ext cx="8331398" cy="2745581"/>
+          </a:xfrm>
+          <a:prstGeom prst="rect">
+            <a:avLst/>
+          </a:prstGeom>
+          <a:solidFill>
+            <a:srgbClr val="F4F8F9"/>
+          </a:solidFill>
+          <a:ln/>
+        </p:spPr>
+        <p:txBody>
+          <a:bodyPr wrap="square" rtlCol="0" anchor="ctr"/>
+          <a:lstStyle/>
+          <a:p>
+            <a:pPr indent="0" marL="0">
+              <a:buNone/>
+            </a:pPr>
+            <a:endParaRPr lang="en-US" dirty="0"/>
+          </a:p>
+        </p:txBody>
+      </p:sp>
+      <p:sp>
+        <p:nvSpPr>
+          <p:cNvPr id="5" name="Shape 3"/>
+          <p:cNvSpPr/>
+          <p:nvPr/>
+        </p:nvSpPr>
+        <p:spPr>
+          <a:xfrm>
+            <a:off x="434876" y="883593"/>
+            <a:ext cx="0" cy="2745581"/>
+          </a:xfrm>
+          <a:prstGeom prst="line">
+            <a:avLst/>
+          </a:prstGeom>
+          <a:noFill/>
+          <a:ln w="57150">
+            <a:solidFill>
+              <a:srgbClr val="FE4447"/>
+            </a:solidFill>
+            <a:prstDash val="solid"/>
+          </a:ln>
+        </p:spPr>
+      </p:sp>
+      <p:sp>
+        <p:nvSpPr>
+          <p:cNvPr id="6" name="Text 4"/>
+          <p:cNvSpPr/>
+          <p:nvPr/>
+        </p:nvSpPr>
+        <p:spPr>
+          <a:xfrm>
+            <a:off x="692051" y="1074093"/>
+            <a:ext cx="7973389" cy="230981"/>
+          </a:xfrm>
+          <a:prstGeom prst="rect">
+            <a:avLst/>
+          </a:prstGeom>
+          <a:noFill/>
+          <a:ln/>
+        </p:spPr>
+        <p:txBody>
+          <a:bodyPr wrap="square" lIns="0" tIns="0" rIns="0" bIns="0" rtlCol="0" anchor="t"/>
+          <a:lstStyle/>
+          <a:p>
+            <a:pPr algn="l" indent="0" marL="0">
+              <a:lnSpc>
+                <a:spcPts val="1820"/>
+              </a:lnSpc>
+              <a:spcBef>
+                <a:spcPts val="300"/>
+              </a:spcBef>
+              <a:spcAft>
+                <a:spcPts val="300"/>
+              </a:spcAft>
+              <a:buNone/>
+            </a:pPr>
+            <a:r>
+              <a:rPr lang="en-US" sz="1300" b="1" i="1" dirty="0">
+                <a:solidFill>
+                  <a:srgbClr val="1C2833"/>
+                </a:solidFill>
+                <a:latin typeface="Georgia" pitchFamily="34" charset="0"/>
+                <a:ea typeface="Georgia" pitchFamily="34" charset="-122"/>
+                <a:cs typeface="Georgia" pitchFamily="34" charset="-120"/>
+              </a:rPr>
+              <a:t>The Nikhilam Method — Multiplication Near a Base</a:t>
+            </a:r>
+            <a:endParaRPr lang="en-US" sz="1300" dirty="0"/>
+          </a:p>
+        </p:txBody>
+      </p:sp>
+      <p:sp>
+        <p:nvSpPr>
+          <p:cNvPr id="7" name="Text 5"/>
+          <p:cNvSpPr/>
+          <p:nvPr/>
+        </p:nvSpPr>
+        <p:spPr>
+          <a:xfrm>
+            <a:off x="692051" y="1343174"/>
+            <a:ext cx="7973389" cy="230981"/>
+          </a:xfrm>
+          <a:prstGeom prst="rect">
+            <a:avLst/>
+          </a:prstGeom>
+          <a:noFill/>
+          <a:ln/>
+        </p:spPr>
+        <p:txBody>
+          <a:bodyPr wrap="square" lIns="0" tIns="0" rIns="0" bIns="0" rtlCol="0" anchor="t"/>
+          <a:lstStyle/>
+          <a:p>
+            <a:pPr algn="l" indent="0" marL="0">
+              <a:lnSpc>
+                <a:spcPts val="1820"/>
+              </a:lnSpc>
+              <a:spcBef>
+                <a:spcPts val="300"/>
+              </a:spcBef>
+              <a:spcAft>
+                <a:spcPts val="300"/>
+              </a:spcAft>
+              <a:buNone/>
+            </a:pPr>
+            <a:r>
+              <a:rPr lang="en-US" sz="1300" i="1" dirty="0">
+                <a:solidFill>
+                  <a:srgbClr val="1C2833"/>
+                </a:solidFill>
+                <a:latin typeface="Georgia" pitchFamily="34" charset="0"/>
+                <a:ea typeface="Georgia" pitchFamily="34" charset="-122"/>
+                <a:cs typeface="Georgia" pitchFamily="34" charset="-120"/>
+              </a:rPr>
+              <a:t>When both numbers are near a power of 10 (10, 100, 1000):</a:t>
+            </a:r>
+            <a:endParaRPr lang="en-US" sz="1300" dirty="0"/>
+          </a:p>
+        </p:txBody>
+      </p:sp>
+      <p:sp>
+        <p:nvSpPr>
+          <p:cNvPr id="8" name="Text 6"/>
+          <p:cNvSpPr/>
+          <p:nvPr/>
+        </p:nvSpPr>
+        <p:spPr>
+          <a:xfrm>
+            <a:off x="692051" y="1612255"/>
+            <a:ext cx="7973389" cy="230981"/>
+          </a:xfrm>
+          <a:prstGeom prst="rect">
+            <a:avLst/>
+          </a:prstGeom>
+          <a:noFill/>
+          <a:ln/>
+        </p:spPr>
+        <p:txBody>
+          <a:bodyPr wrap="square" lIns="0" tIns="0" rIns="0" bIns="0" rtlCol="0" anchor="t"/>
+          <a:lstStyle/>
+          <a:p>
+            <a:pPr algn="l" indent="0" marL="0">
+              <a:lnSpc>
+                <a:spcPts val="1820"/>
+              </a:lnSpc>
+              <a:spcBef>
+                <a:spcPts val="300"/>
+              </a:spcBef>
+              <a:spcAft>
+                <a:spcPts val="300"/>
+              </a:spcAft>
+              <a:buNone/>
+            </a:pPr>
+            <a:r>
+              <a:rPr lang="en-US" sz="1300" b="1" i="1" dirty="0">
+                <a:solidFill>
+                  <a:srgbClr val="1C2833"/>
+                </a:solidFill>
+                <a:latin typeface="Georgia" pitchFamily="34" charset="0"/>
+                <a:ea typeface="Georgia" pitchFamily="34" charset="-122"/>
+                <a:cs typeface="Georgia" pitchFamily="34" charset="-120"/>
+              </a:rPr>
+              <a:t>Find the deficit</a:t>
+            </a:r>
+            <a:pPr algn="l" indent="0" marL="0">
+              <a:lnSpc>
+                <a:spcPts val="1820"/>
+              </a:lnSpc>
+              <a:spcBef>
+                <a:spcPts val="300"/>
+              </a:spcBef>
+              <a:spcAft>
+                <a:spcPts val="300"/>
+              </a:spcAft>
+              <a:buNone/>
+            </a:pPr>
+            <a:r>
+              <a:rPr lang="en-US" sz="1300" dirty="0">
+                <a:solidFill>
+                  <a:srgbClr val="1C2833"/>
+                </a:solidFill>
+                <a:latin typeface="Georgia" pitchFamily="34" charset="0"/>
+                <a:ea typeface="Georgia" pitchFamily="34" charset="-122"/>
+                <a:cs typeface="Georgia" pitchFamily="34" charset="-120"/>
+              </a:rPr>
+              <a:t> of each from the base.</a:t>
+            </a:r>
+            <a:endParaRPr lang="en-US" sz="1300" dirty="0"/>
+          </a:p>
+        </p:txBody>
+      </p:sp>
+      <p:sp>
+        <p:nvSpPr>
+          <p:cNvPr id="9" name="Text 7"/>
+          <p:cNvSpPr/>
+          <p:nvPr/>
+        </p:nvSpPr>
+        <p:spPr>
+          <a:xfrm>
+            <a:off x="692051" y="1881336"/>
+            <a:ext cx="7973389" cy="230981"/>
+          </a:xfrm>
+          <a:prstGeom prst="rect">
+            <a:avLst/>
+          </a:prstGeom>
+          <a:noFill/>
+          <a:ln/>
+        </p:spPr>
+        <p:txBody>
+          <a:bodyPr wrap="square" lIns="0" tIns="0" rIns="0" bIns="0" rtlCol="0" anchor="t"/>
+          <a:lstStyle/>
+          <a:p>
+            <a:pPr algn="l" indent="0" marL="0">
+              <a:lnSpc>
+                <a:spcPts val="1820"/>
+              </a:lnSpc>
+              <a:spcBef>
+                <a:spcPts val="300"/>
+              </a:spcBef>
+              <a:spcAft>
+                <a:spcPts val="300"/>
+              </a:spcAft>
+              <a:buNone/>
+            </a:pPr>
+            <a:r>
+              <a:rPr lang="en-US" sz="1300" b="1" i="1" dirty="0">
+                <a:solidFill>
+                  <a:srgbClr val="1C2833"/>
+                </a:solidFill>
+                <a:latin typeface="Georgia" pitchFamily="34" charset="0"/>
+                <a:ea typeface="Georgia" pitchFamily="34" charset="-122"/>
+                <a:cs typeface="Georgia" pitchFamily="34" charset="-120"/>
+              </a:rPr>
+              <a:t>Cross-subtract</a:t>
+            </a:r>
+            <a:pPr algn="l" indent="0" marL="0">
+              <a:lnSpc>
+                <a:spcPts val="1820"/>
+              </a:lnSpc>
+              <a:spcBef>
+                <a:spcPts val="300"/>
+              </a:spcBef>
+              <a:spcAft>
+                <a:spcPts val="300"/>
+              </a:spcAft>
+              <a:buNone/>
+            </a:pPr>
+            <a:r>
+              <a:rPr lang="en-US" sz="1300" dirty="0">
+                <a:solidFill>
+                  <a:srgbClr val="1C2833"/>
+                </a:solidFill>
+                <a:latin typeface="Georgia" pitchFamily="34" charset="0"/>
+                <a:ea typeface="Georgia" pitchFamily="34" charset="-122"/>
+                <a:cs typeface="Georgia" pitchFamily="34" charset="-120"/>
+              </a:rPr>
+              <a:t> for the LEFT part (one number minus the </a:t>
+            </a:r>
+            <a:pPr algn="l" indent="0" marL="0">
+              <a:lnSpc>
+                <a:spcPts val="1820"/>
+              </a:lnSpc>
+              <a:spcBef>
+                <a:spcPts val="300"/>
+              </a:spcBef>
+              <a:spcAft>
+                <a:spcPts val="300"/>
+              </a:spcAft>
+              <a:buNone/>
+            </a:pPr>
+            <a:r>
+              <a:rPr lang="en-US" sz="1300" i="1" dirty="0">
+                <a:solidFill>
+                  <a:srgbClr val="1C2833"/>
+                </a:solidFill>
+                <a:latin typeface="Georgia" pitchFamily="34" charset="0"/>
+                <a:ea typeface="Georgia" pitchFamily="34" charset="-122"/>
+                <a:cs typeface="Georgia" pitchFamily="34" charset="-120"/>
+              </a:rPr>
+              <a:t>other's</a:t>
+            </a:r>
+            <a:pPr algn="l" indent="0" marL="0">
+              <a:lnSpc>
+                <a:spcPts val="1820"/>
+              </a:lnSpc>
+              <a:spcBef>
+                <a:spcPts val="300"/>
+              </a:spcBef>
+              <a:spcAft>
+                <a:spcPts val="300"/>
+              </a:spcAft>
+              <a:buNone/>
+            </a:pPr>
+            <a:r>
+              <a:rPr lang="en-US" sz="1300" dirty="0">
+                <a:solidFill>
+                  <a:srgbClr val="1C2833"/>
+                </a:solidFill>
+                <a:latin typeface="Georgia" pitchFamily="34" charset="0"/>
+                <a:ea typeface="Georgia" pitchFamily="34" charset="-122"/>
+                <a:cs typeface="Georgia" pitchFamily="34" charset="-120"/>
+              </a:rPr>
+              <a:t> deficit).</a:t>
+            </a:r>
+            <a:endParaRPr lang="en-US" sz="1300" dirty="0"/>
+          </a:p>
+        </p:txBody>
+      </p:sp>
+      <p:sp>
+        <p:nvSpPr>
+          <p:cNvPr id="10" name="Text 8"/>
+          <p:cNvSpPr/>
+          <p:nvPr/>
+        </p:nvSpPr>
+        <p:spPr>
+          <a:xfrm>
+            <a:off x="692051" y="2150418"/>
+            <a:ext cx="7973389" cy="230981"/>
+          </a:xfrm>
+          <a:prstGeom prst="rect">
+            <a:avLst/>
+          </a:prstGeom>
+          <a:noFill/>
+          <a:ln/>
+        </p:spPr>
+        <p:txBody>
+          <a:bodyPr wrap="square" lIns="0" tIns="0" rIns="0" bIns="0" rtlCol="0" anchor="t"/>
+          <a:lstStyle/>
+          <a:p>
+            <a:pPr algn="l" indent="0" marL="0">
+              <a:lnSpc>
+                <a:spcPts val="1820"/>
+              </a:lnSpc>
+              <a:spcBef>
+                <a:spcPts val="300"/>
+              </a:spcBef>
+              <a:spcAft>
+                <a:spcPts val="300"/>
+              </a:spcAft>
+              <a:buNone/>
+            </a:pPr>
+            <a:r>
+              <a:rPr lang="en-US" sz="1300" b="1" i="1" dirty="0">
+                <a:solidFill>
+                  <a:srgbClr val="1C2833"/>
+                </a:solidFill>
+                <a:latin typeface="Georgia" pitchFamily="34" charset="0"/>
+                <a:ea typeface="Georgia" pitchFamily="34" charset="-122"/>
+                <a:cs typeface="Georgia" pitchFamily="34" charset="-120"/>
+              </a:rPr>
+              <a:t>Multiply the deficits</a:t>
+            </a:r>
+            <a:pPr algn="l" indent="0" marL="0">
+              <a:lnSpc>
+                <a:spcPts val="1820"/>
+              </a:lnSpc>
+              <a:spcBef>
+                <a:spcPts val="300"/>
+              </a:spcBef>
+              <a:spcAft>
+                <a:spcPts val="300"/>
+              </a:spcAft>
+              <a:buNone/>
+            </a:pPr>
+            <a:r>
+              <a:rPr lang="en-US" sz="1300" dirty="0">
+                <a:solidFill>
+                  <a:srgbClr val="1C2833"/>
+                </a:solidFill>
+                <a:latin typeface="Georgia" pitchFamily="34" charset="0"/>
+                <a:ea typeface="Georgia" pitchFamily="34" charset="-122"/>
+                <a:cs typeface="Georgia" pitchFamily="34" charset="-120"/>
+              </a:rPr>
+              <a:t> for the RIGHT part.</a:t>
+            </a:r>
+            <a:endParaRPr lang="en-US" sz="1300" dirty="0"/>
+          </a:p>
+        </p:txBody>
+      </p:sp>
+      <p:sp>
+        <p:nvSpPr>
+          <p:cNvPr id="11" name="Text 9"/>
+          <p:cNvSpPr/>
+          <p:nvPr/>
+        </p:nvSpPr>
+        <p:spPr>
+          <a:xfrm>
+            <a:off x="692051" y="2419499"/>
+            <a:ext cx="7973389" cy="230981"/>
+          </a:xfrm>
+          <a:prstGeom prst="rect">
+            <a:avLst/>
+          </a:prstGeom>
+          <a:noFill/>
+          <a:ln/>
+        </p:spPr>
+        <p:txBody>
+          <a:bodyPr wrap="square" lIns="0" tIns="0" rIns="0" bIns="0" rtlCol="0" anchor="t"/>
+          <a:lstStyle/>
+          <a:p>
+            <a:pPr algn="l" indent="0" marL="0">
+              <a:lnSpc>
+                <a:spcPts val="1820"/>
+              </a:lnSpc>
+              <a:spcBef>
+                <a:spcPts val="300"/>
+              </a:spcBef>
+              <a:spcAft>
+                <a:spcPts val="300"/>
+              </a:spcAft>
+              <a:buNone/>
+            </a:pPr>
+            <a:r>
+              <a:rPr lang="en-US" sz="1300" b="1" i="1" dirty="0">
+                <a:solidFill>
+                  <a:srgbClr val="1C2833"/>
+                </a:solidFill>
+                <a:latin typeface="Georgia" pitchFamily="34" charset="0"/>
+                <a:ea typeface="Georgia" pitchFamily="34" charset="-122"/>
+                <a:cs typeface="Georgia" pitchFamily="34" charset="-120"/>
+              </a:rPr>
+              <a:t>Concatenate</a:t>
+            </a:r>
+            <a:pPr algn="l" indent="0" marL="0">
+              <a:lnSpc>
+                <a:spcPts val="1820"/>
+              </a:lnSpc>
+              <a:spcBef>
+                <a:spcPts val="300"/>
+              </a:spcBef>
+              <a:spcAft>
+                <a:spcPts val="300"/>
+              </a:spcAft>
+              <a:buNone/>
+            </a:pPr>
+            <a:r>
+              <a:rPr lang="en-US" sz="1300" dirty="0">
+                <a:solidFill>
+                  <a:srgbClr val="1C2833"/>
+                </a:solidFill>
+                <a:latin typeface="Georgia" pitchFamily="34" charset="0"/>
+                <a:ea typeface="Georgia" pitchFamily="34" charset="-122"/>
+                <a:cs typeface="Georgia" pitchFamily="34" charset="-120"/>
+              </a:rPr>
+              <a:t>: LEFT | RIGHT = the answer.</a:t>
+            </a:r>
+            <a:endParaRPr lang="en-US" sz="1300" dirty="0"/>
+          </a:p>
+        </p:txBody>
+      </p:sp>
+      <p:sp>
+        <p:nvSpPr>
+          <p:cNvPr id="12" name="Text 10"/>
+          <p:cNvSpPr/>
+          <p:nvPr/>
+        </p:nvSpPr>
+        <p:spPr>
+          <a:xfrm>
+            <a:off x="692051" y="2688580"/>
+            <a:ext cx="7973389" cy="481012"/>
+          </a:xfrm>
+          <a:prstGeom prst="rect">
+            <a:avLst/>
+          </a:prstGeom>
+          <a:noFill/>
+          <a:ln/>
+        </p:spPr>
+        <p:txBody>
+          <a:bodyPr wrap="square" lIns="0" tIns="0" rIns="0" bIns="0" rtlCol="0" anchor="t"/>
+          <a:lstStyle/>
+          <a:p>
+            <a:pPr algn="l" indent="0" marL="0">
+              <a:lnSpc>
+                <a:spcPts val="1820"/>
+              </a:lnSpc>
+              <a:spcBef>
+                <a:spcPts val="300"/>
+              </a:spcBef>
+              <a:spcAft>
+                <a:spcPts val="300"/>
+              </a:spcAft>
+              <a:buNone/>
+            </a:pPr>
+            <a:r>
+              <a:rPr lang="en-US" sz="1300" dirty="0">
+                <a:solidFill>
+                  <a:srgbClr val="1C2833"/>
+                </a:solidFill>
+                <a:latin typeface="Georgia" pitchFamily="34" charset="0"/>
+                <a:ea typeface="Georgia" pitchFamily="34" charset="-122"/>
+                <a:cs typeface="Georgia" pitchFamily="34" charset="-120"/>
+              </a:rPr>
+              <a:t>Today's baseline: my time on </a:t>
+            </a:r>
+            <a:pPr algn="l" indent="0" marL="0">
+              <a:lnSpc>
+                <a:spcPts val="1820"/>
+              </a:lnSpc>
+              <a:spcBef>
+                <a:spcPts val="300"/>
+              </a:spcBef>
+              <a:spcAft>
+                <a:spcPts val="300"/>
+              </a:spcAft>
+              <a:buNone/>
+            </a:pPr>
+            <a:r>
+              <a:rPr lang="en-US" sz="1300" i="1" dirty="0">
+                <a:solidFill>
+                  <a:srgbClr val="1C2833"/>
+                </a:solidFill>
+                <a:latin typeface="Georgia" pitchFamily="34" charset="0"/>
+                <a:ea typeface="Georgia" pitchFamily="34" charset="-122"/>
+                <a:cs typeface="Georgia" pitchFamily="34" charset="-120"/>
+              </a:rPr>
+              <a:t>97 × 96</a:t>
+            </a:r>
+            <a:pPr algn="l" indent="0" marL="0">
+              <a:lnSpc>
+                <a:spcPts val="1820"/>
+              </a:lnSpc>
+              <a:spcBef>
+                <a:spcPts val="300"/>
+              </a:spcBef>
+              <a:spcAft>
+                <a:spcPts val="300"/>
+              </a:spcAft>
+              <a:buNone/>
+            </a:pPr>
+            <a:r>
+              <a:rPr lang="en-US" sz="1300" dirty="0">
+                <a:solidFill>
+                  <a:srgbClr val="1C2833"/>
+                </a:solidFill>
+                <a:latin typeface="Georgia" pitchFamily="34" charset="0"/>
+                <a:ea typeface="Georgia" pitchFamily="34" charset="-122"/>
+                <a:cs typeface="Georgia" pitchFamily="34" charset="-120"/>
+              </a:rPr>
+              <a:t> using long multiplication = ____ seconds. My time using Nikhilam (first try) = ____ seconds.</a:t>
+            </a:r>
+            <a:endParaRPr lang="en-US" sz="1300" dirty="0"/>
+          </a:p>
+        </p:txBody>
+      </p:sp>
+      <p:sp>
+        <p:nvSpPr>
+          <p:cNvPr id="13" name="Text 11"/>
+          <p:cNvSpPr/>
+          <p:nvPr/>
+        </p:nvSpPr>
+        <p:spPr>
+          <a:xfrm>
+            <a:off x="692051" y="3207693"/>
+            <a:ext cx="7973389" cy="230981"/>
+          </a:xfrm>
+          <a:prstGeom prst="rect">
+            <a:avLst/>
+          </a:prstGeom>
+          <a:noFill/>
+          <a:ln/>
+        </p:spPr>
+        <p:txBody>
+          <a:bodyPr wrap="square" lIns="0" tIns="0" rIns="0" bIns="0" rtlCol="0" anchor="t"/>
+          <a:lstStyle/>
+          <a:p>
+            <a:pPr algn="l" indent="0" marL="0">
+              <a:lnSpc>
+                <a:spcPts val="1820"/>
+              </a:lnSpc>
+              <a:spcBef>
+                <a:spcPts val="300"/>
+              </a:spcBef>
+              <a:spcAft>
+                <a:spcPts val="300"/>
+              </a:spcAft>
+              <a:buNone/>
+            </a:pPr>
+            <a:r>
+              <a:rPr lang="en-US" sz="1300" i="1" dirty="0">
+                <a:solidFill>
+                  <a:srgbClr val="1C2833"/>
+                </a:solidFill>
+                <a:latin typeface="Georgia" pitchFamily="34" charset="0"/>
+                <a:ea typeface="Georgia" pitchFamily="34" charset="-122"/>
+                <a:cs typeface="Georgia" pitchFamily="34" charset="-120"/>
+              </a:rPr>
+              <a:t>I expect this gap to FLIP by Day 9.</a:t>
+            </a:r>
+            <a:endParaRPr lang="en-US" sz="1300" dirty="0"/>
+          </a:p>
+        </p:txBody>
+      </p:sp>
+      <p:sp>
+        <p:nvSpPr>
+          <p:cNvPr id="14" name="Text 12"/>
+          <p:cNvSpPr/>
+          <p:nvPr/>
+        </p:nvSpPr>
+        <p:spPr>
+          <a:xfrm>
+            <a:off x="406301" y="4434929"/>
+            <a:ext cx="8498026" cy="213271"/>
+          </a:xfrm>
+          <a:prstGeom prst="rect">
+            <a:avLst/>
+          </a:prstGeom>
+          <a:noFill/>
+          <a:ln/>
+        </p:spPr>
+        <p:txBody>
+          <a:bodyPr wrap="square" lIns="0" tIns="0" rIns="0" bIns="0" rtlCol="0" anchor="t"/>
+          <a:lstStyle/>
+          <a:p>
+            <a:pPr algn="l" indent="0" marL="0">
+              <a:lnSpc>
+                <a:spcPts val="1680"/>
+              </a:lnSpc>
+              <a:spcBef>
+                <a:spcPts val="300"/>
+              </a:spcBef>
+              <a:spcAft>
+                <a:spcPts val="300"/>
+              </a:spcAft>
+              <a:buNone/>
+            </a:pPr>
+            <a:r>
+              <a:rPr lang="en-US" sz="1200" dirty="0">
+                <a:solidFill>
+                  <a:srgbClr val="1C2833"/>
+                </a:solidFill>
+                <a:latin typeface="Arial" pitchFamily="34" charset="0"/>
+                <a:ea typeface="Arial" pitchFamily="34" charset="-122"/>
+                <a:cs typeface="Arial" pitchFamily="34" charset="-120"/>
+              </a:rPr>
+              <a:t>Middle ·  · IKS Curriculum</a:t>
+            </a:r>
+            <a:endParaRPr lang="en-US" sz="1200" dirty="0"/>
+          </a:p>
+        </p:txBody>
+      </p:sp>
+    </p:spTree>
+  </p:cSld>
+  <p:clrMapOvr>
+    <a:masterClrMapping/>
+  </p:clrMapOvr>
+</p:sld>
+</file>
+
+<file path=ppt/slides/slide16.xml><?xml version="1.0" encoding="utf-8"?>
+<p:sld xmlns:a="http://schemas.openxmlformats.org/drawingml/2006/main" xmlns:r="http://schemas.openxmlformats.org/officeDocument/2006/relationships" xmlns:p="http://schemas.openxmlformats.org/presentationml/2006/main">
+  <p:cSld name="Slide 16">
+    <p:bg>
+      <p:bgPr>
+        <a:solidFill>
+          <a:srgbClr val="FFFFFF"/>
+        </a:solidFill>
+      </p:bgPr>
+    </p:bg>
+    <p:spTree>
+      <p:nvGrpSpPr>
+        <p:cNvPr id="1" name=""/>
+        <p:cNvGrpSpPr/>
+        <p:nvPr/>
+      </p:nvGrpSpPr>
+      <p:grpSpPr>
+        <a:xfrm>
+          <a:off x="0" y="0"/>
+          <a:ext cx="0" cy="0"/>
+          <a:chOff x="0" y="0"/>
+          <a:chExt cx="0" cy="0"/>
+        </a:xfrm>
+      </p:grpSpPr>
+      <p:sp>
+        <p:nvSpPr>
+          <p:cNvPr id="2" name="Text 0"/>
+          <p:cNvSpPr/>
+          <p:nvPr/>
+        </p:nvSpPr>
+        <p:spPr>
+          <a:xfrm>
+            <a:off x="0" y="0"/>
+            <a:ext cx="9144000" cy="101501"/>
+          </a:xfrm>
+          <a:prstGeom prst="rect">
+            <a:avLst/>
+          </a:prstGeom>
+          <a:solidFill>
+            <a:srgbClr val="277884"/>
+          </a:solidFill>
+          <a:ln/>
+        </p:spPr>
+        <p:txBody>
+          <a:bodyPr wrap="square" rtlCol="0" anchor="ctr"/>
+          <a:lstStyle/>
+          <a:p>
+            <a:pPr indent="0" marL="0">
+              <a:buNone/>
+            </a:pPr>
+            <a:endParaRPr lang="en-US" dirty="0"/>
+          </a:p>
+        </p:txBody>
+      </p:sp>
+      <p:sp>
+        <p:nvSpPr>
+          <p:cNvPr id="3" name="Text 1"/>
+          <p:cNvSpPr/>
+          <p:nvPr/>
+        </p:nvSpPr>
+        <p:spPr>
+          <a:xfrm>
+            <a:off x="406301" y="457051"/>
+            <a:ext cx="8498026" cy="274290"/>
+          </a:xfrm>
+          <a:prstGeom prst="rect">
+            <a:avLst/>
+          </a:prstGeom>
+          <a:noFill/>
+          <a:ln/>
+        </p:spPr>
+        <p:txBody>
+          <a:bodyPr wrap="square" lIns="0" tIns="0" rIns="0" bIns="0" rtlCol="0" anchor="t"/>
+          <a:lstStyle/>
+          <a:p>
+            <a:pPr algn="l" indent="0" marL="0">
+              <a:lnSpc>
+                <a:spcPts val="2160"/>
+              </a:lnSpc>
+              <a:spcBef>
+                <a:spcPts val="600"/>
+              </a:spcBef>
+              <a:spcAft>
+                <a:spcPts val="800"/>
+              </a:spcAft>
+              <a:buNone/>
+            </a:pPr>
+            <a:r>
+              <a:rPr lang="en-US" sz="1800" b="1" dirty="0">
+                <a:solidFill>
+                  <a:srgbClr val="FE4447"/>
+                </a:solidFill>
+                <a:latin typeface="Georgia" pitchFamily="34" charset="0"/>
+                <a:ea typeface="Georgia" pitchFamily="34" charset="-122"/>
+                <a:cs typeface="Georgia" pitchFamily="34" charset="-120"/>
+              </a:rPr>
+              <a:t>Homework</a:t>
+            </a:r>
+            <a:endParaRPr lang="en-US" sz="1800" dirty="0"/>
+          </a:p>
+        </p:txBody>
+      </p:sp>
+      <p:sp>
+        <p:nvSpPr>
+          <p:cNvPr id="4" name="Text 2"/>
+          <p:cNvSpPr/>
+          <p:nvPr/>
+        </p:nvSpPr>
+        <p:spPr>
+          <a:xfrm>
+            <a:off x="634901" y="883593"/>
+            <a:ext cx="8102798" cy="769441"/>
+          </a:xfrm>
+          <a:prstGeom prst="rect">
+            <a:avLst/>
+          </a:prstGeom>
+          <a:noFill/>
+          <a:ln/>
+        </p:spPr>
+        <p:txBody>
+          <a:bodyPr wrap="square" lIns="0" tIns="0" rIns="0" bIns="0" rtlCol="0" anchor="t"/>
+          <a:lstStyle/>
+          <a:p>
+            <a:pPr algn="l" marL="342900" indent="-342900">
+              <a:lnSpc>
+                <a:spcPts val="1620"/>
+              </a:lnSpc>
+              <a:spcAft>
+                <a:spcPts val="300"/>
+              </a:spcAft>
+              <a:buSzPct val="100000"/>
+              <a:buChar char="•"/>
+            </a:pPr>
+            <a:r>
+              <a:rPr lang="en-US" sz="1200" dirty="0">
+                <a:solidFill>
+                  <a:srgbClr val="1C2833"/>
+                </a:solidFill>
+                <a:latin typeface="Arial" pitchFamily="34" charset="0"/>
+                <a:ea typeface="Arial" pitchFamily="34" charset="-122"/>
+                <a:cs typeface="Arial" pitchFamily="34" charset="-120"/>
+              </a:rPr>
+              <a:t>Practice the "complement to 10" reflex: write the deficit of each from 10.</a:t>
+            </a:r>
+            <a:endParaRPr lang="en-US" sz="1200" dirty="0"/>
+          </a:p>
+          <a:p>
+            <a:pPr algn="l" marL="342900" indent="-342900">
+              <a:lnSpc>
+                <a:spcPts val="1620"/>
+              </a:lnSpc>
+              <a:spcAft>
+                <a:spcPts val="300"/>
+              </a:spcAft>
+              <a:buSzPct val="100000"/>
+              <a:buChar char="•"/>
+            </a:pPr>
+            <a:r>
+              <a:rPr lang="en-US" sz="1200" dirty="0">
+                <a:solidFill>
+                  <a:srgbClr val="1C2833"/>
+                </a:solidFill>
+                <a:latin typeface="Arial" pitchFamily="34" charset="0"/>
+                <a:ea typeface="Arial" pitchFamily="34" charset="-122"/>
+                <a:cs typeface="Arial" pitchFamily="34" charset="-120"/>
+              </a:rPr>
+              <a:t>7 → __, 8 → __, 9 → __, 6 → __, 5 → __, 4 → __, 3 → __, 2 → __, 1 → __.</a:t>
+            </a:r>
+            <a:endParaRPr lang="en-US" sz="1200" dirty="0"/>
+          </a:p>
+          <a:p>
+            <a:pPr algn="l" marL="342900" indent="-342900">
+              <a:lnSpc>
+                <a:spcPts val="1620"/>
+              </a:lnSpc>
+              <a:spcAft>
+                <a:spcPts val="300"/>
+              </a:spcAft>
+              <a:buSzPct val="100000"/>
+              <a:buChar char="•"/>
+            </a:pPr>
+            <a:r>
+              <a:rPr lang="en-US" sz="1200" dirty="0">
+                <a:solidFill>
+                  <a:srgbClr val="1C2833"/>
+                </a:solidFill>
+                <a:latin typeface="Arial" pitchFamily="34" charset="0"/>
+                <a:ea typeface="Arial" pitchFamily="34" charset="-122"/>
+                <a:cs typeface="Arial" pitchFamily="34" charset="-120"/>
+              </a:rPr>
+              <a:t>Do all 9 in under 10 seconds.</a:t>
+            </a:r>
+            <a:endParaRPr lang="en-US" sz="1200" dirty="0"/>
+          </a:p>
+        </p:txBody>
+      </p:sp>
+      <p:sp>
+        <p:nvSpPr>
+          <p:cNvPr id="5" name="Text 3"/>
+          <p:cNvSpPr/>
+          <p:nvPr/>
+        </p:nvSpPr>
+        <p:spPr>
+          <a:xfrm>
+            <a:off x="406301" y="4434929"/>
+            <a:ext cx="8498026" cy="213271"/>
+          </a:xfrm>
+          <a:prstGeom prst="rect">
+            <a:avLst/>
+          </a:prstGeom>
+          <a:noFill/>
+          <a:ln/>
+        </p:spPr>
+        <p:txBody>
+          <a:bodyPr wrap="square" lIns="0" tIns="0" rIns="0" bIns="0" rtlCol="0" anchor="t"/>
+          <a:lstStyle/>
+          <a:p>
+            <a:pPr algn="l" indent="0" marL="0">
+              <a:lnSpc>
+                <a:spcPts val="1680"/>
+              </a:lnSpc>
+              <a:spcBef>
+                <a:spcPts val="300"/>
+              </a:spcBef>
+              <a:spcAft>
+                <a:spcPts val="300"/>
+              </a:spcAft>
+              <a:buNone/>
+            </a:pPr>
+            <a:r>
+              <a:rPr lang="en-US" sz="1200" dirty="0">
+                <a:solidFill>
+                  <a:srgbClr val="1C2833"/>
+                </a:solidFill>
+                <a:latin typeface="Arial" pitchFamily="34" charset="0"/>
+                <a:ea typeface="Arial" pitchFamily="34" charset="-122"/>
+                <a:cs typeface="Arial" pitchFamily="34" charset="-120"/>
+              </a:rPr>
+              <a:t>Middle ·  · IKS Curriculum</a:t>
+            </a:r>
+            <a:endParaRPr lang="en-US" sz="1200" dirty="0"/>
+          </a:p>
+        </p:txBody>
+      </p:sp>
+    </p:spTree>
+  </p:cSld>
+  <p:clrMapOvr>
+    <a:masterClrMapping/>
+  </p:clrMapOvr>
+</p:sld>
+</file>
+
+<file path=ppt/slides/slide17.xml><?xml version="1.0" encoding="utf-8"?>
+<p:sld xmlns:a="http://schemas.openxmlformats.org/drawingml/2006/main" xmlns:r="http://schemas.openxmlformats.org/officeDocument/2006/relationships" xmlns:p="http://schemas.openxmlformats.org/presentationml/2006/main">
+  <p:cSld name="Slide 17">
+    <p:bg>
+      <p:bgPr>
+        <a:solidFill>
+          <a:srgbClr val="FFFFFF"/>
+        </a:solidFill>
+      </p:bgPr>
+    </p:bg>
+    <p:spTree>
+      <p:nvGrpSpPr>
+        <p:cNvPr id="1" name=""/>
+        <p:cNvGrpSpPr/>
+        <p:nvPr/>
+      </p:nvGrpSpPr>
+      <p:grpSpPr>
+        <a:xfrm>
+          <a:off x="0" y="0"/>
+          <a:ext cx="0" cy="0"/>
+          <a:chOff x="0" y="0"/>
+          <a:chExt cx="0" cy="0"/>
+        </a:xfrm>
+      </p:grpSpPr>
+      <p:sp>
+        <p:nvSpPr>
+          <p:cNvPr id="2" name="Text 0"/>
+          <p:cNvSpPr/>
+          <p:nvPr/>
+        </p:nvSpPr>
+        <p:spPr>
+          <a:xfrm>
+            <a:off x="0" y="0"/>
+            <a:ext cx="9144000" cy="101501"/>
+          </a:xfrm>
+          <a:prstGeom prst="rect">
+            <a:avLst/>
+          </a:prstGeom>
+          <a:solidFill>
+            <a:srgbClr val="277884"/>
+          </a:solidFill>
+          <a:ln/>
+        </p:spPr>
+        <p:txBody>
+          <a:bodyPr wrap="square" rtlCol="0" anchor="ctr"/>
+          <a:lstStyle/>
+          <a:p>
+            <a:pPr indent="0" marL="0">
+              <a:buNone/>
+            </a:pPr>
+            <a:endParaRPr lang="en-US" dirty="0"/>
+          </a:p>
+        </p:txBody>
+      </p:sp>
+      <p:sp>
+        <p:nvSpPr>
+          <p:cNvPr id="3" name="Text 1"/>
+          <p:cNvSpPr/>
+          <p:nvPr/>
+        </p:nvSpPr>
+        <p:spPr>
+          <a:xfrm>
+            <a:off x="406301" y="457051"/>
+            <a:ext cx="8498026" cy="274290"/>
+          </a:xfrm>
+          <a:prstGeom prst="rect">
+            <a:avLst/>
+          </a:prstGeom>
+          <a:noFill/>
+          <a:ln/>
+        </p:spPr>
+        <p:txBody>
+          <a:bodyPr wrap="square" lIns="0" tIns="0" rIns="0" bIns="0" rtlCol="0" anchor="t"/>
+          <a:lstStyle/>
+          <a:p>
+            <a:pPr algn="l" indent="0" marL="0">
+              <a:lnSpc>
+                <a:spcPts val="2160"/>
+              </a:lnSpc>
+              <a:spcBef>
+                <a:spcPts val="600"/>
+              </a:spcBef>
+              <a:spcAft>
+                <a:spcPts val="800"/>
+              </a:spcAft>
+              <a:buNone/>
+            </a:pPr>
+            <a:r>
+              <a:rPr lang="en-US" sz="1800" b="1" dirty="0">
+                <a:solidFill>
+                  <a:srgbClr val="FE4447"/>
+                </a:solidFill>
+                <a:latin typeface="Georgia" pitchFamily="34" charset="0"/>
+                <a:ea typeface="Georgia" pitchFamily="34" charset="-122"/>
+                <a:cs typeface="Georgia" pitchFamily="34" charset="-120"/>
+              </a:rPr>
+              <a:t>Differentiation</a:t>
+            </a:r>
+            <a:endParaRPr lang="en-US" sz="1800" dirty="0"/>
+          </a:p>
+        </p:txBody>
+      </p:sp>
+      <p:sp>
+        <p:nvSpPr>
+          <p:cNvPr id="4" name="Text 2"/>
+          <p:cNvSpPr/>
+          <p:nvPr/>
+        </p:nvSpPr>
+        <p:spPr>
+          <a:xfrm>
+            <a:off x="634901" y="883593"/>
+            <a:ext cx="8102798" cy="750391"/>
+          </a:xfrm>
+          <a:prstGeom prst="rect">
+            <a:avLst/>
+          </a:prstGeom>
+          <a:noFill/>
+          <a:ln/>
+        </p:spPr>
+        <p:txBody>
+          <a:bodyPr wrap="square" lIns="0" tIns="0" rIns="0" bIns="0" rtlCol="0" anchor="t"/>
+          <a:lstStyle/>
+          <a:p>
+            <a:pPr algn="l" marL="342900" indent="-342900">
+              <a:lnSpc>
+                <a:spcPts val="1620"/>
+              </a:lnSpc>
+              <a:spcAft>
+                <a:spcPts val="300"/>
+              </a:spcAft>
+              <a:buSzPct val="100000"/>
+              <a:buChar char="•"/>
+            </a:pPr>
+            <a:r>
+              <a:rPr lang="en-US" sz="1200" b="1" dirty="0">
+                <a:solidFill>
+                  <a:srgbClr val="1C2833"/>
+                </a:solidFill>
+                <a:latin typeface="Arial" pitchFamily="34" charset="0"/>
+                <a:ea typeface="Arial" pitchFamily="34" charset="-122"/>
+                <a:cs typeface="Arial" pitchFamily="34" charset="-120"/>
+              </a:rPr>
+              <a:t>Tier up:</a:t>
+            </a:r>
+            <a:pPr algn="l" indent="0" marL="0">
+              <a:lnSpc>
+                <a:spcPts val="1620"/>
+              </a:lnSpc>
+              <a:spcAft>
+                <a:spcPts val="300"/>
+              </a:spcAft>
+              <a:buNone/>
+            </a:pPr>
+            <a:r>
+              <a:rPr lang="en-US" sz="1200" dirty="0">
+                <a:solidFill>
+                  <a:srgbClr val="1C2833"/>
+                </a:solidFill>
+                <a:latin typeface="Arial" pitchFamily="34" charset="0"/>
+                <a:ea typeface="Arial" pitchFamily="34" charset="-122"/>
+                <a:cs typeface="Arial" pitchFamily="34" charset="-120"/>
+              </a:rPr>
+              <a:t> Try </a:t>
+            </a:r>
+            <a:pPr algn="l" indent="0" marL="0">
+              <a:lnSpc>
+                <a:spcPts val="1620"/>
+              </a:lnSpc>
+              <a:spcAft>
+                <a:spcPts val="300"/>
+              </a:spcAft>
+              <a:buNone/>
+            </a:pPr>
+            <a:r>
+              <a:rPr lang="en-US" sz="1200" dirty="0">
+                <a:solidFill>
+                  <a:srgbClr val="1C2833"/>
+                </a:solidFill>
+                <a:latin typeface="Arial" pitchFamily="34" charset="0"/>
+                <a:ea typeface="Arial" pitchFamily="34" charset="-122"/>
+                <a:cs typeface="Arial" pitchFamily="34" charset="-120"/>
+              </a:rPr>
+              <a:t>103 × 104</a:t>
+            </a:r>
+            <a:pPr algn="l" indent="0" marL="0">
+              <a:lnSpc>
+                <a:spcPts val="1620"/>
+              </a:lnSpc>
+              <a:spcAft>
+                <a:spcPts val="300"/>
+              </a:spcAft>
+              <a:buNone/>
+            </a:pPr>
+            <a:r>
+              <a:rPr lang="en-US" sz="1200" dirty="0">
+                <a:solidFill>
+                  <a:srgbClr val="1C2833"/>
+                </a:solidFill>
+                <a:latin typeface="Arial" pitchFamily="34" charset="0"/>
+                <a:ea typeface="Arial" pitchFamily="34" charset="-122"/>
+                <a:cs typeface="Arial" pitchFamily="34" charset="-120"/>
+              </a:rPr>
+              <a:t> (both </a:t>
+            </a:r>
+            <a:pPr algn="l" indent="0" marL="0">
+              <a:lnSpc>
+                <a:spcPts val="1620"/>
+              </a:lnSpc>
+              <a:spcAft>
+                <a:spcPts val="300"/>
+              </a:spcAft>
+              <a:buNone/>
+            </a:pPr>
+            <a:r>
+              <a:rPr lang="en-US" sz="1200" i="1" dirty="0">
+                <a:solidFill>
+                  <a:srgbClr val="1C2833"/>
+                </a:solidFill>
+                <a:latin typeface="Arial" pitchFamily="34" charset="0"/>
+                <a:ea typeface="Arial" pitchFamily="34" charset="-122"/>
+                <a:cs typeface="Arial" pitchFamily="34" charset="-120"/>
+              </a:rPr>
+              <a:t>above</a:t>
+            </a:r>
+            <a:pPr algn="l" indent="0" marL="0">
+              <a:lnSpc>
+                <a:spcPts val="1620"/>
+              </a:lnSpc>
+              <a:spcAft>
+                <a:spcPts val="300"/>
+              </a:spcAft>
+              <a:buNone/>
+            </a:pPr>
+            <a:r>
+              <a:rPr lang="en-US" sz="1200" dirty="0">
+                <a:solidFill>
+                  <a:srgbClr val="1C2833"/>
+                </a:solidFill>
+                <a:latin typeface="Arial" pitchFamily="34" charset="0"/>
+                <a:ea typeface="Arial" pitchFamily="34" charset="-122"/>
+                <a:cs typeface="Arial" pitchFamily="34" charset="-120"/>
+              </a:rPr>
+              <a:t> 100). Note: instead of cross-subtract, you'll need to cross-</a:t>
+            </a:r>
+            <a:pPr algn="l" indent="0" marL="0">
+              <a:lnSpc>
+                <a:spcPts val="1620"/>
+              </a:lnSpc>
+              <a:spcAft>
+                <a:spcPts val="300"/>
+              </a:spcAft>
+              <a:buNone/>
+            </a:pPr>
+            <a:r>
+              <a:rPr lang="en-US" sz="1200" i="1" dirty="0">
+                <a:solidFill>
+                  <a:srgbClr val="1C2833"/>
+                </a:solidFill>
+                <a:latin typeface="Arial" pitchFamily="34" charset="0"/>
+                <a:ea typeface="Arial" pitchFamily="34" charset="-122"/>
+                <a:cs typeface="Arial" pitchFamily="34" charset="-120"/>
+              </a:rPr>
+              <a:t>add</a:t>
+            </a:r>
+            <a:pPr algn="l" indent="0" marL="0">
+              <a:lnSpc>
+                <a:spcPts val="1620"/>
+              </a:lnSpc>
+              <a:spcAft>
+                <a:spcPts val="300"/>
+              </a:spcAft>
+              <a:buNone/>
+            </a:pPr>
+            <a:r>
+              <a:rPr lang="en-US" sz="1200" dirty="0">
+                <a:solidFill>
+                  <a:srgbClr val="1C2833"/>
+                </a:solidFill>
+                <a:latin typeface="Arial" pitchFamily="34" charset="0"/>
+                <a:ea typeface="Arial" pitchFamily="34" charset="-122"/>
+                <a:cs typeface="Arial" pitchFamily="34" charset="-120"/>
+              </a:rPr>
+              <a:t>. See if you can work out the pattern before Day 4.</a:t>
+            </a:r>
+            <a:endParaRPr lang="en-US" sz="1200" dirty="0"/>
+          </a:p>
+          <a:p>
+            <a:pPr algn="l" marL="342900" indent="-342900">
+              <a:lnSpc>
+                <a:spcPts val="1620"/>
+              </a:lnSpc>
+              <a:spcAft>
+                <a:spcPts val="300"/>
+              </a:spcAft>
+              <a:buSzPct val="100000"/>
+              <a:buChar char="•"/>
+            </a:pPr>
+            <a:r>
+              <a:rPr lang="en-US" sz="1200" b="1" dirty="0">
+                <a:solidFill>
+                  <a:srgbClr val="1C2833"/>
+                </a:solidFill>
+                <a:latin typeface="Arial" pitchFamily="34" charset="0"/>
+                <a:ea typeface="Arial" pitchFamily="34" charset="-122"/>
+                <a:cs typeface="Arial" pitchFamily="34" charset="-120"/>
+              </a:rPr>
+              <a:t>Tier down:</a:t>
+            </a:r>
+            <a:pPr algn="l" indent="0" marL="0">
+              <a:lnSpc>
+                <a:spcPts val="1620"/>
+              </a:lnSpc>
+              <a:spcAft>
+                <a:spcPts val="300"/>
+              </a:spcAft>
+              <a:buNone/>
+            </a:pPr>
+            <a:r>
+              <a:rPr lang="en-US" sz="1200" dirty="0">
+                <a:solidFill>
+                  <a:srgbClr val="1C2833"/>
+                </a:solidFill>
+                <a:latin typeface="Arial" pitchFamily="34" charset="0"/>
+                <a:ea typeface="Arial" pitchFamily="34" charset="-122"/>
+                <a:cs typeface="Arial" pitchFamily="34" charset="-120"/>
+              </a:rPr>
+              <a:t> If 2-digit feels too fast, drop to single-digit near 10 (7 × 8, 6 × 9). We'll formally do this on Day 2.</a:t>
+            </a:r>
+            <a:endParaRPr lang="en-US" sz="1200" dirty="0"/>
+          </a:p>
+        </p:txBody>
+      </p:sp>
+      <p:sp>
+        <p:nvSpPr>
+          <p:cNvPr id="5" name="Text 3"/>
+          <p:cNvSpPr/>
+          <p:nvPr/>
+        </p:nvSpPr>
+        <p:spPr>
+          <a:xfrm>
+            <a:off x="406301" y="4434929"/>
+            <a:ext cx="8498026" cy="213271"/>
+          </a:xfrm>
+          <a:prstGeom prst="rect">
+            <a:avLst/>
+          </a:prstGeom>
+          <a:noFill/>
+          <a:ln/>
+        </p:spPr>
+        <p:txBody>
+          <a:bodyPr wrap="square" lIns="0" tIns="0" rIns="0" bIns="0" rtlCol="0" anchor="t"/>
+          <a:lstStyle/>
+          <a:p>
+            <a:pPr algn="l" indent="0" marL="0">
+              <a:lnSpc>
+                <a:spcPts val="1680"/>
+              </a:lnSpc>
+              <a:spcBef>
+                <a:spcPts val="300"/>
+              </a:spcBef>
+              <a:spcAft>
+                <a:spcPts val="300"/>
+              </a:spcAft>
+              <a:buNone/>
+            </a:pPr>
+            <a:r>
+              <a:rPr lang="en-US" sz="1200" dirty="0">
+                <a:solidFill>
+                  <a:srgbClr val="1C2833"/>
+                </a:solidFill>
+                <a:latin typeface="Arial" pitchFamily="34" charset="0"/>
+                <a:ea typeface="Arial" pitchFamily="34" charset="-122"/>
+                <a:cs typeface="Arial" pitchFamily="34" charset="-120"/>
+              </a:rPr>
+              <a:t>Middle ·  · IKS Curriculum</a:t>
+            </a:r>
+            <a:endParaRPr lang="en-US" sz="1200" dirty="0"/>
+          </a:p>
+        </p:txBody>
+      </p:sp>
+    </p:spTree>
+  </p:cSld>
+  <p:clrMapOvr>
+    <a:masterClrMapping/>
+  </p:clrMapOvr>
+</p:sld>
+</file>
+
+<file path=ppt/slides/slide18.xml><?xml version="1.0" encoding="utf-8"?>
+<p:sld xmlns:a="http://schemas.openxmlformats.org/drawingml/2006/main" xmlns:r="http://schemas.openxmlformats.org/officeDocument/2006/relationships" xmlns:p="http://schemas.openxmlformats.org/presentationml/2006/main">
+  <p:cSld name="Slide 18">
+    <p:bg>
+      <p:bgPr>
+        <a:solidFill>
+          <a:srgbClr val="FFFFFF"/>
+        </a:solidFill>
+      </p:bgPr>
+    </p:bg>
+    <p:spTree>
+      <p:nvGrpSpPr>
+        <p:cNvPr id="1" name=""/>
+        <p:cNvGrpSpPr/>
+        <p:nvPr/>
+      </p:nvGrpSpPr>
+      <p:grpSpPr>
+        <a:xfrm>
+          <a:off x="0" y="0"/>
+          <a:ext cx="0" cy="0"/>
+          <a:chOff x="0" y="0"/>
+          <a:chExt cx="0" cy="0"/>
+        </a:xfrm>
+      </p:grpSpPr>
+      <p:sp>
+        <p:nvSpPr>
+          <p:cNvPr id="2" name="Text 0"/>
+          <p:cNvSpPr/>
+          <p:nvPr/>
+        </p:nvSpPr>
+        <p:spPr>
+          <a:xfrm>
+            <a:off x="0" y="0"/>
+            <a:ext cx="9144000" cy="101501"/>
+          </a:xfrm>
+          <a:prstGeom prst="rect">
+            <a:avLst/>
+          </a:prstGeom>
+          <a:solidFill>
+            <a:srgbClr val="277884"/>
+          </a:solidFill>
+          <a:ln/>
+        </p:spPr>
+        <p:txBody>
+          <a:bodyPr wrap="square" rtlCol="0" anchor="ctr"/>
+          <a:lstStyle/>
+          <a:p>
+            <a:pPr indent="0" marL="0">
+              <a:buNone/>
+            </a:pPr>
+            <a:endParaRPr lang="en-US" dirty="0"/>
+          </a:p>
+        </p:txBody>
+      </p:sp>
+      <p:sp>
+        <p:nvSpPr>
+          <p:cNvPr id="3" name="Text 1"/>
+          <p:cNvSpPr/>
+          <p:nvPr/>
+        </p:nvSpPr>
+        <p:spPr>
+          <a:xfrm>
+            <a:off x="406301" y="457051"/>
+            <a:ext cx="8498026" cy="274290"/>
+          </a:xfrm>
+          <a:prstGeom prst="rect">
+            <a:avLst/>
+          </a:prstGeom>
+          <a:noFill/>
+          <a:ln/>
+        </p:spPr>
+        <p:txBody>
+          <a:bodyPr wrap="square" lIns="0" tIns="0" rIns="0" bIns="0" rtlCol="0" anchor="t"/>
+          <a:lstStyle/>
+          <a:p>
+            <a:pPr algn="l" indent="0" marL="0">
+              <a:lnSpc>
+                <a:spcPts val="2160"/>
+              </a:lnSpc>
+              <a:spcBef>
+                <a:spcPts val="600"/>
+              </a:spcBef>
+              <a:spcAft>
+                <a:spcPts val="800"/>
+              </a:spcAft>
+              <a:buNone/>
+            </a:pPr>
+            <a:r>
+              <a:rPr lang="en-US" sz="1800" b="1" dirty="0">
+                <a:solidFill>
+                  <a:srgbClr val="FE4447"/>
+                </a:solidFill>
+                <a:latin typeface="Georgia" pitchFamily="34" charset="0"/>
+                <a:ea typeface="Georgia" pitchFamily="34" charset="-122"/>
+                <a:cs typeface="Georgia" pitchFamily="34" charset="-120"/>
+              </a:rPr>
+              <a:t>Teacher notes</a:t>
+            </a:r>
+            <a:endParaRPr lang="en-US" sz="1800" dirty="0"/>
+          </a:p>
+        </p:txBody>
+      </p:sp>
+      <p:sp>
+        <p:nvSpPr>
+          <p:cNvPr id="4" name="Text 2"/>
+          <p:cNvSpPr/>
+          <p:nvPr/>
+        </p:nvSpPr>
+        <p:spPr>
+          <a:xfrm>
+            <a:off x="634901" y="883593"/>
+            <a:ext cx="8102798" cy="1649313"/>
+          </a:xfrm>
+          <a:prstGeom prst="rect">
+            <a:avLst/>
+          </a:prstGeom>
+          <a:noFill/>
+          <a:ln/>
+        </p:spPr>
+        <p:txBody>
+          <a:bodyPr wrap="square" lIns="0" tIns="0" rIns="0" bIns="0" rtlCol="0" anchor="t"/>
+          <a:lstStyle/>
+          <a:p>
+            <a:pPr algn="l" marL="342900" indent="-342900">
+              <a:lnSpc>
+                <a:spcPts val="1620"/>
+              </a:lnSpc>
+              <a:spcAft>
+                <a:spcPts val="300"/>
+              </a:spcAft>
+              <a:buSzPct val="100000"/>
+              <a:buChar char="•"/>
+            </a:pPr>
+            <a:r>
+              <a:rPr lang="en-US" sz="1200" dirty="0">
+                <a:solidFill>
+                  <a:srgbClr val="1C2833"/>
+                </a:solidFill>
+                <a:latin typeface="Arial" pitchFamily="34" charset="0"/>
+                <a:ea typeface="Arial" pitchFamily="34" charset="-122"/>
+                <a:cs typeface="Arial" pitchFamily="34" charset="-120"/>
+              </a:rPr>
+              <a:t>The baseline time is the </a:t>
+            </a:r>
+            <a:pPr algn="l" indent="0" marL="0">
+              <a:lnSpc>
+                <a:spcPts val="1620"/>
+              </a:lnSpc>
+              <a:spcAft>
+                <a:spcPts val="300"/>
+              </a:spcAft>
+              <a:buNone/>
+            </a:pPr>
+            <a:r>
+              <a:rPr lang="en-US" sz="1200" i="1" dirty="0">
+                <a:solidFill>
+                  <a:srgbClr val="1C2833"/>
+                </a:solidFill>
+                <a:latin typeface="Arial" pitchFamily="34" charset="0"/>
+                <a:ea typeface="Arial" pitchFamily="34" charset="-122"/>
+                <a:cs typeface="Arial" pitchFamily="34" charset="-120"/>
+              </a:rPr>
+              <a:t>single most important</a:t>
+            </a:r>
+            <a:pPr algn="l" indent="0" marL="0">
+              <a:lnSpc>
+                <a:spcPts val="1620"/>
+              </a:lnSpc>
+              <a:spcAft>
+                <a:spcPts val="300"/>
+              </a:spcAft>
+              <a:buNone/>
+            </a:pPr>
+            <a:r>
+              <a:rPr lang="en-US" sz="1200" dirty="0">
+                <a:solidFill>
+                  <a:srgbClr val="1C2833"/>
+                </a:solidFill>
+                <a:latin typeface="Arial" pitchFamily="34" charset="0"/>
+                <a:ea typeface="Arial" pitchFamily="34" charset="-122"/>
+                <a:cs typeface="Arial" pitchFamily="34" charset="-120"/>
+              </a:rPr>
+              <a:t> artefact of Day 1. Make sure every student records it honestly. Day 9's retest depends on it.</a:t>
+            </a:r>
+            <a:endParaRPr lang="en-US" sz="1200" dirty="0"/>
+          </a:p>
+          <a:p>
+            <a:pPr algn="l" marL="342900" indent="-342900">
+              <a:lnSpc>
+                <a:spcPts val="1620"/>
+              </a:lnSpc>
+              <a:spcAft>
+                <a:spcPts val="300"/>
+              </a:spcAft>
+              <a:buSzPct val="100000"/>
+              <a:buChar char="•"/>
+            </a:pPr>
+            <a:r>
+              <a:rPr lang="en-US" sz="1200" dirty="0">
+                <a:solidFill>
+                  <a:srgbClr val="1C2833"/>
+                </a:solidFill>
+                <a:latin typeface="Arial" pitchFamily="34" charset="0"/>
+                <a:ea typeface="Arial" pitchFamily="34" charset="-122"/>
+                <a:cs typeface="Arial" pitchFamily="34" charset="-120"/>
+              </a:rPr>
+              <a:t>Don't promise a specific speedup. Say "you'll likely be faster by Day 9; how much depends on you."</a:t>
+            </a:r>
+            <a:endParaRPr lang="en-US" sz="1200" dirty="0"/>
+          </a:p>
+          <a:p>
+            <a:pPr algn="l" marL="342900" indent="-342900">
+              <a:lnSpc>
+                <a:spcPts val="1620"/>
+              </a:lnSpc>
+              <a:spcAft>
+                <a:spcPts val="300"/>
+              </a:spcAft>
+              <a:buSzPct val="100000"/>
+              <a:buChar char="•"/>
+            </a:pPr>
+            <a:r>
+              <a:rPr lang="en-US" sz="1200" dirty="0">
+                <a:solidFill>
+                  <a:srgbClr val="1C2833"/>
+                </a:solidFill>
+                <a:latin typeface="Arial" pitchFamily="34" charset="0"/>
+                <a:ea typeface="Arial" pitchFamily="34" charset="-122"/>
+                <a:cs typeface="Arial" pitchFamily="34" charset="-120"/>
+              </a:rPr>
+              <a:t>Some students will ask "why does this work?" — defer to Day 7. </a:t>
+            </a:r>
+            <a:pPr algn="l" indent="0" marL="0">
+              <a:lnSpc>
+                <a:spcPts val="1620"/>
+              </a:lnSpc>
+              <a:spcAft>
+                <a:spcPts val="300"/>
+              </a:spcAft>
+              <a:buNone/>
+            </a:pPr>
+            <a:r>
+              <a:rPr lang="en-US" sz="1200" i="1" dirty="0">
+                <a:solidFill>
+                  <a:srgbClr val="1C2833"/>
+                </a:solidFill>
+                <a:latin typeface="Arial" pitchFamily="34" charset="0"/>
+                <a:ea typeface="Arial" pitchFamily="34" charset="-122"/>
+                <a:cs typeface="Arial" pitchFamily="34" charset="-120"/>
+              </a:rPr>
+              <a:t>"Great question. We'll prove it. For now, just notice that it does work."</a:t>
+            </a:r>
+            <a:endParaRPr lang="en-US" sz="1200" dirty="0"/>
+          </a:p>
+          <a:p>
+            <a:pPr algn="l" marL="342900" indent="-342900">
+              <a:lnSpc>
+                <a:spcPts val="1620"/>
+              </a:lnSpc>
+              <a:spcAft>
+                <a:spcPts val="300"/>
+              </a:spcAft>
+              <a:buSzPct val="100000"/>
+              <a:buChar char="•"/>
+            </a:pPr>
+            <a:r>
+              <a:rPr lang="en-US" sz="1200" dirty="0">
+                <a:solidFill>
+                  <a:srgbClr val="1C2833"/>
+                </a:solidFill>
+                <a:latin typeface="Arial" pitchFamily="34" charset="0"/>
+                <a:ea typeface="Arial" pitchFamily="34" charset="-122"/>
+                <a:cs typeface="Arial" pitchFamily="34" charset="-120"/>
+              </a:rPr>
+              <a:t>A few students will try to short-cut and use </a:t>
+            </a:r>
+            <a:pPr algn="l" indent="0" marL="0">
+              <a:lnSpc>
+                <a:spcPts val="1620"/>
+              </a:lnSpc>
+              <a:spcAft>
+                <a:spcPts val="300"/>
+              </a:spcAft>
+              <a:buNone/>
+            </a:pPr>
+            <a:r>
+              <a:rPr lang="en-US" sz="1200" dirty="0">
+                <a:solidFill>
+                  <a:srgbClr val="1C2833"/>
+                </a:solidFill>
+                <a:latin typeface="Arial" pitchFamily="34" charset="0"/>
+                <a:ea typeface="Arial" pitchFamily="34" charset="-122"/>
+                <a:cs typeface="Arial" pitchFamily="34" charset="-120"/>
+              </a:rPr>
+              <a:t>−3 × −4</a:t>
+            </a:r>
+            <a:pPr algn="l" indent="0" marL="0">
+              <a:lnSpc>
+                <a:spcPts val="1620"/>
+              </a:lnSpc>
+              <a:spcAft>
+                <a:spcPts val="300"/>
+              </a:spcAft>
+              <a:buNone/>
+            </a:pPr>
+            <a:r>
+              <a:rPr lang="en-US" sz="1200" dirty="0">
+                <a:solidFill>
+                  <a:srgbClr val="1C2833"/>
+                </a:solidFill>
+                <a:latin typeface="Arial" pitchFamily="34" charset="0"/>
+                <a:ea typeface="Arial" pitchFamily="34" charset="-122"/>
+                <a:cs typeface="Arial" pitchFamily="34" charset="-120"/>
+              </a:rPr>
+              <a:t> as the right part, getting a sign-error. Wait until Day 5 for the mixed case. For today, all deficits are positive.</a:t>
+            </a:r>
+            <a:endParaRPr lang="en-US" sz="1200" dirty="0"/>
+          </a:p>
+        </p:txBody>
+      </p:sp>
+      <p:sp>
+        <p:nvSpPr>
+          <p:cNvPr id="5" name="Text 3"/>
+          <p:cNvSpPr/>
+          <p:nvPr/>
+        </p:nvSpPr>
+        <p:spPr>
+          <a:xfrm>
+            <a:off x="406301" y="4434929"/>
+            <a:ext cx="8498026" cy="213271"/>
+          </a:xfrm>
+          <a:prstGeom prst="rect">
+            <a:avLst/>
+          </a:prstGeom>
+          <a:noFill/>
+          <a:ln/>
+        </p:spPr>
+        <p:txBody>
+          <a:bodyPr wrap="square" lIns="0" tIns="0" rIns="0" bIns="0" rtlCol="0" anchor="t"/>
+          <a:lstStyle/>
+          <a:p>
+            <a:pPr algn="l" indent="0" marL="0">
+              <a:lnSpc>
+                <a:spcPts val="1680"/>
+              </a:lnSpc>
+              <a:spcBef>
+                <a:spcPts val="300"/>
+              </a:spcBef>
+              <a:spcAft>
+                <a:spcPts val="300"/>
+              </a:spcAft>
+              <a:buNone/>
+            </a:pPr>
+            <a:r>
+              <a:rPr lang="en-US" sz="1200" dirty="0">
+                <a:solidFill>
+                  <a:srgbClr val="1C2833"/>
+                </a:solidFill>
+                <a:latin typeface="Arial" pitchFamily="34" charset="0"/>
+                <a:ea typeface="Arial" pitchFamily="34" charset="-122"/>
+                <a:cs typeface="Arial" pitchFamily="34" charset="-120"/>
+              </a:rPr>
+              <a:t>Middle ·  · IKS Curriculum</a:t>
+            </a:r>
+            <a:endParaRPr lang="en-US" sz="1200" dirty="0"/>
+          </a:p>
+        </p:txBody>
+      </p:sp>
+    </p:spTree>
+  </p:cSld>
+  <p:clrMapOvr>
+    <a:masterClrMapping/>
+  </p:clrMapOvr>
+</p:sld>
+</file>
+
+<file path=ppt/slides/slide19.xml><?xml version="1.0" encoding="utf-8"?>
+<p:sld xmlns:a="http://schemas.openxmlformats.org/drawingml/2006/main" xmlns:r="http://schemas.openxmlformats.org/officeDocument/2006/relationships" xmlns:p="http://schemas.openxmlformats.org/presentationml/2006/main">
+  <p:cSld name="Slide 19">
+    <p:bg>
+      <p:bgPr>
+        <a:solidFill>
+          <a:srgbClr val="FFFFFF"/>
+        </a:solidFill>
+      </p:bgPr>
+    </p:bg>
+    <p:spTree>
+      <p:nvGrpSpPr>
+        <p:cNvPr id="1" name=""/>
+        <p:cNvGrpSpPr/>
+        <p:nvPr/>
+      </p:nvGrpSpPr>
+      <p:grpSpPr>
+        <a:xfrm>
+          <a:off x="0" y="0"/>
+          <a:ext cx="0" cy="0"/>
+          <a:chOff x="0" y="0"/>
+          <a:chExt cx="0" cy="0"/>
+        </a:xfrm>
+      </p:grpSpPr>
+      <p:sp>
+        <p:nvSpPr>
+          <p:cNvPr id="2" name="Text 0"/>
+          <p:cNvSpPr/>
+          <p:nvPr/>
+        </p:nvSpPr>
+        <p:spPr>
+          <a:xfrm>
+            <a:off x="0" y="0"/>
+            <a:ext cx="9144000" cy="101501"/>
+          </a:xfrm>
+          <a:prstGeom prst="rect">
+            <a:avLst/>
+          </a:prstGeom>
+          <a:solidFill>
+            <a:srgbClr val="277884"/>
+          </a:solidFill>
+          <a:ln/>
+        </p:spPr>
+        <p:txBody>
+          <a:bodyPr wrap="square" rtlCol="0" anchor="ctr"/>
+          <a:lstStyle/>
+          <a:p>
+            <a:pPr indent="0" marL="0">
+              <a:buNone/>
+            </a:pPr>
+            <a:endParaRPr lang="en-US" dirty="0"/>
+          </a:p>
+        </p:txBody>
+      </p:sp>
+      <p:sp>
+        <p:nvSpPr>
+          <p:cNvPr id="3" name="Text 1"/>
+          <p:cNvSpPr/>
+          <p:nvPr/>
+        </p:nvSpPr>
+        <p:spPr>
+          <a:xfrm>
+            <a:off x="406301" y="457051"/>
+            <a:ext cx="8498026" cy="274290"/>
+          </a:xfrm>
+          <a:prstGeom prst="rect">
+            <a:avLst/>
+          </a:prstGeom>
+          <a:noFill/>
+          <a:ln/>
+        </p:spPr>
+        <p:txBody>
+          <a:bodyPr wrap="square" lIns="0" tIns="0" rIns="0" bIns="0" rtlCol="0" anchor="t"/>
+          <a:lstStyle/>
+          <a:p>
+            <a:pPr algn="l" indent="0" marL="0">
+              <a:lnSpc>
+                <a:spcPts val="2160"/>
+              </a:lnSpc>
+              <a:spcBef>
+                <a:spcPts val="600"/>
+              </a:spcBef>
+              <a:spcAft>
+                <a:spcPts val="800"/>
+              </a:spcAft>
+              <a:buNone/>
+            </a:pPr>
+            <a:r>
+              <a:rPr lang="en-US" sz="1800" b="1" dirty="0">
+                <a:solidFill>
+                  <a:srgbClr val="FE4447"/>
+                </a:solidFill>
+                <a:latin typeface="Georgia" pitchFamily="34" charset="0"/>
+                <a:ea typeface="Georgia" pitchFamily="34" charset="-122"/>
+                <a:cs typeface="Georgia" pitchFamily="34" charset="-120"/>
+              </a:rPr>
               <a:t>Citation(s) used in this lesson</a:t>
             </a:r>
             <a:endParaRPr lang="en-US" sz="1800" dirty="0"/>
@@ -4583,7 +6819,7 @@
                 <a:ea typeface="Georgia" pitchFamily="34" charset="-122"/>
                 <a:cs typeface="Georgia" pitchFamily="34" charset="-120"/>
               </a:rPr>
-              <a:t>Materials</a:t>
+              <a:t>Learning objective</a:t>
             </a:r>
             <a:endParaRPr lang="en-US" sz="1800" dirty="0"/>
           </a:p>
@@ -4598,7 +6834,7 @@
         <p:spPr>
           <a:xfrm>
             <a:off x="406301" y="870942"/>
-            <a:ext cx="8498026" cy="649337"/>
+            <a:ext cx="8498026" cy="436066"/>
           </a:xfrm>
           <a:prstGeom prst="rect">
             <a:avLst/>
@@ -4631,7 +6867,7 @@
                 <a:ea typeface="Arial" pitchFamily="34" charset="-122"/>
                 <a:cs typeface="Arial" pitchFamily="34" charset="-120"/>
               </a:rPr>
-              <a:t>– Printed baseline sheet: a single problem </a:t>
+              <a:t>By the end of this lesson, students will record a personal baseline time for </a:t>
             </a:r>
             <a:pPr algn="l" indent="0" marL="0">
               <a:lnSpc>
@@ -4654,7 +6890,7 @@
                 <a:ea typeface="Arial" pitchFamily="34" charset="-122"/>
                 <a:cs typeface="Arial" pitchFamily="34" charset="-120"/>
               </a:rPr>
-              <a:t>97 × 96 = ?</a:t>
+              <a:t>97 × 96</a:t>
             </a:r>
             <a:pPr algn="l" indent="0" marL="0">
               <a:lnSpc>
@@ -4677,7 +6913,53 @@
                 <a:ea typeface="Arial" pitchFamily="34" charset="-122"/>
                 <a:cs typeface="Arial" pitchFamily="34" charset="-120"/>
               </a:rPr>
-              <a:t> with workspace and "your time" line. One per student. – Stopwatch or wall clock with a second hand. One per pair is enough. – Whiteboard with a single vertical dividing line drawn down the middle (the "Nikhilam split").</a:t>
+              <a:t> solved by long multiplication, and will have seen the </a:t>
+            </a:r>
+            <a:pPr algn="l" indent="0" marL="0">
+              <a:lnSpc>
+                <a:spcPts val="1680"/>
+              </a:lnSpc>
+              <a:spcBef>
+                <a:spcPts val="300"/>
+              </a:spcBef>
+              <a:spcAft>
+                <a:spcPts val="300"/>
+              </a:spcAft>
+              <a:buNone/>
+            </a:pPr>
+            <a:r>
+              <a:rPr lang="en-US" sz="1200" i="1" dirty="0">
+                <a:solidFill>
+                  <a:srgbClr val="1C2833"/>
+                </a:solidFill>
+                <a:latin typeface="Arial" pitchFamily="34" charset="0"/>
+                <a:ea typeface="Arial" pitchFamily="34" charset="-122"/>
+                <a:cs typeface="Arial" pitchFamily="34" charset="-120"/>
+              </a:rPr>
+              <a:t>Nikhilam</a:t>
+            </a:r>
+            <a:pPr algn="l" indent="0" marL="0">
+              <a:lnSpc>
+                <a:spcPts val="1680"/>
+              </a:lnSpc>
+              <a:spcBef>
+                <a:spcPts val="300"/>
+              </a:spcBef>
+              <a:spcAft>
+                <a:spcPts val="300"/>
+              </a:spcAft>
+              <a:buNone/>
+            </a:pPr>
+            <a:r>
+              <a:rPr lang="en-US" sz="1200" dirty="0">
+                <a:solidFill>
+                  <a:srgbClr val="1C2833"/>
+                </a:solidFill>
+                <a:latin typeface="Arial" pitchFamily="34" charset="0"/>
+                <a:ea typeface="Arial" pitchFamily="34" charset="-122"/>
+                <a:cs typeface="Arial" pitchFamily="34" charset="-120"/>
+              </a:rPr>
+              <a:t> method produce the same answer in under 5 seconds.</a:t>
             </a:r>
             <a:endParaRPr lang="en-US" sz="1200" dirty="0"/>
           </a:p>
@@ -4835,7 +7117,7 @@
                 <a:ea typeface="Georgia" pitchFamily="34" charset="-122"/>
                 <a:cs typeface="Georgia" pitchFamily="34" charset="-120"/>
               </a:rPr>
-              <a:t>Vocabulary introduced today</a:t>
+              <a:t>Materials</a:t>
             </a:r>
             <a:endParaRPr lang="en-US" sz="1800" dirty="0"/>
           </a:p>
@@ -4850,7 +7132,7 @@
         <p:spPr>
           <a:xfrm>
             <a:off x="634901" y="883593"/>
-            <a:ext cx="8102798" cy="975122"/>
+            <a:ext cx="8102798" cy="788491"/>
           </a:xfrm>
           <a:prstGeom prst="rect">
             <a:avLst/>
@@ -4873,15 +7155,15 @@
               <a:buChar char="•"/>
             </a:pPr>
             <a:r>
-              <a:rPr lang="en-US" sz="1200" i="1" dirty="0">
-                <a:solidFill>
-                  <a:srgbClr val="1C2833"/>
-                </a:solidFill>
-                <a:latin typeface="Arial" pitchFamily="34" charset="0"/>
-                <a:ea typeface="Arial" pitchFamily="34" charset="-122"/>
-                <a:cs typeface="Arial" pitchFamily="34" charset="-120"/>
-              </a:rPr>
-              <a:t>Nikhilam</a:t>
+              <a:rPr lang="en-US" sz="1200" dirty="0">
+                <a:solidFill>
+                  <a:srgbClr val="1C2833"/>
+                </a:solidFill>
+                <a:latin typeface="Arial" pitchFamily="34" charset="0"/>
+                <a:ea typeface="Arial" pitchFamily="34" charset="-122"/>
+                <a:cs typeface="Arial" pitchFamily="34" charset="-120"/>
+              </a:rPr>
+              <a:t>Printed baseline sheet: a single problem </a:t>
             </a:r>
             <a:pPr algn="l" indent="0" marL="0">
               <a:lnSpc>
@@ -4901,7 +7183,7 @@
                 <a:ea typeface="Arial" pitchFamily="34" charset="-122"/>
                 <a:cs typeface="Arial" pitchFamily="34" charset="-120"/>
               </a:rPr>
-              <a:t> (IAST: nikhilam; lit. "all" — short for </a:t>
+              <a:t>97 × 96 = ?</a:t>
             </a:r>
             <a:pPr algn="l" indent="0" marL="0">
               <a:lnSpc>
@@ -4913,26 +7195,6 @@
               <a:buNone/>
             </a:pPr>
             <a:r>
-              <a:rPr lang="en-US" sz="1200" i="1" dirty="0">
-                <a:solidFill>
-                  <a:srgbClr val="1C2833"/>
-                </a:solidFill>
-                <a:latin typeface="Arial" pitchFamily="34" charset="0"/>
-                <a:ea typeface="Arial" pitchFamily="34" charset="-122"/>
-                <a:cs typeface="Arial" pitchFamily="34" charset="-120"/>
-              </a:rPr>
-              <a:t>Nikhilam Navataścaramaṁ Daśataḥ</a:t>
-            </a:r>
-            <a:pPr algn="l" indent="0" marL="0">
-              <a:lnSpc>
-                <a:spcPts val="1620"/>
-              </a:lnSpc>
-              <a:spcAft>
-                <a:spcPts val="300"/>
-              </a:spcAft>
-              <a:buNone/>
-            </a:pPr>
-            <a:r>
               <a:rPr lang="en-US" sz="1200" dirty="0">
                 <a:solidFill>
                   <a:srgbClr val="1C2833"/>
@@ -4941,7 +7203,7 @@
                 <a:ea typeface="Arial" pitchFamily="34" charset="-122"/>
                 <a:cs typeface="Arial" pitchFamily="34" charset="-120"/>
               </a:rPr>
-              <a:t>, "all from 9 and the last from 10") — Tirthaji's 2nd sūtra; here, the rule for multiplication near a base.</a:t>
+              <a:t> with workspace and "your time" line. One per student.</a:t>
             </a:r>
             <a:endParaRPr lang="en-US" sz="1200" dirty="0"/>
           </a:p>
@@ -4957,26 +7219,6 @@
               <a:buChar char="•"/>
             </a:pPr>
             <a:r>
-              <a:rPr lang="en-US" sz="1200" i="1" dirty="0">
-                <a:solidFill>
-                  <a:srgbClr val="1C2833"/>
-                </a:solidFill>
-                <a:latin typeface="Arial" pitchFamily="34" charset="0"/>
-                <a:ea typeface="Arial" pitchFamily="34" charset="-122"/>
-                <a:cs typeface="Arial" pitchFamily="34" charset="-120"/>
-              </a:rPr>
-              <a:t>deficit</a:t>
-            </a:r>
-            <a:pPr algn="l" indent="0" marL="0">
-              <a:lnSpc>
-                <a:spcPts val="1620"/>
-              </a:lnSpc>
-              <a:spcAft>
-                <a:spcPts val="300"/>
-              </a:spcAft>
-              <a:buNone/>
-            </a:pPr>
-            <a:r>
               <a:rPr lang="en-US" sz="1200" dirty="0">
                 <a:solidFill>
                   <a:srgbClr val="1C2833"/>
@@ -4985,7 +7227,7 @@
                 <a:ea typeface="Arial" pitchFamily="34" charset="-122"/>
                 <a:cs typeface="Arial" pitchFamily="34" charset="-120"/>
               </a:rPr>
-              <a:t> — how much a number falls short of the base (97 is 3 short of 100; deficit = 3).</a:t>
+              <a:t>Stopwatch or wall clock with a second hand. One per pair is enough.</a:t>
             </a:r>
             <a:endParaRPr lang="en-US" sz="1200" dirty="0"/>
           </a:p>
@@ -5001,26 +7243,6 @@
               <a:buChar char="•"/>
             </a:pPr>
             <a:r>
-              <a:rPr lang="en-US" sz="1200" i="1" dirty="0">
-                <a:solidFill>
-                  <a:srgbClr val="1C2833"/>
-                </a:solidFill>
-                <a:latin typeface="Arial" pitchFamily="34" charset="0"/>
-                <a:ea typeface="Arial" pitchFamily="34" charset="-122"/>
-                <a:cs typeface="Arial" pitchFamily="34" charset="-120"/>
-              </a:rPr>
-              <a:t>base</a:t>
-            </a:r>
-            <a:pPr algn="l" indent="0" marL="0">
-              <a:lnSpc>
-                <a:spcPts val="1620"/>
-              </a:lnSpc>
-              <a:spcAft>
-                <a:spcPts val="300"/>
-              </a:spcAft>
-              <a:buNone/>
-            </a:pPr>
-            <a:r>
               <a:rPr lang="en-US" sz="1200" dirty="0">
                 <a:solidFill>
                   <a:srgbClr val="1C2833"/>
@@ -5029,7 +7251,7 @@
                 <a:ea typeface="Arial" pitchFamily="34" charset="-122"/>
                 <a:cs typeface="Arial" pitchFamily="34" charset="-120"/>
               </a:rPr>
-              <a:t> — a power of 10 the two numbers are close to (here, 100).</a:t>
+              <a:t>Whiteboard with a single vertical dividing line drawn down the middle (the "Nikhilam split").</a:t>
             </a:r>
             <a:endParaRPr lang="en-US" sz="1200" dirty="0"/>
           </a:p>
@@ -5187,7 +7409,7 @@
                 <a:ea typeface="Georgia" pitchFamily="34" charset="-122"/>
                 <a:cs typeface="Georgia" pitchFamily="34" charset="-120"/>
               </a:rPr>
-              <a:t>Lesson flow</a:t>
+              <a:t>Vocabulary introduced today</a:t>
             </a:r>
             <a:endParaRPr lang="en-US" sz="1800" dirty="0"/>
           </a:p>
@@ -5196,6 +7418,200 @@
       <p:sp>
         <p:nvSpPr>
           <p:cNvPr id="4" name="Text 2"/>
+          <p:cNvSpPr/>
+          <p:nvPr/>
+        </p:nvSpPr>
+        <p:spPr>
+          <a:xfrm>
+            <a:off x="634901" y="883593"/>
+            <a:ext cx="8102798" cy="975122"/>
+          </a:xfrm>
+          <a:prstGeom prst="rect">
+            <a:avLst/>
+          </a:prstGeom>
+          <a:noFill/>
+          <a:ln/>
+        </p:spPr>
+        <p:txBody>
+          <a:bodyPr wrap="square" lIns="0" tIns="0" rIns="0" bIns="0" rtlCol="0" anchor="t"/>
+          <a:lstStyle/>
+          <a:p>
+            <a:pPr algn="l" marL="342900" indent="-342900">
+              <a:lnSpc>
+                <a:spcPts val="1620"/>
+              </a:lnSpc>
+              <a:spcAft>
+                <a:spcPts val="300"/>
+              </a:spcAft>
+              <a:buSzPct val="100000"/>
+              <a:buChar char="•"/>
+            </a:pPr>
+            <a:r>
+              <a:rPr lang="en-US" sz="1200" i="1" dirty="0">
+                <a:solidFill>
+                  <a:srgbClr val="1C2833"/>
+                </a:solidFill>
+                <a:latin typeface="Arial" pitchFamily="34" charset="0"/>
+                <a:ea typeface="Arial" pitchFamily="34" charset="-122"/>
+                <a:cs typeface="Arial" pitchFamily="34" charset="-120"/>
+              </a:rPr>
+              <a:t>Nikhilam</a:t>
+            </a:r>
+            <a:pPr algn="l" indent="0" marL="0">
+              <a:lnSpc>
+                <a:spcPts val="1620"/>
+              </a:lnSpc>
+              <a:spcAft>
+                <a:spcPts val="300"/>
+              </a:spcAft>
+              <a:buNone/>
+            </a:pPr>
+            <a:r>
+              <a:rPr lang="en-US" sz="1200" dirty="0">
+                <a:solidFill>
+                  <a:srgbClr val="1C2833"/>
+                </a:solidFill>
+                <a:latin typeface="Arial" pitchFamily="34" charset="0"/>
+                <a:ea typeface="Arial" pitchFamily="34" charset="-122"/>
+                <a:cs typeface="Arial" pitchFamily="34" charset="-120"/>
+              </a:rPr>
+              <a:t> (IAST: nikhilam; lit. "all" — short for </a:t>
+            </a:r>
+            <a:pPr algn="l" indent="0" marL="0">
+              <a:lnSpc>
+                <a:spcPts val="1620"/>
+              </a:lnSpc>
+              <a:spcAft>
+                <a:spcPts val="300"/>
+              </a:spcAft>
+              <a:buNone/>
+            </a:pPr>
+            <a:r>
+              <a:rPr lang="en-US" sz="1200" i="1" dirty="0">
+                <a:solidFill>
+                  <a:srgbClr val="1C2833"/>
+                </a:solidFill>
+                <a:latin typeface="Arial" pitchFamily="34" charset="0"/>
+                <a:ea typeface="Arial" pitchFamily="34" charset="-122"/>
+                <a:cs typeface="Arial" pitchFamily="34" charset="-120"/>
+              </a:rPr>
+              <a:t>Nikhilam Navataścaramaṁ Daśataḥ</a:t>
+            </a:r>
+            <a:pPr algn="l" indent="0" marL="0">
+              <a:lnSpc>
+                <a:spcPts val="1620"/>
+              </a:lnSpc>
+              <a:spcAft>
+                <a:spcPts val="300"/>
+              </a:spcAft>
+              <a:buNone/>
+            </a:pPr>
+            <a:r>
+              <a:rPr lang="en-US" sz="1200" dirty="0">
+                <a:solidFill>
+                  <a:srgbClr val="1C2833"/>
+                </a:solidFill>
+                <a:latin typeface="Arial" pitchFamily="34" charset="0"/>
+                <a:ea typeface="Arial" pitchFamily="34" charset="-122"/>
+                <a:cs typeface="Arial" pitchFamily="34" charset="-120"/>
+              </a:rPr>
+              <a:t>, "all from 9 and the last from 10") — Tirthaji's 2nd sūtra; here, the rule for multiplication near a base.</a:t>
+            </a:r>
+            <a:endParaRPr lang="en-US" sz="1200" dirty="0"/>
+          </a:p>
+          <a:p>
+            <a:pPr algn="l" marL="342900" indent="-342900">
+              <a:lnSpc>
+                <a:spcPts val="1620"/>
+              </a:lnSpc>
+              <a:spcAft>
+                <a:spcPts val="300"/>
+              </a:spcAft>
+              <a:buSzPct val="100000"/>
+              <a:buChar char="•"/>
+            </a:pPr>
+            <a:r>
+              <a:rPr lang="en-US" sz="1200" i="1" dirty="0">
+                <a:solidFill>
+                  <a:srgbClr val="1C2833"/>
+                </a:solidFill>
+                <a:latin typeface="Arial" pitchFamily="34" charset="0"/>
+                <a:ea typeface="Arial" pitchFamily="34" charset="-122"/>
+                <a:cs typeface="Arial" pitchFamily="34" charset="-120"/>
+              </a:rPr>
+              <a:t>deficit</a:t>
+            </a:r>
+            <a:pPr algn="l" indent="0" marL="0">
+              <a:lnSpc>
+                <a:spcPts val="1620"/>
+              </a:lnSpc>
+              <a:spcAft>
+                <a:spcPts val="300"/>
+              </a:spcAft>
+              <a:buNone/>
+            </a:pPr>
+            <a:r>
+              <a:rPr lang="en-US" sz="1200" dirty="0">
+                <a:solidFill>
+                  <a:srgbClr val="1C2833"/>
+                </a:solidFill>
+                <a:latin typeface="Arial" pitchFamily="34" charset="0"/>
+                <a:ea typeface="Arial" pitchFamily="34" charset="-122"/>
+                <a:cs typeface="Arial" pitchFamily="34" charset="-120"/>
+              </a:rPr>
+              <a:t> — how much a number falls short of the base (97 is 3 short of 100; deficit = 3).</a:t>
+            </a:r>
+            <a:endParaRPr lang="en-US" sz="1200" dirty="0"/>
+          </a:p>
+          <a:p>
+            <a:pPr algn="l" marL="342900" indent="-342900">
+              <a:lnSpc>
+                <a:spcPts val="1620"/>
+              </a:lnSpc>
+              <a:spcAft>
+                <a:spcPts val="300"/>
+              </a:spcAft>
+              <a:buSzPct val="100000"/>
+              <a:buChar char="•"/>
+            </a:pPr>
+            <a:r>
+              <a:rPr lang="en-US" sz="1200" i="1" dirty="0">
+                <a:solidFill>
+                  <a:srgbClr val="1C2833"/>
+                </a:solidFill>
+                <a:latin typeface="Arial" pitchFamily="34" charset="0"/>
+                <a:ea typeface="Arial" pitchFamily="34" charset="-122"/>
+                <a:cs typeface="Arial" pitchFamily="34" charset="-120"/>
+              </a:rPr>
+              <a:t>base</a:t>
+            </a:r>
+            <a:pPr algn="l" indent="0" marL="0">
+              <a:lnSpc>
+                <a:spcPts val="1620"/>
+              </a:lnSpc>
+              <a:spcAft>
+                <a:spcPts val="300"/>
+              </a:spcAft>
+              <a:buNone/>
+            </a:pPr>
+            <a:r>
+              <a:rPr lang="en-US" sz="1200" dirty="0">
+                <a:solidFill>
+                  <a:srgbClr val="1C2833"/>
+                </a:solidFill>
+                <a:latin typeface="Arial" pitchFamily="34" charset="0"/>
+                <a:ea typeface="Arial" pitchFamily="34" charset="-122"/>
+                <a:cs typeface="Arial" pitchFamily="34" charset="-120"/>
+              </a:rPr>
+              <a:t> — a power of 10 the two numbers are close to (here, 100).</a:t>
+            </a:r>
+            <a:endParaRPr lang="en-US" sz="1200" dirty="0"/>
+          </a:p>
+        </p:txBody>
+      </p:sp>
+      <p:sp>
+        <p:nvSpPr>
+          <p:cNvPr id="5" name="Text 3"/>
           <p:cNvSpPr/>
           <p:nvPr/>
         </p:nvSpPr>
@@ -5345,7 +7761,7 @@
                 <a:ea typeface="Georgia" pitchFamily="34" charset="-122"/>
                 <a:cs typeface="Georgia" pitchFamily="34" charset="-120"/>
               </a:rPr>
-              <a:t>Warm-up (5 min)</a:t>
+              <a:t>Lesson flow</a:t>
             </a:r>
             <a:endParaRPr lang="en-US" sz="1800" dirty="0"/>
           </a:p>
@@ -5354,123 +7770,6 @@
       <p:sp>
         <p:nvSpPr>
           <p:cNvPr id="4" name="Text 2"/>
-          <p:cNvSpPr/>
-          <p:nvPr/>
-        </p:nvSpPr>
-        <p:spPr>
-          <a:xfrm>
-            <a:off x="406301" y="870942"/>
-            <a:ext cx="8498026" cy="426541"/>
-          </a:xfrm>
-          <a:prstGeom prst="rect">
-            <a:avLst/>
-          </a:prstGeom>
-          <a:noFill/>
-          <a:ln/>
-        </p:spPr>
-        <p:txBody>
-          <a:bodyPr wrap="square" lIns="0" tIns="0" rIns="0" bIns="0" rtlCol="0" anchor="t"/>
-          <a:lstStyle/>
-          <a:p>
-            <a:pPr algn="l" indent="0" marL="0">
-              <a:lnSpc>
-                <a:spcPts val="1680"/>
-              </a:lnSpc>
-              <a:spcBef>
-                <a:spcPts val="300"/>
-              </a:spcBef>
-              <a:spcAft>
-                <a:spcPts val="300"/>
-              </a:spcAft>
-              <a:buNone/>
-            </a:pPr>
-            <a:r>
-              <a:rPr lang="en-US" sz="1200" dirty="0">
-                <a:solidFill>
-                  <a:srgbClr val="1C2833"/>
-                </a:solidFill>
-                <a:latin typeface="Arial" pitchFamily="34" charset="0"/>
-                <a:ea typeface="Arial" pitchFamily="34" charset="-122"/>
-                <a:cs typeface="Arial" pitchFamily="34" charset="-120"/>
-              </a:rPr>
-              <a:t>– Teacher: </a:t>
-            </a:r>
-            <a:pPr algn="l" indent="0" marL="0">
-              <a:lnSpc>
-                <a:spcPts val="1680"/>
-              </a:lnSpc>
-              <a:spcBef>
-                <a:spcPts val="300"/>
-              </a:spcBef>
-              <a:spcAft>
-                <a:spcPts val="300"/>
-              </a:spcAft>
-              <a:buNone/>
-            </a:pPr>
-            <a:r>
-              <a:rPr lang="en-US" sz="1200" i="1" dirty="0">
-                <a:solidFill>
-                  <a:srgbClr val="1C2833"/>
-                </a:solidFill>
-                <a:latin typeface="Arial" pitchFamily="34" charset="0"/>
-                <a:ea typeface="Arial" pitchFamily="34" charset="-122"/>
-                <a:cs typeface="Arial" pitchFamily="34" charset="-120"/>
-              </a:rPr>
-              <a:t>"How long does it take you to multiply 97 × 96?"</a:t>
-            </a:r>
-            <a:pPr algn="l" indent="0" marL="0">
-              <a:lnSpc>
-                <a:spcPts val="1680"/>
-              </a:lnSpc>
-              <a:spcBef>
-                <a:spcPts val="300"/>
-              </a:spcBef>
-              <a:spcAft>
-                <a:spcPts val="300"/>
-              </a:spcAft>
-              <a:buNone/>
-            </a:pPr>
-            <a:r>
-              <a:rPr lang="en-US" sz="1200" dirty="0">
-                <a:solidFill>
-                  <a:srgbClr val="1C2833"/>
-                </a:solidFill>
-                <a:latin typeface="Arial" pitchFamily="34" charset="0"/>
-                <a:ea typeface="Arial" pitchFamily="34" charset="-122"/>
-                <a:cs typeface="Arial" pitchFamily="34" charset="-120"/>
-              </a:rPr>
-              <a:t> Take 3–4 guesses. Write the range (e.g. "15 sec to 1 min"). – Teacher: </a:t>
-            </a:r>
-            <a:pPr algn="l" indent="0" marL="0">
-              <a:lnSpc>
-                <a:spcPts val="1680"/>
-              </a:lnSpc>
-              <a:spcBef>
-                <a:spcPts val="300"/>
-              </a:spcBef>
-              <a:spcAft>
-                <a:spcPts val="300"/>
-              </a:spcAft>
-              <a:buNone/>
-            </a:pPr>
-            <a:r>
-              <a:rPr lang="en-US" sz="1200" i="1" dirty="0">
-                <a:solidFill>
-                  <a:srgbClr val="1C2833"/>
-                </a:solidFill>
-                <a:latin typeface="Arial" pitchFamily="34" charset="0"/>
-                <a:ea typeface="Arial" pitchFamily="34" charset="-122"/>
-                <a:cs typeface="Arial" pitchFamily="34" charset="-120"/>
-              </a:rPr>
-              <a:t>"I'll show you a way to do it in under 5 seconds. Then we'll talk about why."</a:t>
-            </a:r>
-            <a:endParaRPr lang="en-US" sz="1200" dirty="0"/>
-          </a:p>
-        </p:txBody>
-      </p:sp>
-      <p:sp>
-        <p:nvSpPr>
-          <p:cNvPr id="5" name="Text 3"/>
           <p:cNvSpPr/>
           <p:nvPr/>
         </p:nvSpPr>
@@ -5620,7 +7919,7 @@
                 <a:ea typeface="Georgia" pitchFamily="34" charset="-122"/>
                 <a:cs typeface="Georgia" pitchFamily="34" charset="-120"/>
               </a:rPr>
-              <a:t>Baseline timing (10 min)</a:t>
+              <a:t>Warm-up (5 min)</a:t>
             </a:r>
             <a:endParaRPr lang="en-US" sz="1800" dirty="0"/>
           </a:p>
@@ -5634,8 +7933,8 @@
         </p:nvSpPr>
         <p:spPr>
           <a:xfrm>
-            <a:off x="406301" y="870942"/>
-            <a:ext cx="8498026" cy="649337"/>
+            <a:off x="634901" y="883593"/>
+            <a:ext cx="8102798" cy="525661"/>
           </a:xfrm>
           <a:prstGeom prst="rect">
             <a:avLst/>
@@ -5647,17 +7946,15 @@
           <a:bodyPr wrap="square" lIns="0" tIns="0" rIns="0" bIns="0" rtlCol="0" anchor="t"/>
           <a:lstStyle/>
           <a:p>
-            <a:pPr algn="l" indent="0" marL="0">
-              <a:lnSpc>
-                <a:spcPts val="1680"/>
-              </a:lnSpc>
-              <a:spcBef>
-                <a:spcPts val="300"/>
-              </a:spcBef>
-              <a:spcAft>
-                <a:spcPts val="300"/>
-              </a:spcAft>
-              <a:buNone/>
+            <a:pPr algn="l" marL="342900" indent="-342900">
+              <a:lnSpc>
+                <a:spcPts val="1620"/>
+              </a:lnSpc>
+              <a:spcAft>
+                <a:spcPts val="300"/>
+              </a:spcAft>
+              <a:buSzPct val="100000"/>
+              <a:buChar char="•"/>
             </a:pPr>
             <a:r>
               <a:rPr lang="en-US" sz="1200" dirty="0">
@@ -5668,15 +7965,32 @@
                 <a:ea typeface="Arial" pitchFamily="34" charset="-122"/>
                 <a:cs typeface="Arial" pitchFamily="34" charset="-120"/>
               </a:rPr>
-              <a:t>– Hand out the baseline sheet face-down. – Students write their name and predicted time on the back. – On "Go," flip and solve </a:t>
-            </a:r>
-            <a:pPr algn="l" indent="0" marL="0">
-              <a:lnSpc>
-                <a:spcPts val="1680"/>
-              </a:lnSpc>
-              <a:spcBef>
-                <a:spcPts val="300"/>
-              </a:spcBef>
+              <a:t>Teacher: </a:t>
+            </a:r>
+            <a:pPr algn="l" indent="0" marL="0">
+              <a:lnSpc>
+                <a:spcPts val="1620"/>
+              </a:lnSpc>
+              <a:spcAft>
+                <a:spcPts val="300"/>
+              </a:spcAft>
+              <a:buNone/>
+            </a:pPr>
+            <a:r>
+              <a:rPr lang="en-US" sz="1200" i="1" dirty="0">
+                <a:solidFill>
+                  <a:srgbClr val="1C2833"/>
+                </a:solidFill>
+                <a:latin typeface="Arial" pitchFamily="34" charset="0"/>
+                <a:ea typeface="Arial" pitchFamily="34" charset="-122"/>
+                <a:cs typeface="Arial" pitchFamily="34" charset="-120"/>
+              </a:rPr>
+              <a:t>"How long does it take you to multiply 97 × 96?"</a:t>
+            </a:r>
+            <a:pPr algn="l" indent="0" marL="0">
+              <a:lnSpc>
+                <a:spcPts val="1620"/>
+              </a:lnSpc>
               <a:spcAft>
                 <a:spcPts val="300"/>
               </a:spcAft>
@@ -5691,19 +8005,20 @@
                 <a:ea typeface="Arial" pitchFamily="34" charset="-122"/>
                 <a:cs typeface="Arial" pitchFamily="34" charset="-120"/>
               </a:rPr>
-              <a:t>97 × 96</a:t>
-            </a:r>
-            <a:pPr algn="l" indent="0" marL="0">
-              <a:lnSpc>
-                <a:spcPts val="1680"/>
-              </a:lnSpc>
-              <a:spcBef>
-                <a:spcPts val="300"/>
-              </a:spcBef>
-              <a:spcAft>
-                <a:spcPts val="300"/>
-              </a:spcAft>
-              <a:buNone/>
+              <a:t> Take 3–4 guesses. Write the range (e.g. "15 sec to 1 min").</a:t>
+            </a:r>
+            <a:endParaRPr lang="en-US" sz="1200" dirty="0"/>
+          </a:p>
+          <a:p>
+            <a:pPr algn="l" marL="342900" indent="-342900">
+              <a:lnSpc>
+                <a:spcPts val="1620"/>
+              </a:lnSpc>
+              <a:spcAft>
+                <a:spcPts val="300"/>
+              </a:spcAft>
+              <a:buSzPct val="100000"/>
+              <a:buChar char="•"/>
             </a:pPr>
             <a:r>
               <a:rPr lang="en-US" sz="1200" dirty="0">
@@ -5714,7 +8029,27 @@
                 <a:ea typeface="Arial" pitchFamily="34" charset="-122"/>
                 <a:cs typeface="Arial" pitchFamily="34" charset="-120"/>
               </a:rPr>
-              <a:t> using long multiplication. – Record actual time. Mark answer; honest self-correction. (Correct answer: 9312.) – Teacher walks around. Most will take 30–60 seconds. A few faster, a few slower.</a:t>
+              <a:t>Teacher: </a:t>
+            </a:r>
+            <a:pPr algn="l" indent="0" marL="0">
+              <a:lnSpc>
+                <a:spcPts val="1620"/>
+              </a:lnSpc>
+              <a:spcAft>
+                <a:spcPts val="300"/>
+              </a:spcAft>
+              <a:buNone/>
+            </a:pPr>
+            <a:r>
+              <a:rPr lang="en-US" sz="1200" i="1" dirty="0">
+                <a:solidFill>
+                  <a:srgbClr val="1C2833"/>
+                </a:solidFill>
+                <a:latin typeface="Arial" pitchFamily="34" charset="0"/>
+                <a:ea typeface="Arial" pitchFamily="34" charset="-122"/>
+                <a:cs typeface="Arial" pitchFamily="34" charset="-120"/>
+              </a:rPr>
+              <a:t>"I'll show you a way to do it in under 5 seconds. Then we'll talk about why."</a:t>
             </a:r>
             <a:endParaRPr lang="en-US" sz="1200" dirty="0"/>
           </a:p>
@@ -5872,7 +8207,7 @@
                 <a:ea typeface="Georgia" pitchFamily="34" charset="-122"/>
                 <a:cs typeface="Georgia" pitchFamily="34" charset="-120"/>
               </a:rPr>
-              <a:t>Teacher demonstration (10 min)</a:t>
+              <a:t>Baseline timing (10 min)</a:t>
             </a:r>
             <a:endParaRPr lang="en-US" sz="1800" dirty="0"/>
           </a:p>
@@ -5886,235 +8221,8 @@
         </p:nvSpPr>
         <p:spPr>
           <a:xfrm>
-            <a:off x="406301" y="870942"/>
-            <a:ext cx="8498026" cy="213271"/>
-          </a:xfrm>
-          <a:prstGeom prst="rect">
-            <a:avLst/>
-          </a:prstGeom>
-          <a:noFill/>
-          <a:ln/>
-        </p:spPr>
-        <p:txBody>
-          <a:bodyPr wrap="square" lIns="0" tIns="0" rIns="0" bIns="0" rtlCol="0" anchor="t"/>
-          <a:lstStyle/>
-          <a:p>
-            <a:pPr algn="l" indent="0" marL="0">
-              <a:lnSpc>
-                <a:spcPts val="1680"/>
-              </a:lnSpc>
-              <a:spcBef>
-                <a:spcPts val="300"/>
-              </a:spcBef>
-              <a:spcAft>
-                <a:spcPts val="300"/>
-              </a:spcAft>
-              <a:buNone/>
-            </a:pPr>
-            <a:r>
-              <a:rPr lang="en-US" sz="1200" dirty="0">
-                <a:solidFill>
-                  <a:srgbClr val="1C2833"/>
-                </a:solidFill>
-                <a:latin typeface="Arial" pitchFamily="34" charset="0"/>
-                <a:ea typeface="Arial" pitchFamily="34" charset="-122"/>
-                <a:cs typeface="Arial" pitchFamily="34" charset="-120"/>
-              </a:rPr>
-              <a:t>– On the board, write the problem:</a:t>
-            </a:r>
-            <a:endParaRPr lang="en-US" sz="1200" dirty="0"/>
-          </a:p>
-        </p:txBody>
-      </p:sp>
-      <p:sp>
-        <p:nvSpPr>
-          <p:cNvPr id="5" name="Text 3"/>
-          <p:cNvSpPr/>
-          <p:nvPr/>
-        </p:nvSpPr>
-        <p:spPr>
-          <a:xfrm>
-            <a:off x="406301" y="1173063"/>
-            <a:ext cx="8331398" cy="777627"/>
-          </a:xfrm>
-          <a:prstGeom prst="rect">
-            <a:avLst/>
-          </a:prstGeom>
-          <a:solidFill>
-            <a:srgbClr val="F4F8F9"/>
-          </a:solidFill>
-          <a:ln/>
-        </p:spPr>
-        <p:txBody>
-          <a:bodyPr wrap="square" rtlCol="0" anchor="ctr"/>
-          <a:lstStyle/>
-          <a:p>
-            <a:pPr indent="0" marL="0">
-              <a:buNone/>
-            </a:pPr>
-            <a:endParaRPr lang="en-US" dirty="0"/>
-          </a:p>
-        </p:txBody>
-      </p:sp>
-      <p:sp>
-        <p:nvSpPr>
-          <p:cNvPr id="6" name="Shape 4"/>
-          <p:cNvSpPr/>
-          <p:nvPr/>
-        </p:nvSpPr>
-        <p:spPr>
-          <a:xfrm>
-            <a:off x="430113" y="1173063"/>
-            <a:ext cx="0" cy="777627"/>
-          </a:xfrm>
-          <a:prstGeom prst="line">
-            <a:avLst/>
-          </a:prstGeom>
-          <a:noFill/>
-          <a:ln w="47625">
-            <a:solidFill>
-              <a:srgbClr val="277884"/>
-            </a:solidFill>
-            <a:prstDash val="solid"/>
-          </a:ln>
-        </p:spPr>
-      </p:sp>
-      <p:sp>
-        <p:nvSpPr>
-          <p:cNvPr id="7" name="Text 5"/>
-          <p:cNvSpPr/>
-          <p:nvPr/>
-        </p:nvSpPr>
-        <p:spPr>
-          <a:xfrm>
-            <a:off x="631627" y="1300014"/>
-            <a:ext cx="8086939" cy="174575"/>
-          </a:xfrm>
-          <a:prstGeom prst="rect">
-            <a:avLst/>
-          </a:prstGeom>
-          <a:noFill/>
-          <a:ln/>
-        </p:spPr>
-        <p:txBody>
-          <a:bodyPr wrap="square" lIns="0" tIns="0" rIns="0" bIns="0" rtlCol="0" anchor="t"/>
-          <a:lstStyle/>
-          <a:p>
-            <a:pPr algn="l" indent="0" marL="0">
-              <a:lnSpc>
-                <a:spcPts val="1375"/>
-              </a:lnSpc>
-              <a:buNone/>
-            </a:pPr>
-            <a:r>
-              <a:rPr lang="en-US" sz="1100" dirty="0">
-                <a:solidFill>
-                  <a:srgbClr val="1C2833"/>
-                </a:solidFill>
-                <a:latin typeface="Courier New" pitchFamily="34" charset="0"/>
-                <a:ea typeface="Courier New" pitchFamily="34" charset="-122"/>
-                <a:cs typeface="Courier New" pitchFamily="34" charset="-120"/>
-              </a:rPr>
-              <a:t>97  ← (3 below 100, deficit = 3)</a:t>
-            </a:r>
-            <a:endParaRPr lang="en-US" sz="1100" dirty="0"/>
-          </a:p>
-        </p:txBody>
-      </p:sp>
-      <p:sp>
-        <p:nvSpPr>
-          <p:cNvPr id="8" name="Text 6"/>
-          <p:cNvSpPr/>
-          <p:nvPr/>
-        </p:nvSpPr>
-        <p:spPr>
-          <a:xfrm>
-            <a:off x="631627" y="1474589"/>
-            <a:ext cx="8086939" cy="174575"/>
-          </a:xfrm>
-          <a:prstGeom prst="rect">
-            <a:avLst/>
-          </a:prstGeom>
-          <a:noFill/>
-          <a:ln/>
-        </p:spPr>
-        <p:txBody>
-          <a:bodyPr wrap="square" lIns="0" tIns="0" rIns="0" bIns="0" rtlCol="0" anchor="t"/>
-          <a:lstStyle/>
-          <a:p>
-            <a:pPr algn="l" indent="0" marL="0">
-              <a:lnSpc>
-                <a:spcPts val="1375"/>
-              </a:lnSpc>
-              <a:buNone/>
-            </a:pPr>
-            <a:r>
-              <a:rPr lang="en-US" sz="1100" dirty="0">
-                <a:solidFill>
-                  <a:srgbClr val="1C2833"/>
-                </a:solidFill>
-                <a:latin typeface="Courier New" pitchFamily="34" charset="0"/>
-                <a:ea typeface="Courier New" pitchFamily="34" charset="-122"/>
-                <a:cs typeface="Courier New" pitchFamily="34" charset="-120"/>
-              </a:rPr>
-              <a:t>× 96  ← (4 below 100, deficit = 4)</a:t>
-            </a:r>
-            <a:endParaRPr lang="en-US" sz="1100" dirty="0"/>
-          </a:p>
-        </p:txBody>
-      </p:sp>
-      <p:sp>
-        <p:nvSpPr>
-          <p:cNvPr id="9" name="Text 7"/>
-          <p:cNvSpPr/>
-          <p:nvPr/>
-        </p:nvSpPr>
-        <p:spPr>
-          <a:xfrm>
-            <a:off x="631627" y="1649164"/>
-            <a:ext cx="8086939" cy="174575"/>
-          </a:xfrm>
-          <a:prstGeom prst="rect">
-            <a:avLst/>
-          </a:prstGeom>
-          <a:noFill/>
-          <a:ln/>
-        </p:spPr>
-        <p:txBody>
-          <a:bodyPr wrap="square" lIns="0" tIns="0" rIns="0" bIns="0" rtlCol="0" anchor="t"/>
-          <a:lstStyle/>
-          <a:p>
-            <a:pPr algn="l" indent="0" marL="0">
-              <a:lnSpc>
-                <a:spcPts val="1375"/>
-              </a:lnSpc>
-              <a:buNone/>
-            </a:pPr>
-            <a:r>
-              <a:rPr lang="en-US" sz="1100" dirty="0">
-                <a:solidFill>
-                  <a:srgbClr val="1C2833"/>
-                </a:solidFill>
-                <a:latin typeface="Courier New" pitchFamily="34" charset="0"/>
-                <a:ea typeface="Courier New" pitchFamily="34" charset="-122"/>
-                <a:cs typeface="Courier New" pitchFamily="34" charset="-120"/>
-              </a:rPr>
-              <a:t>─────</a:t>
-            </a:r>
-            <a:endParaRPr lang="en-US" sz="1100" dirty="0"/>
-          </a:p>
-        </p:txBody>
-      </p:sp>
-      <p:sp>
-        <p:nvSpPr>
-          <p:cNvPr id="10" name="Text 8"/>
-          <p:cNvSpPr/>
-          <p:nvPr/>
-        </p:nvSpPr>
-        <p:spPr>
-          <a:xfrm>
-            <a:off x="634901" y="2052191"/>
-            <a:ext cx="8102798" cy="300930"/>
+            <a:off x="634901" y="883593"/>
+            <a:ext cx="8102798" cy="1276052"/>
           </a:xfrm>
           <a:prstGeom prst="rect">
             <a:avLst/>
@@ -6137,26 +8245,6 @@
               <a:buChar char="•"/>
             </a:pPr>
             <a:r>
-              <a:rPr lang="en-US" sz="1200" b="1" dirty="0">
-                <a:solidFill>
-                  <a:srgbClr val="1C2833"/>
-                </a:solidFill>
-                <a:latin typeface="Arial" pitchFamily="34" charset="0"/>
-                <a:ea typeface="Arial" pitchFamily="34" charset="-122"/>
-                <a:cs typeface="Arial" pitchFamily="34" charset="-120"/>
-              </a:rPr>
-              <a:t>Step 1: Find the deficits from 100.</a:t>
-            </a:r>
-            <a:pPr algn="l" indent="0" marL="0">
-              <a:lnSpc>
-                <a:spcPts val="1620"/>
-              </a:lnSpc>
-              <a:spcAft>
-                <a:spcPts val="300"/>
-              </a:spcAft>
-              <a:buNone/>
-            </a:pPr>
-            <a:r>
               <a:rPr lang="en-US" sz="1200" dirty="0">
                 <a:solidFill>
                   <a:srgbClr val="1C2833"/>
@@ -6165,249 +8253,10 @@
                 <a:ea typeface="Arial" pitchFamily="34" charset="-122"/>
                 <a:cs typeface="Arial" pitchFamily="34" charset="-120"/>
               </a:rPr>
-              <a:t> Write </a:t>
-            </a:r>
-            <a:pPr algn="l" indent="0" marL="0">
-              <a:lnSpc>
-                <a:spcPts val="1620"/>
-              </a:lnSpc>
-              <a:spcAft>
-                <a:spcPts val="300"/>
-              </a:spcAft>
-              <a:buNone/>
-            </a:pPr>
-            <a:r>
-              <a:rPr lang="en-US" sz="1200" dirty="0">
-                <a:solidFill>
-                  <a:srgbClr val="1C2833"/>
-                </a:solidFill>
-                <a:latin typeface="Arial" pitchFamily="34" charset="0"/>
-                <a:ea typeface="Arial" pitchFamily="34" charset="-122"/>
-                <a:cs typeface="Arial" pitchFamily="34" charset="-120"/>
-              </a:rPr>
-              <a:t>−3</a:t>
-            </a:r>
-            <a:pPr algn="l" indent="0" marL="0">
-              <a:lnSpc>
-                <a:spcPts val="1620"/>
-              </a:lnSpc>
-              <a:spcAft>
-                <a:spcPts val="300"/>
-              </a:spcAft>
-              <a:buNone/>
-            </a:pPr>
-            <a:r>
-              <a:rPr lang="en-US" sz="1200" dirty="0">
-                <a:solidFill>
-                  <a:srgbClr val="1C2833"/>
-                </a:solidFill>
-                <a:latin typeface="Arial" pitchFamily="34" charset="0"/>
-                <a:ea typeface="Arial" pitchFamily="34" charset="-122"/>
-                <a:cs typeface="Arial" pitchFamily="34" charset="-120"/>
-              </a:rPr>
-              <a:t> next to 97 and </a:t>
-            </a:r>
-            <a:pPr algn="l" indent="0" marL="0">
-              <a:lnSpc>
-                <a:spcPts val="1620"/>
-              </a:lnSpc>
-              <a:spcAft>
-                <a:spcPts val="300"/>
-              </a:spcAft>
-              <a:buNone/>
-            </a:pPr>
-            <a:r>
-              <a:rPr lang="en-US" sz="1200" dirty="0">
-                <a:solidFill>
-                  <a:srgbClr val="1C2833"/>
-                </a:solidFill>
-                <a:latin typeface="Arial" pitchFamily="34" charset="0"/>
-                <a:ea typeface="Arial" pitchFamily="34" charset="-122"/>
-                <a:cs typeface="Arial" pitchFamily="34" charset="-120"/>
-              </a:rPr>
-              <a:t>−4</a:t>
-            </a:r>
-            <a:pPr algn="l" indent="0" marL="0">
-              <a:lnSpc>
-                <a:spcPts val="1620"/>
-              </a:lnSpc>
-              <a:spcAft>
-                <a:spcPts val="300"/>
-              </a:spcAft>
-              <a:buNone/>
-            </a:pPr>
-            <a:r>
-              <a:rPr lang="en-US" sz="1200" dirty="0">
-                <a:solidFill>
-                  <a:srgbClr val="1C2833"/>
-                </a:solidFill>
-                <a:latin typeface="Arial" pitchFamily="34" charset="0"/>
-                <a:ea typeface="Arial" pitchFamily="34" charset="-122"/>
-                <a:cs typeface="Arial" pitchFamily="34" charset="-120"/>
-              </a:rPr>
-              <a:t> next to 96.</a:t>
+              <a:t>Hand out the baseline sheet face-down.</a:t>
             </a:r>
             <a:endParaRPr lang="en-US" sz="1200" dirty="0"/>
           </a:p>
-        </p:txBody>
-      </p:sp>
-      <p:sp>
-        <p:nvSpPr>
-          <p:cNvPr id="11" name="Text 9"/>
-          <p:cNvSpPr/>
-          <p:nvPr/>
-        </p:nvSpPr>
-        <p:spPr>
-          <a:xfrm>
-            <a:off x="406301" y="2454622"/>
-            <a:ext cx="8331398" cy="603052"/>
-          </a:xfrm>
-          <a:prstGeom prst="rect">
-            <a:avLst/>
-          </a:prstGeom>
-          <a:solidFill>
-            <a:srgbClr val="F4F8F9"/>
-          </a:solidFill>
-          <a:ln/>
-        </p:spPr>
-        <p:txBody>
-          <a:bodyPr wrap="square" rtlCol="0" anchor="ctr"/>
-          <a:lstStyle/>
-          <a:p>
-            <a:pPr indent="0" marL="0">
-              <a:buNone/>
-            </a:pPr>
-            <a:endParaRPr lang="en-US" dirty="0"/>
-          </a:p>
-        </p:txBody>
-      </p:sp>
-      <p:sp>
-        <p:nvSpPr>
-          <p:cNvPr id="12" name="Shape 10"/>
-          <p:cNvSpPr/>
-          <p:nvPr/>
-        </p:nvSpPr>
-        <p:spPr>
-          <a:xfrm>
-            <a:off x="430113" y="2454622"/>
-            <a:ext cx="0" cy="603052"/>
-          </a:xfrm>
-          <a:prstGeom prst="line">
-            <a:avLst/>
-          </a:prstGeom>
-          <a:noFill/>
-          <a:ln w="47625">
-            <a:solidFill>
-              <a:srgbClr val="277884"/>
-            </a:solidFill>
-            <a:prstDash val="solid"/>
-          </a:ln>
-        </p:spPr>
-      </p:sp>
-      <p:sp>
-        <p:nvSpPr>
-          <p:cNvPr id="13" name="Text 11"/>
-          <p:cNvSpPr/>
-          <p:nvPr/>
-        </p:nvSpPr>
-        <p:spPr>
-          <a:xfrm>
-            <a:off x="631627" y="2581573"/>
-            <a:ext cx="8086939" cy="174575"/>
-          </a:xfrm>
-          <a:prstGeom prst="rect">
-            <a:avLst/>
-          </a:prstGeom>
-          <a:noFill/>
-          <a:ln/>
-        </p:spPr>
-        <p:txBody>
-          <a:bodyPr wrap="square" lIns="0" tIns="0" rIns="0" bIns="0" rtlCol="0" anchor="t"/>
-          <a:lstStyle/>
-          <a:p>
-            <a:pPr algn="l" indent="0" marL="0">
-              <a:lnSpc>
-                <a:spcPts val="1375"/>
-              </a:lnSpc>
-              <a:buNone/>
-            </a:pPr>
-            <a:r>
-              <a:rPr lang="en-US" sz="1100" dirty="0">
-                <a:solidFill>
-                  <a:srgbClr val="1C2833"/>
-                </a:solidFill>
-                <a:latin typeface="Courier New" pitchFamily="34" charset="0"/>
-                <a:ea typeface="Courier New" pitchFamily="34" charset="-122"/>
-                <a:cs typeface="Courier New" pitchFamily="34" charset="-120"/>
-              </a:rPr>
-              <a:t>97 │ −3</a:t>
-            </a:r>
-            <a:endParaRPr lang="en-US" sz="1100" dirty="0"/>
-          </a:p>
-        </p:txBody>
-      </p:sp>
-      <p:sp>
-        <p:nvSpPr>
-          <p:cNvPr id="14" name="Text 12"/>
-          <p:cNvSpPr/>
-          <p:nvPr/>
-        </p:nvSpPr>
-        <p:spPr>
-          <a:xfrm>
-            <a:off x="631627" y="2756148"/>
-            <a:ext cx="8086939" cy="174575"/>
-          </a:xfrm>
-          <a:prstGeom prst="rect">
-            <a:avLst/>
-          </a:prstGeom>
-          <a:noFill/>
-          <a:ln/>
-        </p:spPr>
-        <p:txBody>
-          <a:bodyPr wrap="square" lIns="0" tIns="0" rIns="0" bIns="0" rtlCol="0" anchor="t"/>
-          <a:lstStyle/>
-          <a:p>
-            <a:pPr algn="l" indent="0" marL="0">
-              <a:lnSpc>
-                <a:spcPts val="1375"/>
-              </a:lnSpc>
-              <a:buNone/>
-            </a:pPr>
-            <a:r>
-              <a:rPr lang="en-US" sz="1100" dirty="0">
-                <a:solidFill>
-                  <a:srgbClr val="1C2833"/>
-                </a:solidFill>
-                <a:latin typeface="Courier New" pitchFamily="34" charset="0"/>
-                <a:ea typeface="Courier New" pitchFamily="34" charset="-122"/>
-                <a:cs typeface="Courier New" pitchFamily="34" charset="-120"/>
-              </a:rPr>
-              <a:t>96 │ −4</a:t>
-            </a:r>
-            <a:endParaRPr lang="en-US" sz="1100" dirty="0"/>
-          </a:p>
-        </p:txBody>
-      </p:sp>
-      <p:sp>
-        <p:nvSpPr>
-          <p:cNvPr id="15" name="Text 13"/>
-          <p:cNvSpPr/>
-          <p:nvPr/>
-        </p:nvSpPr>
-        <p:spPr>
-          <a:xfrm>
-            <a:off x="634901" y="3159175"/>
-            <a:ext cx="8102798" cy="487561"/>
-          </a:xfrm>
-          <a:prstGeom prst="rect">
-            <a:avLst/>
-          </a:prstGeom>
-          <a:noFill/>
-          <a:ln/>
-        </p:spPr>
-        <p:txBody>
-          <a:bodyPr wrap="square" lIns="0" tIns="0" rIns="0" bIns="0" rtlCol="0" anchor="t"/>
-          <a:lstStyle/>
           <a:p>
             <a:pPr algn="l" marL="342900" indent="-342900">
               <a:lnSpc>
@@ -6420,26 +8269,6 @@
               <a:buChar char="•"/>
             </a:pPr>
             <a:r>
-              <a:rPr lang="en-US" sz="1200" b="1" dirty="0">
-                <a:solidFill>
-                  <a:srgbClr val="1C2833"/>
-                </a:solidFill>
-                <a:latin typeface="Arial" pitchFamily="34" charset="0"/>
-                <a:ea typeface="Arial" pitchFamily="34" charset="-122"/>
-                <a:cs typeface="Arial" pitchFamily="34" charset="-120"/>
-              </a:rPr>
-              <a:t>Step 2: Cross-subtract for the LEFT part.</a:t>
-            </a:r>
-            <a:pPr algn="l" indent="0" marL="0">
-              <a:lnSpc>
-                <a:spcPts val="1620"/>
-              </a:lnSpc>
-              <a:spcAft>
-                <a:spcPts val="300"/>
-              </a:spcAft>
-              <a:buNone/>
-            </a:pPr>
-            <a:r>
               <a:rPr lang="en-US" sz="1200" dirty="0">
                 <a:solidFill>
                   <a:srgbClr val="1C2833"/>
@@ -6448,112 +8277,10 @@
                 <a:ea typeface="Arial" pitchFamily="34" charset="-122"/>
                 <a:cs typeface="Arial" pitchFamily="34" charset="-120"/>
               </a:rPr>
-              <a:t> "Take one number minus the </a:t>
-            </a:r>
-            <a:pPr algn="l" indent="0" marL="0">
-              <a:lnSpc>
-                <a:spcPts val="1620"/>
-              </a:lnSpc>
-              <a:spcAft>
-                <a:spcPts val="300"/>
-              </a:spcAft>
-              <a:buNone/>
-            </a:pPr>
-            <a:r>
-              <a:rPr lang="en-US" sz="1200" i="1" dirty="0">
-                <a:solidFill>
-                  <a:srgbClr val="1C2833"/>
-                </a:solidFill>
-                <a:latin typeface="Arial" pitchFamily="34" charset="0"/>
-                <a:ea typeface="Arial" pitchFamily="34" charset="-122"/>
-                <a:cs typeface="Arial" pitchFamily="34" charset="-120"/>
-              </a:rPr>
-              <a:t>other</a:t>
-            </a:r>
-            <a:pPr algn="l" indent="0" marL="0">
-              <a:lnSpc>
-                <a:spcPts val="1620"/>
-              </a:lnSpc>
-              <a:spcAft>
-                <a:spcPts val="300"/>
-              </a:spcAft>
-              <a:buNone/>
-            </a:pPr>
-            <a:r>
-              <a:rPr lang="en-US" sz="1200" dirty="0">
-                <a:solidFill>
-                  <a:srgbClr val="1C2833"/>
-                </a:solidFill>
-                <a:latin typeface="Arial" pitchFamily="34" charset="0"/>
-                <a:ea typeface="Arial" pitchFamily="34" charset="-122"/>
-                <a:cs typeface="Arial" pitchFamily="34" charset="-120"/>
-              </a:rPr>
-              <a:t> number's deficit. 97 − 4 = </a:t>
-            </a:r>
-            <a:pPr algn="l" indent="0" marL="0">
-              <a:lnSpc>
-                <a:spcPts val="1620"/>
-              </a:lnSpc>
-              <a:spcAft>
-                <a:spcPts val="300"/>
-              </a:spcAft>
-              <a:buNone/>
-            </a:pPr>
-            <a:r>
-              <a:rPr lang="en-US" sz="1200" b="1" dirty="0">
-                <a:solidFill>
-                  <a:srgbClr val="1C2833"/>
-                </a:solidFill>
-                <a:latin typeface="Arial" pitchFamily="34" charset="0"/>
-                <a:ea typeface="Arial" pitchFamily="34" charset="-122"/>
-                <a:cs typeface="Arial" pitchFamily="34" charset="-120"/>
-              </a:rPr>
-              <a:t>93</a:t>
-            </a:r>
-            <a:pPr algn="l" indent="0" marL="0">
-              <a:lnSpc>
-                <a:spcPts val="1620"/>
-              </a:lnSpc>
-              <a:spcAft>
-                <a:spcPts val="300"/>
-              </a:spcAft>
-              <a:buNone/>
-            </a:pPr>
-            <a:r>
-              <a:rPr lang="en-US" sz="1200" dirty="0">
-                <a:solidFill>
-                  <a:srgbClr val="1C2833"/>
-                </a:solidFill>
-                <a:latin typeface="Arial" pitchFamily="34" charset="0"/>
-                <a:ea typeface="Arial" pitchFamily="34" charset="-122"/>
-                <a:cs typeface="Arial" pitchFamily="34" charset="-120"/>
-              </a:rPr>
-              <a:t>. (Equivalently: 96 − 3 = 93. Either cross gives the same answer.)"</a:t>
+              <a:t>Students write their name and predicted time on the back.</a:t>
             </a:r>
             <a:endParaRPr lang="en-US" sz="1200" dirty="0"/>
           </a:p>
-        </p:txBody>
-      </p:sp>
-      <p:sp>
-        <p:nvSpPr>
-          <p:cNvPr id="16" name="Text 14"/>
-          <p:cNvSpPr/>
-          <p:nvPr/>
-        </p:nvSpPr>
-        <p:spPr>
-          <a:xfrm>
-            <a:off x="634901" y="3748236"/>
-            <a:ext cx="8102798" cy="281880"/>
-          </a:xfrm>
-          <a:prstGeom prst="rect">
-            <a:avLst/>
-          </a:prstGeom>
-          <a:noFill/>
-          <a:ln/>
-        </p:spPr>
-        <p:txBody>
-          <a:bodyPr wrap="square" lIns="0" tIns="0" rIns="0" bIns="0" rtlCol="0" anchor="t"/>
-          <a:lstStyle/>
           <a:p>
             <a:pPr algn="l" marL="342900" indent="-342900">
               <a:lnSpc>
@@ -6566,15 +8293,15 @@
               <a:buChar char="•"/>
             </a:pPr>
             <a:r>
-              <a:rPr lang="en-US" sz="1200" b="1" dirty="0">
-                <a:solidFill>
-                  <a:srgbClr val="1C2833"/>
-                </a:solidFill>
-                <a:latin typeface="Arial" pitchFamily="34" charset="0"/>
-                <a:ea typeface="Arial" pitchFamily="34" charset="-122"/>
-                <a:cs typeface="Arial" pitchFamily="34" charset="-120"/>
-              </a:rPr>
-              <a:t>Step 3: Multiply the deficits for the RIGHT part.</a:t>
+              <a:rPr lang="en-US" sz="1200" dirty="0">
+                <a:solidFill>
+                  <a:srgbClr val="1C2833"/>
+                </a:solidFill>
+                <a:latin typeface="Arial" pitchFamily="34" charset="0"/>
+                <a:ea typeface="Arial" pitchFamily="34" charset="-122"/>
+                <a:cs typeface="Arial" pitchFamily="34" charset="-120"/>
+              </a:rPr>
+              <a:t>On "Go," flip and solve </a:t>
             </a:r>
             <a:pPr algn="l" indent="0" marL="0">
               <a:lnSpc>
@@ -6594,7 +8321,7 @@
                 <a:ea typeface="Arial" pitchFamily="34" charset="-122"/>
                 <a:cs typeface="Arial" pitchFamily="34" charset="-120"/>
               </a:rPr>
-              <a:t> "3 × 4 = </a:t>
+              <a:t>97 × 96</a:t>
             </a:r>
             <a:pPr algn="l" indent="0" marL="0">
               <a:lnSpc>
@@ -6606,26 +8333,6 @@
               <a:buNone/>
             </a:pPr>
             <a:r>
-              <a:rPr lang="en-US" sz="1200" b="1" dirty="0">
-                <a:solidFill>
-                  <a:srgbClr val="1C2833"/>
-                </a:solidFill>
-                <a:latin typeface="Arial" pitchFamily="34" charset="0"/>
-                <a:ea typeface="Arial" pitchFamily="34" charset="-122"/>
-                <a:cs typeface="Arial" pitchFamily="34" charset="-120"/>
-              </a:rPr>
-              <a:t>12</a:t>
-            </a:r>
-            <a:pPr algn="l" indent="0" marL="0">
-              <a:lnSpc>
-                <a:spcPts val="1620"/>
-              </a:lnSpc>
-              <a:spcAft>
-                <a:spcPts val="300"/>
-              </a:spcAft>
-              <a:buNone/>
-            </a:pPr>
-            <a:r>
               <a:rPr lang="en-US" sz="1200" dirty="0">
                 <a:solidFill>
                   <a:srgbClr val="1C2833"/>
@@ -6634,32 +8341,10 @@
                 <a:ea typeface="Arial" pitchFamily="34" charset="-122"/>
                 <a:cs typeface="Arial" pitchFamily="34" charset="-120"/>
               </a:rPr>
-              <a:t>."</a:t>
+              <a:t> using long multiplication.</a:t>
             </a:r>
             <a:endParaRPr lang="en-US" sz="1200" dirty="0"/>
           </a:p>
-        </p:txBody>
-      </p:sp>
-      <p:sp>
-        <p:nvSpPr>
-          <p:cNvPr id="17" name="Text 15"/>
-          <p:cNvSpPr/>
-          <p:nvPr/>
-        </p:nvSpPr>
-        <p:spPr>
-          <a:xfrm>
-            <a:off x="634901" y="4131618"/>
-            <a:ext cx="8102798" cy="281880"/>
-          </a:xfrm>
-          <a:prstGeom prst="rect">
-            <a:avLst/>
-          </a:prstGeom>
-          <a:noFill/>
-          <a:ln/>
-        </p:spPr>
-        <p:txBody>
-          <a:bodyPr wrap="square" lIns="0" tIns="0" rIns="0" bIns="0" rtlCol="0" anchor="t"/>
-          <a:lstStyle/>
           <a:p>
             <a:pPr algn="l" marL="342900" indent="-342900">
               <a:lnSpc>
@@ -6672,26 +8357,6 @@
               <a:buChar char="•"/>
             </a:pPr>
             <a:r>
-              <a:rPr lang="en-US" sz="1200" b="1" dirty="0">
-                <a:solidFill>
-                  <a:srgbClr val="1C2833"/>
-                </a:solidFill>
-                <a:latin typeface="Arial" pitchFamily="34" charset="0"/>
-                <a:ea typeface="Arial" pitchFamily="34" charset="-122"/>
-                <a:cs typeface="Arial" pitchFamily="34" charset="-120"/>
-              </a:rPr>
-              <a:t>Step 4: Stick them together.</a:t>
-            </a:r>
-            <a:pPr algn="l" indent="0" marL="0">
-              <a:lnSpc>
-                <a:spcPts val="1620"/>
-              </a:lnSpc>
-              <a:spcAft>
-                <a:spcPts val="300"/>
-              </a:spcAft>
-              <a:buNone/>
-            </a:pPr>
-            <a:r>
               <a:rPr lang="en-US" sz="1200" dirty="0">
                 <a:solidFill>
                   <a:srgbClr val="1C2833"/>
@@ -6700,341 +8365,10 @@
                 <a:ea typeface="Arial" pitchFamily="34" charset="-122"/>
                 <a:cs typeface="Arial" pitchFamily="34" charset="-120"/>
               </a:rPr>
-              <a:t> "93 on the left, 12 on the right → </a:t>
-            </a:r>
-            <a:pPr algn="l" indent="0" marL="0">
-              <a:lnSpc>
-                <a:spcPts val="1620"/>
-              </a:lnSpc>
-              <a:spcAft>
-                <a:spcPts val="300"/>
-              </a:spcAft>
-              <a:buNone/>
-            </a:pPr>
-            <a:r>
-              <a:rPr lang="en-US" sz="1200" b="1" dirty="0">
-                <a:solidFill>
-                  <a:srgbClr val="1C2833"/>
-                </a:solidFill>
-                <a:latin typeface="Arial" pitchFamily="34" charset="0"/>
-                <a:ea typeface="Arial" pitchFamily="34" charset="-122"/>
-                <a:cs typeface="Arial" pitchFamily="34" charset="-120"/>
-              </a:rPr>
-              <a:t>9312</a:t>
-            </a:r>
-            <a:pPr algn="l" indent="0" marL="0">
-              <a:lnSpc>
-                <a:spcPts val="1620"/>
-              </a:lnSpc>
-              <a:spcAft>
-                <a:spcPts val="300"/>
-              </a:spcAft>
-              <a:buNone/>
-            </a:pPr>
-            <a:r>
-              <a:rPr lang="en-US" sz="1200" dirty="0">
-                <a:solidFill>
-                  <a:srgbClr val="1C2833"/>
-                </a:solidFill>
-                <a:latin typeface="Arial" pitchFamily="34" charset="0"/>
-                <a:ea typeface="Arial" pitchFamily="34" charset="-122"/>
-                <a:cs typeface="Arial" pitchFamily="34" charset="-120"/>
-              </a:rPr>
-              <a:t>."</a:t>
+              <a:t>Record actual time. Mark answer; honest self-correction. (Correct answer: 9312.)</a:t>
             </a:r>
             <a:endParaRPr lang="en-US" sz="1200" dirty="0"/>
           </a:p>
-        </p:txBody>
-      </p:sp>
-      <p:sp>
-        <p:nvSpPr>
-          <p:cNvPr id="18" name="Text 16"/>
-          <p:cNvSpPr/>
-          <p:nvPr/>
-        </p:nvSpPr>
-        <p:spPr>
-          <a:xfrm>
-            <a:off x="406301" y="4514999"/>
-            <a:ext cx="8331398" cy="952202"/>
-          </a:xfrm>
-          <a:prstGeom prst="rect">
-            <a:avLst/>
-          </a:prstGeom>
-          <a:solidFill>
-            <a:srgbClr val="F4F8F9"/>
-          </a:solidFill>
-          <a:ln/>
-        </p:spPr>
-        <p:txBody>
-          <a:bodyPr wrap="square" rtlCol="0" anchor="ctr"/>
-          <a:lstStyle/>
-          <a:p>
-            <a:pPr indent="0" marL="0">
-              <a:buNone/>
-            </a:pPr>
-            <a:endParaRPr lang="en-US" dirty="0"/>
-          </a:p>
-        </p:txBody>
-      </p:sp>
-      <p:sp>
-        <p:nvSpPr>
-          <p:cNvPr id="19" name="Shape 17"/>
-          <p:cNvSpPr/>
-          <p:nvPr/>
-        </p:nvSpPr>
-        <p:spPr>
-          <a:xfrm>
-            <a:off x="430113" y="4514999"/>
-            <a:ext cx="0" cy="952202"/>
-          </a:xfrm>
-          <a:prstGeom prst="line">
-            <a:avLst/>
-          </a:prstGeom>
-          <a:noFill/>
-          <a:ln w="47625">
-            <a:solidFill>
-              <a:srgbClr val="277884"/>
-            </a:solidFill>
-            <a:prstDash val="solid"/>
-          </a:ln>
-        </p:spPr>
-      </p:sp>
-      <p:sp>
-        <p:nvSpPr>
-          <p:cNvPr id="20" name="Text 18"/>
-          <p:cNvSpPr/>
-          <p:nvPr/>
-        </p:nvSpPr>
-        <p:spPr>
-          <a:xfrm>
-            <a:off x="631627" y="4641949"/>
-            <a:ext cx="8086939" cy="174575"/>
-          </a:xfrm>
-          <a:prstGeom prst="rect">
-            <a:avLst/>
-          </a:prstGeom>
-          <a:noFill/>
-          <a:ln/>
-        </p:spPr>
-        <p:txBody>
-          <a:bodyPr wrap="square" lIns="0" tIns="0" rIns="0" bIns="0" rtlCol="0" anchor="t"/>
-          <a:lstStyle/>
-          <a:p>
-            <a:pPr algn="l" indent="0" marL="0">
-              <a:lnSpc>
-                <a:spcPts val="1375"/>
-              </a:lnSpc>
-              <a:buNone/>
-            </a:pPr>
-            <a:r>
-              <a:rPr lang="en-US" sz="1100" dirty="0">
-                <a:solidFill>
-                  <a:srgbClr val="1C2833"/>
-                </a:solidFill>
-                <a:latin typeface="Courier New" pitchFamily="34" charset="0"/>
-                <a:ea typeface="Courier New" pitchFamily="34" charset="-122"/>
-                <a:cs typeface="Courier New" pitchFamily="34" charset="-120"/>
-              </a:rPr>
-              <a:t>97 │ −3</a:t>
-            </a:r>
-            <a:endParaRPr lang="en-US" sz="1100" dirty="0"/>
-          </a:p>
-        </p:txBody>
-      </p:sp>
-      <p:sp>
-        <p:nvSpPr>
-          <p:cNvPr id="21" name="Text 19"/>
-          <p:cNvSpPr/>
-          <p:nvPr/>
-        </p:nvSpPr>
-        <p:spPr>
-          <a:xfrm>
-            <a:off x="631627" y="4816525"/>
-            <a:ext cx="8086939" cy="174575"/>
-          </a:xfrm>
-          <a:prstGeom prst="rect">
-            <a:avLst/>
-          </a:prstGeom>
-          <a:noFill/>
-          <a:ln/>
-        </p:spPr>
-        <p:txBody>
-          <a:bodyPr wrap="square" lIns="0" tIns="0" rIns="0" bIns="0" rtlCol="0" anchor="t"/>
-          <a:lstStyle/>
-          <a:p>
-            <a:pPr algn="l" indent="0" marL="0">
-              <a:lnSpc>
-                <a:spcPts val="1375"/>
-              </a:lnSpc>
-              <a:buNone/>
-            </a:pPr>
-            <a:r>
-              <a:rPr lang="en-US" sz="1100" dirty="0">
-                <a:solidFill>
-                  <a:srgbClr val="1C2833"/>
-                </a:solidFill>
-                <a:latin typeface="Courier New" pitchFamily="34" charset="0"/>
-                <a:ea typeface="Courier New" pitchFamily="34" charset="-122"/>
-                <a:cs typeface="Courier New" pitchFamily="34" charset="-120"/>
-              </a:rPr>
-              <a:t>96 │ −4</a:t>
-            </a:r>
-            <a:endParaRPr lang="en-US" sz="1100" dirty="0"/>
-          </a:p>
-        </p:txBody>
-      </p:sp>
-      <p:sp>
-        <p:nvSpPr>
-          <p:cNvPr id="22" name="Text 20"/>
-          <p:cNvSpPr/>
-          <p:nvPr/>
-        </p:nvSpPr>
-        <p:spPr>
-          <a:xfrm>
-            <a:off x="631627" y="4991100"/>
-            <a:ext cx="8086939" cy="174575"/>
-          </a:xfrm>
-          <a:prstGeom prst="rect">
-            <a:avLst/>
-          </a:prstGeom>
-          <a:noFill/>
-          <a:ln/>
-        </p:spPr>
-        <p:txBody>
-          <a:bodyPr wrap="square" lIns="0" tIns="0" rIns="0" bIns="0" rtlCol="0" anchor="t"/>
-          <a:lstStyle/>
-          <a:p>
-            <a:pPr algn="l" indent="0" marL="0">
-              <a:lnSpc>
-                <a:spcPts val="1375"/>
-              </a:lnSpc>
-              <a:buNone/>
-            </a:pPr>
-            <a:r>
-              <a:rPr lang="en-US" sz="1100" dirty="0">
-                <a:solidFill>
-                  <a:srgbClr val="1C2833"/>
-                </a:solidFill>
-                <a:latin typeface="Courier New" pitchFamily="34" charset="0"/>
-                <a:ea typeface="Courier New" pitchFamily="34" charset="-122"/>
-                <a:cs typeface="Courier New" pitchFamily="34" charset="-120"/>
-              </a:rPr>
-              <a:t>─────┼────</a:t>
-            </a:r>
-            <a:endParaRPr lang="en-US" sz="1100" dirty="0"/>
-          </a:p>
-        </p:txBody>
-      </p:sp>
-      <p:sp>
-        <p:nvSpPr>
-          <p:cNvPr id="23" name="Text 21"/>
-          <p:cNvSpPr/>
-          <p:nvPr/>
-        </p:nvSpPr>
-        <p:spPr>
-          <a:xfrm>
-            <a:off x="631627" y="5165675"/>
-            <a:ext cx="8086939" cy="174575"/>
-          </a:xfrm>
-          <a:prstGeom prst="rect">
-            <a:avLst/>
-          </a:prstGeom>
-          <a:noFill/>
-          <a:ln/>
-        </p:spPr>
-        <p:txBody>
-          <a:bodyPr wrap="square" lIns="0" tIns="0" rIns="0" bIns="0" rtlCol="0" anchor="t"/>
-          <a:lstStyle/>
-          <a:p>
-            <a:pPr algn="l" indent="0" marL="0">
-              <a:lnSpc>
-                <a:spcPts val="1375"/>
-              </a:lnSpc>
-              <a:buNone/>
-            </a:pPr>
-            <a:r>
-              <a:rPr lang="en-US" sz="1100" dirty="0">
-                <a:solidFill>
-                  <a:srgbClr val="1C2833"/>
-                </a:solidFill>
-                <a:latin typeface="Courier New" pitchFamily="34" charset="0"/>
-                <a:ea typeface="Courier New" pitchFamily="34" charset="-122"/>
-                <a:cs typeface="Courier New" pitchFamily="34" charset="-120"/>
-              </a:rPr>
-              <a:t>93 │ 12      → 9312</a:t>
-            </a:r>
-            <a:endParaRPr lang="en-US" sz="1100" dirty="0"/>
-          </a:p>
-        </p:txBody>
-      </p:sp>
-      <p:sp>
-        <p:nvSpPr>
-          <p:cNvPr id="24" name="Text 22"/>
-          <p:cNvSpPr/>
-          <p:nvPr/>
-        </p:nvSpPr>
-        <p:spPr>
-          <a:xfrm>
-            <a:off x="406301" y="5556052"/>
-            <a:ext cx="8498026" cy="213271"/>
-          </a:xfrm>
-          <a:prstGeom prst="rect">
-            <a:avLst/>
-          </a:prstGeom>
-          <a:noFill/>
-          <a:ln/>
-        </p:spPr>
-        <p:txBody>
-          <a:bodyPr wrap="square" lIns="0" tIns="0" rIns="0" bIns="0" rtlCol="0" anchor="t"/>
-          <a:lstStyle/>
-          <a:p>
-            <a:pPr algn="l" indent="0" marL="0">
-              <a:lnSpc>
-                <a:spcPts val="1680"/>
-              </a:lnSpc>
-              <a:spcBef>
-                <a:spcPts val="300"/>
-              </a:spcBef>
-              <a:spcAft>
-                <a:spcPts val="300"/>
-              </a:spcAft>
-              <a:buNone/>
-            </a:pPr>
-            <a:r>
-              <a:rPr lang="en-US" sz="1200" dirty="0">
-                <a:solidFill>
-                  <a:srgbClr val="1C2833"/>
-                </a:solidFill>
-                <a:latin typeface="Arial" pitchFamily="34" charset="0"/>
-                <a:ea typeface="Arial" pitchFamily="34" charset="-122"/>
-                <a:cs typeface="Arial" pitchFamily="34" charset="-120"/>
-              </a:rPr>
-              <a:t>– Verify: long-multiplication gives 9312. ✓</a:t>
-            </a:r>
-            <a:endParaRPr lang="en-US" sz="1200" dirty="0"/>
-          </a:p>
-        </p:txBody>
-      </p:sp>
-      <p:sp>
-        <p:nvSpPr>
-          <p:cNvPr id="25" name="Text 23"/>
-          <p:cNvSpPr/>
-          <p:nvPr/>
-        </p:nvSpPr>
-        <p:spPr>
-          <a:xfrm>
-            <a:off x="634901" y="5858173"/>
-            <a:ext cx="8102798" cy="487561"/>
-          </a:xfrm>
-          <a:prstGeom prst="rect">
-            <a:avLst/>
-          </a:prstGeom>
-          <a:noFill/>
-          <a:ln/>
-        </p:spPr>
-        <p:txBody>
-          <a:bodyPr wrap="square" lIns="0" tIns="0" rIns="0" bIns="0" rtlCol="0" anchor="t"/>
-          <a:lstStyle/>
           <a:p>
             <a:pPr algn="l" marL="342900" indent="-342900">
               <a:lnSpc>
@@ -7047,15 +8381,15 @@
               <a:buChar char="•"/>
             </a:pPr>
             <a:r>
-              <a:rPr lang="en-US" sz="1200" i="1" dirty="0">
-                <a:solidFill>
-                  <a:srgbClr val="1C2833"/>
-                </a:solidFill>
-                <a:latin typeface="Arial" pitchFamily="34" charset="0"/>
-                <a:ea typeface="Arial" pitchFamily="34" charset="-122"/>
-                <a:cs typeface="Arial" pitchFamily="34" charset="-120"/>
-              </a:rPr>
-              <a:t>"I never multiplied any 2-digit number by another 2-digit number. I only did 97 − 4 and 3 × 4. That's the entire trick — when both numbers are near a base."</a:t>
+              <a:rPr lang="en-US" sz="1200" dirty="0">
+                <a:solidFill>
+                  <a:srgbClr val="1C2833"/>
+                </a:solidFill>
+                <a:latin typeface="Arial" pitchFamily="34" charset="0"/>
+                <a:ea typeface="Arial" pitchFamily="34" charset="-122"/>
+                <a:cs typeface="Arial" pitchFamily="34" charset="-120"/>
+              </a:rPr>
+              <a:t>Teacher walks around. Most will take 30–60 seconds. A few faster, a few slower.</a:t>
             </a:r>
             <a:endParaRPr lang="en-US" sz="1200" dirty="0"/>
           </a:p>
@@ -7063,13 +8397,13 @@
       </p:sp>
       <p:sp>
         <p:nvSpPr>
-          <p:cNvPr id="26" name="Text 24"/>
-          <p:cNvSpPr/>
-          <p:nvPr/>
-        </p:nvSpPr>
-        <p:spPr>
-          <a:xfrm>
-            <a:off x="406301" y="6510784"/>
+          <p:cNvPr id="5" name="Text 3"/>
+          <p:cNvSpPr/>
+          <p:nvPr/>
+        </p:nvSpPr>
+        <p:spPr>
+          <a:xfrm>
+            <a:off x="406301" y="4434929"/>
             <a:ext cx="8498026" cy="213271"/>
           </a:xfrm>
           <a:prstGeom prst="rect">
@@ -7213,7 +8547,7 @@
                 <a:ea typeface="Georgia" pitchFamily="34" charset="-122"/>
                 <a:cs typeface="Georgia" pitchFamily="34" charset="-120"/>
               </a:rPr>
-              <a:t>Activity (15 min) — First try</a:t>
+              <a:t>Teacher demonstration (10 min)</a:t>
             </a:r>
             <a:endParaRPr lang="en-US" sz="1800" dirty="0"/>
           </a:p>
@@ -7227,8 +8561,8 @@
         </p:nvSpPr>
         <p:spPr>
           <a:xfrm>
-            <a:off x="406301" y="870942"/>
-            <a:ext cx="8498026" cy="649337"/>
+            <a:off x="634901" y="883593"/>
+            <a:ext cx="8102798" cy="281880"/>
           </a:xfrm>
           <a:prstGeom prst="rect">
             <a:avLst/>
@@ -7240,17 +8574,15 @@
           <a:bodyPr wrap="square" lIns="0" tIns="0" rIns="0" bIns="0" rtlCol="0" anchor="t"/>
           <a:lstStyle/>
           <a:p>
-            <a:pPr algn="l" indent="0" marL="0">
-              <a:lnSpc>
-                <a:spcPts val="1680"/>
-              </a:lnSpc>
-              <a:spcBef>
-                <a:spcPts val="300"/>
-              </a:spcBef>
-              <a:spcAft>
-                <a:spcPts val="300"/>
-              </a:spcAft>
-              <a:buNone/>
+            <a:pPr algn="l" marL="342900" indent="-342900">
+              <a:lnSpc>
+                <a:spcPts val="1620"/>
+              </a:lnSpc>
+              <a:spcAft>
+                <a:spcPts val="300"/>
+              </a:spcAft>
+              <a:buSzPct val="100000"/>
+              <a:buChar char="•"/>
             </a:pPr>
             <a:r>
               <a:rPr lang="en-US" sz="1200" dirty="0">
@@ -7261,191 +8593,7 @@
                 <a:ea typeface="Arial" pitchFamily="34" charset="-122"/>
                 <a:cs typeface="Arial" pitchFamily="34" charset="-120"/>
               </a:rPr>
-              <a:t>– Hand each student a second sheet with four problems: - </a:t>
-            </a:r>
-            <a:pPr algn="l" indent="0" marL="0">
-              <a:lnSpc>
-                <a:spcPts val="1680"/>
-              </a:lnSpc>
-              <a:spcBef>
-                <a:spcPts val="300"/>
-              </a:spcBef>
-              <a:spcAft>
-                <a:spcPts val="300"/>
-              </a:spcAft>
-              <a:buNone/>
-            </a:pPr>
-            <a:r>
-              <a:rPr lang="en-US" sz="1200" dirty="0">
-                <a:solidFill>
-                  <a:srgbClr val="1C2833"/>
-                </a:solidFill>
-                <a:latin typeface="Arial" pitchFamily="34" charset="0"/>
-                <a:ea typeface="Arial" pitchFamily="34" charset="-122"/>
-                <a:cs typeface="Arial" pitchFamily="34" charset="-120"/>
-              </a:rPr>
-              <a:t>98 × 97</a:t>
-            </a:r>
-            <a:pPr algn="l" indent="0" marL="0">
-              <a:lnSpc>
-                <a:spcPts val="1680"/>
-              </a:lnSpc>
-              <a:spcBef>
-                <a:spcPts val="300"/>
-              </a:spcBef>
-              <a:spcAft>
-                <a:spcPts val="300"/>
-              </a:spcAft>
-              <a:buNone/>
-            </a:pPr>
-            <a:r>
-              <a:rPr lang="en-US" sz="1200" dirty="0">
-                <a:solidFill>
-                  <a:srgbClr val="1C2833"/>
-                </a:solidFill>
-                <a:latin typeface="Arial" pitchFamily="34" charset="0"/>
-                <a:ea typeface="Arial" pitchFamily="34" charset="-122"/>
-                <a:cs typeface="Arial" pitchFamily="34" charset="-120"/>
-              </a:rPr>
-              <a:t>, </a:t>
-            </a:r>
-            <a:pPr algn="l" indent="0" marL="0">
-              <a:lnSpc>
-                <a:spcPts val="1680"/>
-              </a:lnSpc>
-              <a:spcBef>
-                <a:spcPts val="300"/>
-              </a:spcBef>
-              <a:spcAft>
-                <a:spcPts val="300"/>
-              </a:spcAft>
-              <a:buNone/>
-            </a:pPr>
-            <a:r>
-              <a:rPr lang="en-US" sz="1200" dirty="0">
-                <a:solidFill>
-                  <a:srgbClr val="1C2833"/>
-                </a:solidFill>
-                <a:latin typeface="Arial" pitchFamily="34" charset="0"/>
-                <a:ea typeface="Arial" pitchFamily="34" charset="-122"/>
-                <a:cs typeface="Arial" pitchFamily="34" charset="-120"/>
-              </a:rPr>
-              <a:t>96 × 95</a:t>
-            </a:r>
-            <a:pPr algn="l" indent="0" marL="0">
-              <a:lnSpc>
-                <a:spcPts val="1680"/>
-              </a:lnSpc>
-              <a:spcBef>
-                <a:spcPts val="300"/>
-              </a:spcBef>
-              <a:spcAft>
-                <a:spcPts val="300"/>
-              </a:spcAft>
-              <a:buNone/>
-            </a:pPr>
-            <a:r>
-              <a:rPr lang="en-US" sz="1200" dirty="0">
-                <a:solidFill>
-                  <a:srgbClr val="1C2833"/>
-                </a:solidFill>
-                <a:latin typeface="Arial" pitchFamily="34" charset="0"/>
-                <a:ea typeface="Arial" pitchFamily="34" charset="-122"/>
-                <a:cs typeface="Arial" pitchFamily="34" charset="-120"/>
-              </a:rPr>
-              <a:t>, </a:t>
-            </a:r>
-            <a:pPr algn="l" indent="0" marL="0">
-              <a:lnSpc>
-                <a:spcPts val="1680"/>
-              </a:lnSpc>
-              <a:spcBef>
-                <a:spcPts val="300"/>
-              </a:spcBef>
-              <a:spcAft>
-                <a:spcPts val="300"/>
-              </a:spcAft>
-              <a:buNone/>
-            </a:pPr>
-            <a:r>
-              <a:rPr lang="en-US" sz="1200" dirty="0">
-                <a:solidFill>
-                  <a:srgbClr val="1C2833"/>
-                </a:solidFill>
-                <a:latin typeface="Arial" pitchFamily="34" charset="0"/>
-                <a:ea typeface="Arial" pitchFamily="34" charset="-122"/>
-                <a:cs typeface="Arial" pitchFamily="34" charset="-120"/>
-              </a:rPr>
-              <a:t>99 × 99</a:t>
-            </a:r>
-            <a:pPr algn="l" indent="0" marL="0">
-              <a:lnSpc>
-                <a:spcPts val="1680"/>
-              </a:lnSpc>
-              <a:spcBef>
-                <a:spcPts val="300"/>
-              </a:spcBef>
-              <a:spcAft>
-                <a:spcPts val="300"/>
-              </a:spcAft>
-              <a:buNone/>
-            </a:pPr>
-            <a:r>
-              <a:rPr lang="en-US" sz="1200" dirty="0">
-                <a:solidFill>
-                  <a:srgbClr val="1C2833"/>
-                </a:solidFill>
-                <a:latin typeface="Arial" pitchFamily="34" charset="0"/>
-                <a:ea typeface="Arial" pitchFamily="34" charset="-122"/>
-                <a:cs typeface="Arial" pitchFamily="34" charset="-120"/>
-              </a:rPr>
-              <a:t>, </a:t>
-            </a:r>
-            <a:pPr algn="l" indent="0" marL="0">
-              <a:lnSpc>
-                <a:spcPts val="1680"/>
-              </a:lnSpc>
-              <a:spcBef>
-                <a:spcPts val="300"/>
-              </a:spcBef>
-              <a:spcAft>
-                <a:spcPts val="300"/>
-              </a:spcAft>
-              <a:buNone/>
-            </a:pPr>
-            <a:r>
-              <a:rPr lang="en-US" sz="1200" dirty="0">
-                <a:solidFill>
-                  <a:srgbClr val="1C2833"/>
-                </a:solidFill>
-                <a:latin typeface="Arial" pitchFamily="34" charset="0"/>
-                <a:ea typeface="Arial" pitchFamily="34" charset="-122"/>
-                <a:cs typeface="Arial" pitchFamily="34" charset="-120"/>
-              </a:rPr>
-              <a:t>97 × 92</a:t>
-            </a:r>
-            <a:pPr algn="l" indent="0" marL="0">
-              <a:lnSpc>
-                <a:spcPts val="1680"/>
-              </a:lnSpc>
-              <a:spcBef>
-                <a:spcPts val="300"/>
-              </a:spcBef>
-              <a:spcAft>
-                <a:spcPts val="300"/>
-              </a:spcAft>
-              <a:buNone/>
-            </a:pPr>
-            <a:r>
-              <a:rPr lang="en-US" sz="1200" dirty="0">
-                <a:solidFill>
-                  <a:srgbClr val="1C2833"/>
-                </a:solidFill>
-                <a:latin typeface="Arial" pitchFamily="34" charset="0"/>
-                <a:ea typeface="Arial" pitchFamily="34" charset="-122"/>
-                <a:cs typeface="Arial" pitchFamily="34" charset="-120"/>
-              </a:rPr>
-              <a:t>. – Students try the Nikhilam method on each, then verify with long multiplication. – Time themselves. Expect mistakes and slow times on the first try.</a:t>
+              <a:t>On the board, write the problem:</a:t>
             </a:r>
             <a:endParaRPr lang="en-US" sz="1200" dirty="0"/>
           </a:p>
@@ -7454,6 +8602,185 @@
       <p:sp>
         <p:nvSpPr>
           <p:cNvPr id="5" name="Text 3"/>
+          <p:cNvSpPr/>
+          <p:nvPr/>
+        </p:nvSpPr>
+        <p:spPr>
+          <a:xfrm>
+            <a:off x="406301" y="1266974"/>
+            <a:ext cx="8331398" cy="777627"/>
+          </a:xfrm>
+          <a:prstGeom prst="rect">
+            <a:avLst/>
+          </a:prstGeom>
+          <a:solidFill>
+            <a:srgbClr val="F4F8F9"/>
+          </a:solidFill>
+          <a:ln/>
+        </p:spPr>
+        <p:txBody>
+          <a:bodyPr wrap="square" rtlCol="0" anchor="ctr"/>
+          <a:lstStyle/>
+          <a:p>
+            <a:pPr indent="0" marL="0">
+              <a:buNone/>
+            </a:pPr>
+            <a:endParaRPr lang="en-US" dirty="0"/>
+          </a:p>
+        </p:txBody>
+      </p:sp>
+      <p:sp>
+        <p:nvSpPr>
+          <p:cNvPr id="6" name="Shape 4"/>
+          <p:cNvSpPr/>
+          <p:nvPr/>
+        </p:nvSpPr>
+        <p:spPr>
+          <a:xfrm>
+            <a:off x="430113" y="1266974"/>
+            <a:ext cx="0" cy="777627"/>
+          </a:xfrm>
+          <a:prstGeom prst="line">
+            <a:avLst/>
+          </a:prstGeom>
+          <a:noFill/>
+          <a:ln w="47625">
+            <a:solidFill>
+              <a:srgbClr val="277884"/>
+            </a:solidFill>
+            <a:prstDash val="solid"/>
+          </a:ln>
+        </p:spPr>
+      </p:sp>
+      <p:sp>
+        <p:nvSpPr>
+          <p:cNvPr id="7" name="Text 5"/>
+          <p:cNvSpPr/>
+          <p:nvPr/>
+        </p:nvSpPr>
+        <p:spPr>
+          <a:xfrm>
+            <a:off x="631627" y="1393924"/>
+            <a:ext cx="8086939" cy="174575"/>
+          </a:xfrm>
+          <a:prstGeom prst="rect">
+            <a:avLst/>
+          </a:prstGeom>
+          <a:noFill/>
+          <a:ln/>
+        </p:spPr>
+        <p:txBody>
+          <a:bodyPr wrap="square" lIns="0" tIns="0" rIns="0" bIns="0" rtlCol="0" anchor="t"/>
+          <a:lstStyle/>
+          <a:p>
+            <a:pPr algn="l" indent="0" marL="0">
+              <a:lnSpc>
+                <a:spcPts val="1375"/>
+              </a:lnSpc>
+              <a:buNone/>
+            </a:pPr>
+            <a:r>
+              <a:rPr lang="en-US" sz="1100" dirty="0">
+                <a:solidFill>
+                  <a:srgbClr val="1C2833"/>
+                </a:solidFill>
+                <a:latin typeface="Courier New" pitchFamily="34" charset="0"/>
+                <a:ea typeface="Courier New" pitchFamily="34" charset="-122"/>
+                <a:cs typeface="Courier New" pitchFamily="34" charset="-120"/>
+              </a:rPr>
+              <a:t>97  ← (3 below 100, deficit = 3)</a:t>
+            </a:r>
+            <a:endParaRPr lang="en-US" sz="1100" dirty="0"/>
+          </a:p>
+        </p:txBody>
+      </p:sp>
+      <p:sp>
+        <p:nvSpPr>
+          <p:cNvPr id="8" name="Text 6"/>
+          <p:cNvSpPr/>
+          <p:nvPr/>
+        </p:nvSpPr>
+        <p:spPr>
+          <a:xfrm>
+            <a:off x="631627" y="1568500"/>
+            <a:ext cx="8086939" cy="174575"/>
+          </a:xfrm>
+          <a:prstGeom prst="rect">
+            <a:avLst/>
+          </a:prstGeom>
+          <a:noFill/>
+          <a:ln/>
+        </p:spPr>
+        <p:txBody>
+          <a:bodyPr wrap="square" lIns="0" tIns="0" rIns="0" bIns="0" rtlCol="0" anchor="t"/>
+          <a:lstStyle/>
+          <a:p>
+            <a:pPr algn="l" indent="0" marL="0">
+              <a:lnSpc>
+                <a:spcPts val="1375"/>
+              </a:lnSpc>
+              <a:buNone/>
+            </a:pPr>
+            <a:r>
+              <a:rPr lang="en-US" sz="1100" dirty="0">
+                <a:solidFill>
+                  <a:srgbClr val="1C2833"/>
+                </a:solidFill>
+                <a:latin typeface="Courier New" pitchFamily="34" charset="0"/>
+                <a:ea typeface="Courier New" pitchFamily="34" charset="-122"/>
+                <a:cs typeface="Courier New" pitchFamily="34" charset="-120"/>
+              </a:rPr>
+              <a:t>× 96  ← (4 below 100, deficit = 4)</a:t>
+            </a:r>
+            <a:endParaRPr lang="en-US" sz="1100" dirty="0"/>
+          </a:p>
+        </p:txBody>
+      </p:sp>
+      <p:sp>
+        <p:nvSpPr>
+          <p:cNvPr id="9" name="Text 7"/>
+          <p:cNvSpPr/>
+          <p:nvPr/>
+        </p:nvSpPr>
+        <p:spPr>
+          <a:xfrm>
+            <a:off x="631627" y="1743075"/>
+            <a:ext cx="8086939" cy="174575"/>
+          </a:xfrm>
+          <a:prstGeom prst="rect">
+            <a:avLst/>
+          </a:prstGeom>
+          <a:noFill/>
+          <a:ln/>
+        </p:spPr>
+        <p:txBody>
+          <a:bodyPr wrap="square" lIns="0" tIns="0" rIns="0" bIns="0" rtlCol="0" anchor="t"/>
+          <a:lstStyle/>
+          <a:p>
+            <a:pPr algn="l" indent="0" marL="0">
+              <a:lnSpc>
+                <a:spcPts val="1375"/>
+              </a:lnSpc>
+              <a:buNone/>
+            </a:pPr>
+            <a:r>
+              <a:rPr lang="en-US" sz="1100" dirty="0">
+                <a:solidFill>
+                  <a:srgbClr val="1C2833"/>
+                </a:solidFill>
+                <a:latin typeface="Courier New" pitchFamily="34" charset="0"/>
+                <a:ea typeface="Courier New" pitchFamily="34" charset="-122"/>
+                <a:cs typeface="Courier New" pitchFamily="34" charset="-120"/>
+              </a:rPr>
+              <a:t>─────</a:t>
+            </a:r>
+            <a:endParaRPr lang="en-US" sz="1100" dirty="0"/>
+          </a:p>
+        </p:txBody>
+      </p:sp>
+      <p:sp>
+        <p:nvSpPr>
+          <p:cNvPr id="10" name="Text 8"/>
           <p:cNvSpPr/>
           <p:nvPr/>
         </p:nvSpPr>
@@ -7603,7 +8930,7 @@
                 <a:ea typeface="Georgia" pitchFamily="34" charset="-122"/>
                 <a:cs typeface="Georgia" pitchFamily="34" charset="-120"/>
               </a:rPr>
-              <a:t>Wrap-up (5 min)</a:t>
+              <a:t>Teacher demonstration (10 min) (cont.)</a:t>
             </a:r>
             <a:endParaRPr lang="en-US" sz="1800" dirty="0"/>
           </a:p>
@@ -7617,8 +8944,8 @@
         </p:nvSpPr>
         <p:spPr>
           <a:xfrm>
-            <a:off x="406301" y="870942"/>
-            <a:ext cx="8498026" cy="426541"/>
+            <a:off x="634901" y="883593"/>
+            <a:ext cx="8102798" cy="300930"/>
           </a:xfrm>
           <a:prstGeom prst="rect">
             <a:avLst/>
@@ -7630,13 +8957,31 @@
           <a:bodyPr wrap="square" lIns="0" tIns="0" rIns="0" bIns="0" rtlCol="0" anchor="t"/>
           <a:lstStyle/>
           <a:p>
-            <a:pPr algn="l" indent="0" marL="0">
-              <a:lnSpc>
-                <a:spcPts val="1680"/>
-              </a:lnSpc>
-              <a:spcBef>
-                <a:spcPts val="300"/>
-              </a:spcBef>
+            <a:pPr algn="l" marL="342900" indent="-342900">
+              <a:lnSpc>
+                <a:spcPts val="1620"/>
+              </a:lnSpc>
+              <a:spcAft>
+                <a:spcPts val="300"/>
+              </a:spcAft>
+              <a:buSzPct val="100000"/>
+              <a:buChar char="•"/>
+            </a:pPr>
+            <a:r>
+              <a:rPr lang="en-US" sz="1200" b="1" dirty="0">
+                <a:solidFill>
+                  <a:srgbClr val="1C2833"/>
+                </a:solidFill>
+                <a:latin typeface="Arial" pitchFamily="34" charset="0"/>
+                <a:ea typeface="Arial" pitchFamily="34" charset="-122"/>
+                <a:cs typeface="Arial" pitchFamily="34" charset="-120"/>
+              </a:rPr>
+              <a:t>Step 1: Find the deficits from 100.</a:t>
+            </a:r>
+            <a:pPr algn="l" indent="0" marL="0">
+              <a:lnSpc>
+                <a:spcPts val="1620"/>
+              </a:lnSpc>
               <a:spcAft>
                 <a:spcPts val="300"/>
               </a:spcAft>
@@ -7651,38 +8996,12 @@
                 <a:ea typeface="Arial" pitchFamily="34" charset="-122"/>
                 <a:cs typeface="Arial" pitchFamily="34" charset="-120"/>
               </a:rPr>
-              <a:t>– Show of hands: who got at least one right with Nikhilam? Who was </a:t>
-            </a:r>
-            <a:pPr algn="l" indent="0" marL="0">
-              <a:lnSpc>
-                <a:spcPts val="1680"/>
-              </a:lnSpc>
-              <a:spcBef>
-                <a:spcPts val="300"/>
-              </a:spcBef>
-              <a:spcAft>
-                <a:spcPts val="300"/>
-              </a:spcAft>
-              <a:buNone/>
-            </a:pPr>
-            <a:r>
-              <a:rPr lang="en-US" sz="1200" i="1" dirty="0">
-                <a:solidFill>
-                  <a:srgbClr val="1C2833"/>
-                </a:solidFill>
-                <a:latin typeface="Arial" pitchFamily="34" charset="0"/>
-                <a:ea typeface="Arial" pitchFamily="34" charset="-122"/>
-                <a:cs typeface="Arial" pitchFamily="34" charset="-120"/>
-              </a:rPr>
-              <a:t>faster</a:t>
-            </a:r>
-            <a:pPr algn="l" indent="0" marL="0">
-              <a:lnSpc>
-                <a:spcPts val="1680"/>
-              </a:lnSpc>
-              <a:spcBef>
-                <a:spcPts val="300"/>
-              </a:spcBef>
+              <a:t> Write </a:t>
+            </a:r>
+            <a:pPr algn="l" indent="0" marL="0">
+              <a:lnSpc>
+                <a:spcPts val="1620"/>
+              </a:lnSpc>
               <a:spcAft>
                 <a:spcPts val="300"/>
               </a:spcAft>
@@ -7697,30 +9016,67 @@
                 <a:ea typeface="Arial" pitchFamily="34" charset="-122"/>
                 <a:cs typeface="Arial" pitchFamily="34" charset="-120"/>
               </a:rPr>
-              <a:t> with Nikhilam already? (Most won't be — yet.) – Preview Day 2: </a:t>
-            </a:r>
-            <a:pPr algn="l" indent="0" marL="0">
-              <a:lnSpc>
-                <a:spcPts val="1680"/>
-              </a:lnSpc>
-              <a:spcBef>
-                <a:spcPts val="300"/>
-              </a:spcBef>
-              <a:spcAft>
-                <a:spcPts val="300"/>
-              </a:spcAft>
-              <a:buNone/>
-            </a:pPr>
-            <a:r>
-              <a:rPr lang="en-US" sz="1200" i="1" dirty="0">
-                <a:solidFill>
-                  <a:srgbClr val="1C2833"/>
-                </a:solidFill>
-                <a:latin typeface="Arial" pitchFamily="34" charset="0"/>
-                <a:ea typeface="Arial" pitchFamily="34" charset="-122"/>
-                <a:cs typeface="Arial" pitchFamily="34" charset="-120"/>
-              </a:rPr>
-              <a:t>"Tomorrow we'll work on the foundational skill — instantly finding the deficit of any number from 10 or 100."</a:t>
+              <a:t>−3</a:t>
+            </a:r>
+            <a:pPr algn="l" indent="0" marL="0">
+              <a:lnSpc>
+                <a:spcPts val="1620"/>
+              </a:lnSpc>
+              <a:spcAft>
+                <a:spcPts val="300"/>
+              </a:spcAft>
+              <a:buNone/>
+            </a:pPr>
+            <a:r>
+              <a:rPr lang="en-US" sz="1200" dirty="0">
+                <a:solidFill>
+                  <a:srgbClr val="1C2833"/>
+                </a:solidFill>
+                <a:latin typeface="Arial" pitchFamily="34" charset="0"/>
+                <a:ea typeface="Arial" pitchFamily="34" charset="-122"/>
+                <a:cs typeface="Arial" pitchFamily="34" charset="-120"/>
+              </a:rPr>
+              <a:t> next to 97 and </a:t>
+            </a:r>
+            <a:pPr algn="l" indent="0" marL="0">
+              <a:lnSpc>
+                <a:spcPts val="1620"/>
+              </a:lnSpc>
+              <a:spcAft>
+                <a:spcPts val="300"/>
+              </a:spcAft>
+              <a:buNone/>
+            </a:pPr>
+            <a:r>
+              <a:rPr lang="en-US" sz="1200" dirty="0">
+                <a:solidFill>
+                  <a:srgbClr val="1C2833"/>
+                </a:solidFill>
+                <a:latin typeface="Arial" pitchFamily="34" charset="0"/>
+                <a:ea typeface="Arial" pitchFamily="34" charset="-122"/>
+                <a:cs typeface="Arial" pitchFamily="34" charset="-120"/>
+              </a:rPr>
+              <a:t>−4</a:t>
+            </a:r>
+            <a:pPr algn="l" indent="0" marL="0">
+              <a:lnSpc>
+                <a:spcPts val="1620"/>
+              </a:lnSpc>
+              <a:spcAft>
+                <a:spcPts val="300"/>
+              </a:spcAft>
+              <a:buNone/>
+            </a:pPr>
+            <a:r>
+              <a:rPr lang="en-US" sz="1200" dirty="0">
+                <a:solidFill>
+                  <a:srgbClr val="1C2833"/>
+                </a:solidFill>
+                <a:latin typeface="Arial" pitchFamily="34" charset="0"/>
+                <a:ea typeface="Arial" pitchFamily="34" charset="-122"/>
+                <a:cs typeface="Arial" pitchFamily="34" charset="-120"/>
+              </a:rPr>
+              <a:t> next to 96.</a:t>
             </a:r>
             <a:endParaRPr lang="en-US" sz="1200" dirty="0"/>
           </a:p>
@@ -7729,6 +9085,143 @@
       <p:sp>
         <p:nvSpPr>
           <p:cNvPr id="5" name="Text 3"/>
+          <p:cNvSpPr/>
+          <p:nvPr/>
+        </p:nvSpPr>
+        <p:spPr>
+          <a:xfrm>
+            <a:off x="406301" y="1286024"/>
+            <a:ext cx="8331398" cy="603052"/>
+          </a:xfrm>
+          <a:prstGeom prst="rect">
+            <a:avLst/>
+          </a:prstGeom>
+          <a:solidFill>
+            <a:srgbClr val="F4F8F9"/>
+          </a:solidFill>
+          <a:ln/>
+        </p:spPr>
+        <p:txBody>
+          <a:bodyPr wrap="square" rtlCol="0" anchor="ctr"/>
+          <a:lstStyle/>
+          <a:p>
+            <a:pPr indent="0" marL="0">
+              <a:buNone/>
+            </a:pPr>
+            <a:endParaRPr lang="en-US" dirty="0"/>
+          </a:p>
+        </p:txBody>
+      </p:sp>
+      <p:sp>
+        <p:nvSpPr>
+          <p:cNvPr id="6" name="Shape 4"/>
+          <p:cNvSpPr/>
+          <p:nvPr/>
+        </p:nvSpPr>
+        <p:spPr>
+          <a:xfrm>
+            <a:off x="430113" y="1286024"/>
+            <a:ext cx="0" cy="603052"/>
+          </a:xfrm>
+          <a:prstGeom prst="line">
+            <a:avLst/>
+          </a:prstGeom>
+          <a:noFill/>
+          <a:ln w="47625">
+            <a:solidFill>
+              <a:srgbClr val="277884"/>
+            </a:solidFill>
+            <a:prstDash val="solid"/>
+          </a:ln>
+        </p:spPr>
+      </p:sp>
+      <p:sp>
+        <p:nvSpPr>
+          <p:cNvPr id="7" name="Text 5"/>
+          <p:cNvSpPr/>
+          <p:nvPr/>
+        </p:nvSpPr>
+        <p:spPr>
+          <a:xfrm>
+            <a:off x="631627" y="1412974"/>
+            <a:ext cx="8086939" cy="174575"/>
+          </a:xfrm>
+          <a:prstGeom prst="rect">
+            <a:avLst/>
+          </a:prstGeom>
+          <a:noFill/>
+          <a:ln/>
+        </p:spPr>
+        <p:txBody>
+          <a:bodyPr wrap="square" lIns="0" tIns="0" rIns="0" bIns="0" rtlCol="0" anchor="t"/>
+          <a:lstStyle/>
+          <a:p>
+            <a:pPr algn="l" indent="0" marL="0">
+              <a:lnSpc>
+                <a:spcPts val="1375"/>
+              </a:lnSpc>
+              <a:buNone/>
+            </a:pPr>
+            <a:r>
+              <a:rPr lang="en-US" sz="1100" dirty="0">
+                <a:solidFill>
+                  <a:srgbClr val="1C2833"/>
+                </a:solidFill>
+                <a:latin typeface="Courier New" pitchFamily="34" charset="0"/>
+                <a:ea typeface="Courier New" pitchFamily="34" charset="-122"/>
+                <a:cs typeface="Courier New" pitchFamily="34" charset="-120"/>
+              </a:rPr>
+              <a:t>97 │ −3</a:t>
+            </a:r>
+            <a:endParaRPr lang="en-US" sz="1100" dirty="0"/>
+          </a:p>
+        </p:txBody>
+      </p:sp>
+      <p:sp>
+        <p:nvSpPr>
+          <p:cNvPr id="8" name="Text 6"/>
+          <p:cNvSpPr/>
+          <p:nvPr/>
+        </p:nvSpPr>
+        <p:spPr>
+          <a:xfrm>
+            <a:off x="631627" y="1587550"/>
+            <a:ext cx="8086939" cy="174575"/>
+          </a:xfrm>
+          <a:prstGeom prst="rect">
+            <a:avLst/>
+          </a:prstGeom>
+          <a:noFill/>
+          <a:ln/>
+        </p:spPr>
+        <p:txBody>
+          <a:bodyPr wrap="square" lIns="0" tIns="0" rIns="0" bIns="0" rtlCol="0" anchor="t"/>
+          <a:lstStyle/>
+          <a:p>
+            <a:pPr algn="l" indent="0" marL="0">
+              <a:lnSpc>
+                <a:spcPts val="1375"/>
+              </a:lnSpc>
+              <a:buNone/>
+            </a:pPr>
+            <a:r>
+              <a:rPr lang="en-US" sz="1100" dirty="0">
+                <a:solidFill>
+                  <a:srgbClr val="1C2833"/>
+                </a:solidFill>
+                <a:latin typeface="Courier New" pitchFamily="34" charset="0"/>
+                <a:ea typeface="Courier New" pitchFamily="34" charset="-122"/>
+                <a:cs typeface="Courier New" pitchFamily="34" charset="-120"/>
+              </a:rPr>
+              <a:t>96 │ −4</a:t>
+            </a:r>
+            <a:endParaRPr lang="en-US" sz="1100" dirty="0"/>
+          </a:p>
+        </p:txBody>
+      </p:sp>
+      <p:sp>
+        <p:nvSpPr>
+          <p:cNvPr id="9" name="Text 7"/>
           <p:cNvSpPr/>
           <p:nvPr/>
         </p:nvSpPr>
